--- a/PRODES_Press_Briefing.pptx
+++ b/PRODES_Press_Briefing.pptx
@@ -25,6 +25,12 @@
     <p:sldId id="273" r:id="rId24"/>
     <p:sldId id="274" r:id="rId25"/>
     <p:sldId id="275" r:id="rId26"/>
+    <p:sldId id="276" r:id="rId27"/>
+    <p:sldId id="277" r:id="rId28"/>
+    <p:sldId id="278" r:id="rId29"/>
+    <p:sldId id="279" r:id="rId30"/>
+    <p:sldId id="280" r:id="rId31"/>
+    <p:sldId id="281" r:id="rId32"/>
   </p:sldIdLst>
   <p:sldSz cx="9144000" cy="5143500" type="screen4x3"/>
   <p:notesSz cx="6858000" cy="9144000"/>
@@ -3415,7 +3421,7 @@
         <p:spPr>
           <a:xfrm>
             <a:off x="0" y="0"/>
-            <a:ext cx="9144000" cy="960120"/>
+            <a:ext cx="9144000" cy="50292"/>
           </a:xfrm>
           <a:prstGeom prst="rect">
             <a:avLst/>
@@ -3451,77 +3457,7 @@
       </p:sp>
       <p:sp>
         <p:nvSpPr>
-          <p:cNvPr id="3" name="TextBox 2"/>
-          <p:cNvSpPr txBox="1"/>
-          <p:nvPr/>
-        </p:nvSpPr>
-        <p:spPr>
-          <a:xfrm>
-            <a:off x="320040" y="73152"/>
-            <a:ext cx="8503920" cy="256032"/>
-          </a:xfrm>
-          <a:prstGeom prst="rect">
-            <a:avLst/>
-          </a:prstGeom>
-          <a:noFill/>
-        </p:spPr>
-        <p:txBody>
-          <a:bodyPr wrap="square">
-            <a:spAutoFit/>
-          </a:bodyPr>
-          <a:lstStyle/>
-          <a:p>
-            <a:pPr algn="l"/>
-            <a:r>
-              <a:rPr sz="700" b="1" i="0">
-                <a:solidFill>
-                  <a:srgbClr val="FFFFFF"/>
-                </a:solidFill>
-                <a:latin typeface="Arial"/>
-              </a:rPr>
-              <a:t>MENSAGENS-CHAVE</a:t>
-            </a:r>
-          </a:p>
-        </p:txBody>
-      </p:sp>
-      <p:sp>
-        <p:nvSpPr>
-          <p:cNvPr id="4" name="TextBox 3"/>
-          <p:cNvSpPr txBox="1"/>
-          <p:nvPr/>
-        </p:nvSpPr>
-        <p:spPr>
-          <a:xfrm>
-            <a:off x="320040" y="301752"/>
-            <a:ext cx="8503920" cy="566928"/>
-          </a:xfrm>
-          <a:prstGeom prst="rect">
-            <a:avLst/>
-          </a:prstGeom>
-          <a:noFill/>
-        </p:spPr>
-        <p:txBody>
-          <a:bodyPr wrap="square">
-            <a:spAutoFit/>
-          </a:bodyPr>
-          <a:lstStyle/>
-          <a:p>
-            <a:pPr algn="l"/>
-            <a:r>
-              <a:rPr sz="1400" b="1" i="0">
-                <a:solidFill>
-                  <a:srgbClr val="FFFFFF"/>
-                </a:solidFill>
-                <a:latin typeface="Arial"/>
-              </a:rPr>
-              <a:t>Três mensagens desta apresentação.</a:t>
-            </a:r>
-          </a:p>
-        </p:txBody>
-      </p:sp>
-      <p:sp>
-        <p:nvSpPr>
-          <p:cNvPr id="5" name="Rectangle 4"/>
+          <p:cNvPr id="3" name="Rectangle 2"/>
           <p:cNvSpPr/>
           <p:nvPr/>
         </p:nvSpPr>
@@ -3564,25 +3500,58 @@
       </p:sp>
       <p:sp>
         <p:nvSpPr>
-          <p:cNvPr id="6" name="Rectangle 5"/>
+          <p:cNvPr id="4" name="TextBox 3"/>
+          <p:cNvSpPr txBox="1"/>
+          <p:nvPr/>
+        </p:nvSpPr>
+        <p:spPr>
+          <a:xfrm>
+            <a:off x="320040" y="164592"/>
+            <a:ext cx="8503920" cy="256032"/>
+          </a:xfrm>
+          <a:prstGeom prst="rect">
+            <a:avLst/>
+          </a:prstGeom>
+          <a:noFill/>
+        </p:spPr>
+        <p:txBody>
+          <a:bodyPr wrap="square">
+            <a:spAutoFit/>
+          </a:bodyPr>
+          <a:lstStyle/>
+          <a:p>
+            <a:pPr algn="l"/>
+            <a:r>
+              <a:rPr sz="700" b="1" i="0">
+                <a:solidFill>
+                  <a:srgbClr val="1B5E20"/>
+                </a:solidFill>
+                <a:latin typeface="Arial"/>
+              </a:rPr>
+              <a:t>META 2028</a:t>
+            </a:r>
+          </a:p>
+        </p:txBody>
+      </p:sp>
+      <p:sp>
+        <p:nvSpPr>
+          <p:cNvPr id="5" name="Rectangle 4"/>
           <p:cNvSpPr/>
           <p:nvPr/>
         </p:nvSpPr>
         <p:spPr>
           <a:xfrm>
-            <a:off x="256032" y="1024128"/>
-            <a:ext cx="8631936" cy="1170432"/>
+            <a:off x="320040" y="429768"/>
+            <a:ext cx="8503920" cy="4572"/>
           </a:xfrm>
           <a:prstGeom prst="rect">
             <a:avLst/>
           </a:prstGeom>
           <a:solidFill>
-            <a:srgbClr val="F5F5F5"/>
+            <a:srgbClr val="E8E8E8"/>
           </a:solidFill>
-          <a:ln w="6350">
-            <a:solidFill>
-              <a:srgbClr val="E0E0E0"/>
-            </a:solidFill>
+          <a:ln>
+            <a:noFill/>
           </a:ln>
         </p:spPr>
         <p:style>
@@ -3609,82 +3578,98 @@
       </p:sp>
       <p:sp>
         <p:nvSpPr>
-          <p:cNvPr id="7" name="Rectangle 6"/>
-          <p:cNvSpPr/>
-          <p:nvPr/>
-        </p:nvSpPr>
-        <p:spPr>
-          <a:xfrm>
-            <a:off x="256032" y="1024128"/>
-            <a:ext cx="347472" cy="1170432"/>
-          </a:xfrm>
-          <a:prstGeom prst="rect">
-            <a:avLst/>
-          </a:prstGeom>
-          <a:solidFill>
-            <a:srgbClr val="1B5E20"/>
-          </a:solidFill>
-          <a:ln>
-            <a:noFill/>
-          </a:ln>
-        </p:spPr>
-        <p:style>
-          <a:lnRef idx="1">
-            <a:schemeClr val="accent1"/>
-          </a:lnRef>
-          <a:fillRef idx="3">
-            <a:schemeClr val="accent1"/>
-          </a:fillRef>
-          <a:effectRef idx="2">
-            <a:schemeClr val="accent1"/>
-          </a:effectRef>
-          <a:fontRef idx="minor">
-            <a:schemeClr val="lt1"/>
-          </a:fontRef>
-        </p:style>
-        <p:txBody>
-          <a:bodyPr rtlCol="0" anchor="ctr"/>
-          <a:lstStyle/>
-          <a:p>
-            <a:pPr algn="ctr"/>
-          </a:p>
-        </p:txBody>
-      </p:sp>
-      <p:sp>
-        <p:nvSpPr>
-          <p:cNvPr id="8" name="TextBox 7"/>
-          <p:cNvSpPr txBox="1"/>
-          <p:nvPr/>
-        </p:nvSpPr>
-        <p:spPr>
-          <a:xfrm>
-            <a:off x="265176" y="1371600"/>
-            <a:ext cx="329184" cy="457200"/>
-          </a:xfrm>
-          <a:prstGeom prst="rect">
-            <a:avLst/>
-          </a:prstGeom>
-          <a:noFill/>
-        </p:spPr>
-        <p:txBody>
-          <a:bodyPr wrap="square">
-            <a:spAutoFit/>
-          </a:bodyPr>
-          <a:lstStyle/>
-          <a:p>
-            <a:pPr algn="ctr"/>
-            <a:r>
-              <a:rPr sz="1800" b="1" i="0">
-                <a:solidFill>
-                  <a:srgbClr val="FFFFFF"/>
-                </a:solidFill>
-                <a:latin typeface="Arial"/>
-              </a:rPr>
-              <a:t>1</a:t>
-            </a:r>
-          </a:p>
-        </p:txBody>
-      </p:sp>
+          <p:cNvPr id="6" name="TextBox 5"/>
+          <p:cNvSpPr txBox="1"/>
+          <p:nvPr/>
+        </p:nvSpPr>
+        <p:spPr>
+          <a:xfrm>
+            <a:off x="320040" y="475488"/>
+            <a:ext cx="8503920" cy="777240"/>
+          </a:xfrm>
+          <a:prstGeom prst="rect">
+            <a:avLst/>
+          </a:prstGeom>
+          <a:noFill/>
+        </p:spPr>
+        <p:txBody>
+          <a:bodyPr wrap="square">
+            <a:spAutoFit/>
+          </a:bodyPr>
+          <a:lstStyle/>
+          <a:p>
+            <a:pPr algn="l"/>
+            <a:r>
+              <a:rPr sz="1350" b="1" i="0">
+                <a:solidFill>
+                  <a:srgbClr val="111111"/>
+                </a:solidFill>
+                <a:latin typeface="Arial"/>
+              </a:rPr>
+              <a:t>A meta de 4000 km² para 2028 exige reduzir mais 91%.</a:t>
+            </a:r>
+          </a:p>
+        </p:txBody>
+      </p:sp>
+      <p:sp>
+        <p:nvSpPr>
+          <p:cNvPr id="7" name="TextBox 6"/>
+          <p:cNvSpPr txBox="1"/>
+          <p:nvPr/>
+        </p:nvSpPr>
+        <p:spPr>
+          <a:xfrm>
+            <a:off x="320040" y="1234440"/>
+            <a:ext cx="8503920" cy="347472"/>
+          </a:xfrm>
+          <a:prstGeom prst="rect">
+            <a:avLst/>
+          </a:prstGeom>
+          <a:noFill/>
+        </p:spPr>
+        <p:txBody>
+          <a:bodyPr wrap="square">
+            <a:spAutoFit/>
+          </a:bodyPr>
+          <a:lstStyle/>
+          <a:p>
+            <a:pPr algn="l"/>
+            <a:r>
+              <a:rPr sz="850" b="0" i="0">
+                <a:solidFill>
+                  <a:srgbClr val="555555"/>
+                </a:solidFill>
+                <a:latin typeface="Arial"/>
+              </a:rPr>
+              <a:t>Trajetória observada e meta de redução (km²)  ·  2000–2028</a:t>
+            </a:r>
+          </a:p>
+        </p:txBody>
+      </p:sp>
+      <p:pic>
+        <p:nvPicPr>
+          <p:cNvPr id="8" name="Picture 7" descr="image.png"/>
+          <p:cNvPicPr>
+            <a:picLocks noChangeAspect="1"/>
+          </p:cNvPicPr>
+          <p:nvPr/>
+        </p:nvPicPr>
+        <p:blipFill>
+          <a:blip r:embed="rId2"/>
+          <a:stretch>
+            <a:fillRect/>
+          </a:stretch>
+        </p:blipFill>
+        <p:spPr>
+          <a:xfrm>
+            <a:off x="182880" y="1481328"/>
+            <a:ext cx="8778240" cy="3865529"/>
+          </a:xfrm>
+          <a:prstGeom prst="rect">
+            <a:avLst/>
+          </a:prstGeom>
+        </p:spPr>
+      </p:pic>
       <p:sp>
         <p:nvSpPr>
           <p:cNvPr id="9" name="TextBox 8"/>
@@ -3693,450 +3678,29 @@
         </p:nvSpPr>
         <p:spPr>
           <a:xfrm>
-            <a:off x="685800" y="1115568"/>
-            <a:ext cx="8092440" cy="384048"/>
-          </a:xfrm>
-          <a:prstGeom prst="rect">
-            <a:avLst/>
-          </a:prstGeom>
-          <a:noFill/>
-        </p:spPr>
-        <p:txBody>
-          <a:bodyPr wrap="square">
-            <a:spAutoFit/>
-          </a:bodyPr>
-          <a:lstStyle/>
-          <a:p>
-            <a:pPr algn="l"/>
-            <a:r>
-              <a:rPr sz="1100" b="1" i="0">
-                <a:solidFill>
-                  <a:srgbClr val="111111"/>
-                </a:solidFill>
-                <a:latin typeface="Arial"/>
-              </a:rPr>
-              <a:t>A queda de 99% é real — mas frágil.</a:t>
-            </a:r>
-          </a:p>
-        </p:txBody>
-      </p:sp>
-      <p:sp>
-        <p:nvSpPr>
-          <p:cNvPr id="10" name="TextBox 9"/>
-          <p:cNvSpPr txBox="1"/>
-          <p:nvPr/>
-        </p:nvSpPr>
-        <p:spPr>
-          <a:xfrm>
-            <a:off x="685800" y="1499616"/>
-            <a:ext cx="8092440" cy="594360"/>
-          </a:xfrm>
-          <a:prstGeom prst="rect">
-            <a:avLst/>
-          </a:prstGeom>
-          <a:noFill/>
-        </p:spPr>
-        <p:txBody>
-          <a:bodyPr wrap="square">
-            <a:spAutoFit/>
-          </a:bodyPr>
-          <a:lstStyle/>
-          <a:p>
-            <a:pPr algn="l"/>
-            <a:r>
-              <a:rPr sz="950" b="0" i="0">
-                <a:solidFill>
-                  <a:srgbClr val="555555"/>
-                </a:solidFill>
-                <a:latin typeface="Arial"/>
-              </a:rPr>
-              <a:t>A redução desde 2007 é histórica. Qualquer mudança na política de fiscalização pode revertê-la rapidamente.</a:t>
-            </a:r>
-          </a:p>
-        </p:txBody>
-      </p:sp>
-      <p:sp>
-        <p:nvSpPr>
-          <p:cNvPr id="11" name="Rectangle 10"/>
-          <p:cNvSpPr/>
-          <p:nvPr/>
-        </p:nvSpPr>
-        <p:spPr>
-          <a:xfrm>
-            <a:off x="256032" y="2322576"/>
-            <a:ext cx="8631936" cy="1170432"/>
-          </a:xfrm>
-          <a:prstGeom prst="rect">
-            <a:avLst/>
-          </a:prstGeom>
-          <a:solidFill>
-            <a:srgbClr val="F5F5F5"/>
-          </a:solidFill>
-          <a:ln w="6350">
-            <a:solidFill>
-              <a:srgbClr val="E0E0E0"/>
-            </a:solidFill>
-          </a:ln>
-        </p:spPr>
-        <p:style>
-          <a:lnRef idx="1">
-            <a:schemeClr val="accent1"/>
-          </a:lnRef>
-          <a:fillRef idx="3">
-            <a:schemeClr val="accent1"/>
-          </a:fillRef>
-          <a:effectRef idx="2">
-            <a:schemeClr val="accent1"/>
-          </a:effectRef>
-          <a:fontRef idx="minor">
-            <a:schemeClr val="lt1"/>
-          </a:fontRef>
-        </p:style>
-        <p:txBody>
-          <a:bodyPr rtlCol="0" anchor="ctr"/>
-          <a:lstStyle/>
-          <a:p>
-            <a:pPr algn="ctr"/>
-          </a:p>
-        </p:txBody>
-      </p:sp>
-      <p:sp>
-        <p:nvSpPr>
-          <p:cNvPr id="12" name="Rectangle 11"/>
-          <p:cNvSpPr/>
-          <p:nvPr/>
-        </p:nvSpPr>
-        <p:spPr>
-          <a:xfrm>
-            <a:off x="256032" y="2322576"/>
-            <a:ext cx="347472" cy="1170432"/>
-          </a:xfrm>
-          <a:prstGeom prst="rect">
-            <a:avLst/>
-          </a:prstGeom>
-          <a:solidFill>
-            <a:srgbClr val="1B5E20"/>
-          </a:solidFill>
-          <a:ln>
-            <a:noFill/>
-          </a:ln>
-        </p:spPr>
-        <p:style>
-          <a:lnRef idx="1">
-            <a:schemeClr val="accent1"/>
-          </a:lnRef>
-          <a:fillRef idx="3">
-            <a:schemeClr val="accent1"/>
-          </a:fillRef>
-          <a:effectRef idx="2">
-            <a:schemeClr val="accent1"/>
-          </a:effectRef>
-          <a:fontRef idx="minor">
-            <a:schemeClr val="lt1"/>
-          </a:fontRef>
-        </p:style>
-        <p:txBody>
-          <a:bodyPr rtlCol="0" anchor="ctr"/>
-          <a:lstStyle/>
-          <a:p>
-            <a:pPr algn="ctr"/>
-          </a:p>
-        </p:txBody>
-      </p:sp>
-      <p:sp>
-        <p:nvSpPr>
-          <p:cNvPr id="13" name="TextBox 12"/>
-          <p:cNvSpPr txBox="1"/>
-          <p:nvPr/>
-        </p:nvSpPr>
-        <p:spPr>
-          <a:xfrm>
-            <a:off x="265176" y="2670048"/>
-            <a:ext cx="329184" cy="457200"/>
-          </a:xfrm>
-          <a:prstGeom prst="rect">
-            <a:avLst/>
-          </a:prstGeom>
-          <a:noFill/>
-        </p:spPr>
-        <p:txBody>
-          <a:bodyPr wrap="square">
-            <a:spAutoFit/>
-          </a:bodyPr>
-          <a:lstStyle/>
-          <a:p>
-            <a:pPr algn="ctr"/>
-            <a:r>
-              <a:rPr sz="1800" b="1" i="0">
-                <a:solidFill>
-                  <a:srgbClr val="FFFFFF"/>
-                </a:solidFill>
-                <a:latin typeface="Arial"/>
-              </a:rPr>
-              <a:t>2</a:t>
-            </a:r>
-          </a:p>
-        </p:txBody>
-      </p:sp>
-      <p:sp>
-        <p:nvSpPr>
-          <p:cNvPr id="14" name="TextBox 13"/>
-          <p:cNvSpPr txBox="1"/>
-          <p:nvPr/>
-        </p:nvSpPr>
-        <p:spPr>
-          <a:xfrm>
-            <a:off x="685800" y="2414016"/>
-            <a:ext cx="8092440" cy="384048"/>
-          </a:xfrm>
-          <a:prstGeom prst="rect">
-            <a:avLst/>
-          </a:prstGeom>
-          <a:noFill/>
-        </p:spPr>
-        <p:txBody>
-          <a:bodyPr wrap="square">
-            <a:spAutoFit/>
-          </a:bodyPr>
-          <a:lstStyle/>
-          <a:p>
-            <a:pPr algn="l"/>
-            <a:r>
-              <a:rPr sz="1100" b="1" i="0">
-                <a:solidFill>
-                  <a:srgbClr val="111111"/>
-                </a:solidFill>
-                <a:latin typeface="Arial"/>
-              </a:rPr>
-              <a:t>O Cerrado está em crise silenciosa.</a:t>
-            </a:r>
-          </a:p>
-        </p:txBody>
-      </p:sp>
-      <p:sp>
-        <p:nvSpPr>
-          <p:cNvPr id="15" name="TextBox 14"/>
-          <p:cNvSpPr txBox="1"/>
-          <p:nvPr/>
-        </p:nvSpPr>
-        <p:spPr>
-          <a:xfrm>
-            <a:off x="685800" y="2798064"/>
-            <a:ext cx="8092440" cy="594360"/>
-          </a:xfrm>
-          <a:prstGeom prst="rect">
-            <a:avLst/>
-          </a:prstGeom>
-          <a:noFill/>
-        </p:spPr>
-        <p:txBody>
-          <a:bodyPr wrap="square">
-            <a:spAutoFit/>
-          </a:bodyPr>
-          <a:lstStyle/>
-          <a:p>
-            <a:pPr algn="l"/>
-            <a:r>
-              <a:rPr sz="950" b="0" i="0">
-                <a:solidFill>
-                  <a:srgbClr val="555555"/>
-                </a:solidFill>
-                <a:latin typeface="Arial"/>
-              </a:rPr>
-              <a:t>Perde tanto quanto a Amazônia, tem 53% de cobertura original e recebe proporcionalmente muito menos recursos e atenção.</a:t>
-            </a:r>
-          </a:p>
-        </p:txBody>
-      </p:sp>
-      <p:sp>
-        <p:nvSpPr>
-          <p:cNvPr id="16" name="Rectangle 15"/>
-          <p:cNvSpPr/>
-          <p:nvPr/>
-        </p:nvSpPr>
-        <p:spPr>
-          <a:xfrm>
-            <a:off x="256032" y="3621024"/>
-            <a:ext cx="8631936" cy="1170432"/>
-          </a:xfrm>
-          <a:prstGeom prst="rect">
-            <a:avLst/>
-          </a:prstGeom>
-          <a:solidFill>
-            <a:srgbClr val="F5F5F5"/>
-          </a:solidFill>
-          <a:ln w="6350">
-            <a:solidFill>
-              <a:srgbClr val="E0E0E0"/>
-            </a:solidFill>
-          </a:ln>
-        </p:spPr>
-        <p:style>
-          <a:lnRef idx="1">
-            <a:schemeClr val="accent1"/>
-          </a:lnRef>
-          <a:fillRef idx="3">
-            <a:schemeClr val="accent1"/>
-          </a:fillRef>
-          <a:effectRef idx="2">
-            <a:schemeClr val="accent1"/>
-          </a:effectRef>
-          <a:fontRef idx="minor">
-            <a:schemeClr val="lt1"/>
-          </a:fontRef>
-        </p:style>
-        <p:txBody>
-          <a:bodyPr rtlCol="0" anchor="ctr"/>
-          <a:lstStyle/>
-          <a:p>
-            <a:pPr algn="ctr"/>
-          </a:p>
-        </p:txBody>
-      </p:sp>
-      <p:sp>
-        <p:nvSpPr>
-          <p:cNvPr id="17" name="Rectangle 16"/>
-          <p:cNvSpPr/>
-          <p:nvPr/>
-        </p:nvSpPr>
-        <p:spPr>
-          <a:xfrm>
-            <a:off x="256032" y="3621024"/>
-            <a:ext cx="347472" cy="1170432"/>
-          </a:xfrm>
-          <a:prstGeom prst="rect">
-            <a:avLst/>
-          </a:prstGeom>
-          <a:solidFill>
-            <a:srgbClr val="1B5E20"/>
-          </a:solidFill>
-          <a:ln>
-            <a:noFill/>
-          </a:ln>
-        </p:spPr>
-        <p:style>
-          <a:lnRef idx="1">
-            <a:schemeClr val="accent1"/>
-          </a:lnRef>
-          <a:fillRef idx="3">
-            <a:schemeClr val="accent1"/>
-          </a:fillRef>
-          <a:effectRef idx="2">
-            <a:schemeClr val="accent1"/>
-          </a:effectRef>
-          <a:fontRef idx="minor">
-            <a:schemeClr val="lt1"/>
-          </a:fontRef>
-        </p:style>
-        <p:txBody>
-          <a:bodyPr rtlCol="0" anchor="ctr"/>
-          <a:lstStyle/>
-          <a:p>
-            <a:pPr algn="ctr"/>
-          </a:p>
-        </p:txBody>
-      </p:sp>
-      <p:sp>
-        <p:nvSpPr>
-          <p:cNvPr id="18" name="TextBox 17"/>
-          <p:cNvSpPr txBox="1"/>
-          <p:nvPr/>
-        </p:nvSpPr>
-        <p:spPr>
-          <a:xfrm>
-            <a:off x="265176" y="3968496"/>
-            <a:ext cx="329184" cy="457200"/>
-          </a:xfrm>
-          <a:prstGeom prst="rect">
-            <a:avLst/>
-          </a:prstGeom>
-          <a:noFill/>
-        </p:spPr>
-        <p:txBody>
-          <a:bodyPr wrap="square">
-            <a:spAutoFit/>
-          </a:bodyPr>
-          <a:lstStyle/>
-          <a:p>
-            <a:pPr algn="ctr"/>
-            <a:r>
-              <a:rPr sz="1800" b="1" i="0">
-                <a:solidFill>
-                  <a:srgbClr val="FFFFFF"/>
-                </a:solidFill>
-                <a:latin typeface="Arial"/>
-              </a:rPr>
-              <a:t>3</a:t>
-            </a:r>
-          </a:p>
-        </p:txBody>
-      </p:sp>
-      <p:sp>
-        <p:nvSpPr>
-          <p:cNvPr id="19" name="TextBox 18"/>
-          <p:cNvSpPr txBox="1"/>
-          <p:nvPr/>
-        </p:nvSpPr>
-        <p:spPr>
-          <a:xfrm>
-            <a:off x="685800" y="3712463"/>
-            <a:ext cx="8092440" cy="384048"/>
-          </a:xfrm>
-          <a:prstGeom prst="rect">
-            <a:avLst/>
-          </a:prstGeom>
-          <a:noFill/>
-        </p:spPr>
-        <p:txBody>
-          <a:bodyPr wrap="square">
-            <a:spAutoFit/>
-          </a:bodyPr>
-          <a:lstStyle/>
-          <a:p>
-            <a:pPr algn="l"/>
-            <a:r>
-              <a:rPr sz="1100" b="1" i="0">
-                <a:solidFill>
-                  <a:srgbClr val="111111"/>
-                </a:solidFill>
-                <a:latin typeface="Arial"/>
-              </a:rPr>
-              <a:t>A meta de 4.000 km² em 2028 exige ação agora.</a:t>
-            </a:r>
-          </a:p>
-        </p:txBody>
-      </p:sp>
-      <p:sp>
-        <p:nvSpPr>
-          <p:cNvPr id="20" name="TextBox 19"/>
-          <p:cNvSpPr txBox="1"/>
-          <p:nvPr/>
-        </p:nvSpPr>
-        <p:spPr>
-          <a:xfrm>
-            <a:off x="685800" y="4096512"/>
-            <a:ext cx="8092440" cy="594360"/>
-          </a:xfrm>
-          <a:prstGeom prst="rect">
-            <a:avLst/>
-          </a:prstGeom>
-          <a:noFill/>
-        </p:spPr>
-        <p:txBody>
-          <a:bodyPr wrap="square">
-            <a:spAutoFit/>
-          </a:bodyPr>
-          <a:lstStyle/>
-          <a:p>
-            <a:pPr algn="l"/>
-            <a:r>
-              <a:rPr sz="950" b="0" i="0">
-                <a:solidFill>
-                  <a:srgbClr val="555555"/>
-                </a:solidFill>
-                <a:latin typeface="Arial"/>
-              </a:rPr>
-              <a:t>Para chegar à meta, o Brasil precisa reduzir mais 91% nos próximos três anos. O tempo está curto.</a:t>
+            <a:off x="320040" y="4864608"/>
+            <a:ext cx="8503920" cy="256032"/>
+          </a:xfrm>
+          <a:prstGeom prst="rect">
+            <a:avLst/>
+          </a:prstGeom>
+          <a:noFill/>
+        </p:spPr>
+        <p:txBody>
+          <a:bodyPr wrap="square">
+            <a:spAutoFit/>
+          </a:bodyPr>
+          <a:lstStyle/>
+          <a:p>
+            <a:pPr algn="l"/>
+            <a:r>
+              <a:rPr sz="650" b="0" i="0">
+                <a:solidFill>
+                  <a:srgbClr val="999999"/>
+                </a:solidFill>
+                <a:latin typeface="Arial"/>
+              </a:rPr>
+              <a:t>Fonte: INPE/PRODES · Calculado a partir dos dados GeoParquet</a:t>
             </a:r>
           </a:p>
         </p:txBody>
@@ -4174,7 +3738,7 @@
             <a:avLst/>
           </a:prstGeom>
           <a:solidFill>
-            <a:srgbClr val="0D47A1"/>
+            <a:srgbClr val="1B5E20"/>
           </a:solidFill>
           <a:ln>
             <a:noFill/>
@@ -4217,7 +3781,7 @@
             <a:avLst/>
           </a:prstGeom>
           <a:solidFill>
-            <a:srgbClr val="0D47A1"/>
+            <a:srgbClr val="1B5E20"/>
           </a:solidFill>
           <a:ln>
             <a:noFill/>
@@ -4253,8 +3817,8 @@
         </p:nvSpPr>
         <p:spPr>
           <a:xfrm>
-            <a:off x="320040" y="109728"/>
-            <a:ext cx="1371600" cy="228600"/>
+            <a:off x="320040" y="164592"/>
+            <a:ext cx="8503920" cy="256032"/>
           </a:xfrm>
           <a:prstGeom prst="rect">
             <a:avLst/>
@@ -4271,78 +3835,31 @@
             <a:r>
               <a:rPr sz="700" b="1" i="0">
                 <a:solidFill>
-                  <a:srgbClr val="0D47A1"/>
-                </a:solidFill>
-                <a:latin typeface="Arial"/>
-              </a:rPr>
-              <a:t>EN-US</a:t>
-            </a:r>
-          </a:p>
-        </p:txBody>
-      </p:sp>
-      <p:sp>
-        <p:nvSpPr>
-          <p:cNvPr id="5" name="TextBox 4"/>
-          <p:cNvSpPr txBox="1"/>
-          <p:nvPr/>
-        </p:nvSpPr>
-        <p:spPr>
-          <a:xfrm>
-            <a:off x="502920" y="640080"/>
-            <a:ext cx="7772400" cy="1737360"/>
-          </a:xfrm>
-          <a:prstGeom prst="rect">
-            <a:avLst/>
-          </a:prstGeom>
-          <a:noFill/>
-        </p:spPr>
-        <p:txBody>
-          <a:bodyPr wrap="square">
-            <a:spAutoFit/>
-          </a:bodyPr>
-          <a:lstStyle/>
-          <a:p>
-            <a:pPr algn="l"/>
-            <a:r>
-              <a:rPr sz="3000" b="1" i="0">
-                <a:solidFill>
-                  <a:srgbClr val="111111"/>
-                </a:solidFill>
-                <a:latin typeface="Georgia"/>
-              </a:rPr>
-              <a:t>Brazil's Deforestation</a:t>
-            </a:r>
-          </a:p>
-          <a:p>
-            <a:pPr algn="l"/>
-            <a:r>
-              <a:rPr sz="3000" b="1" i="0">
-                <a:solidFill>
-                  <a:srgbClr val="111111"/>
-                </a:solidFill>
-                <a:latin typeface="Georgia"/>
-              </a:rPr>
-              <a:t>Is Down — But Not Enough.</a:t>
-            </a:r>
-          </a:p>
-        </p:txBody>
-      </p:sp>
-      <p:sp>
-        <p:nvSpPr>
-          <p:cNvPr id="6" name="Rectangle 5"/>
+                  <a:srgbClr val="1B5E20"/>
+                </a:solidFill>
+                <a:latin typeface="Arial"/>
+              </a:rPr>
+              <a:t>CONTEXTO GLOBAL</a:t>
+            </a:r>
+          </a:p>
+        </p:txBody>
+      </p:sp>
+      <p:sp>
+        <p:nvSpPr>
+          <p:cNvPr id="5" name="Rectangle 4"/>
           <p:cNvSpPr/>
           <p:nvPr/>
         </p:nvSpPr>
         <p:spPr>
           <a:xfrm>
-            <a:off x="502920" y="2514600"/>
-            <a:ext cx="2560320" cy="50292"/>
+            <a:off x="320040" y="429768"/>
+            <a:ext cx="8503920" cy="4572"/>
           </a:xfrm>
           <a:prstGeom prst="rect">
             <a:avLst/>
           </a:prstGeom>
           <a:solidFill>
-            <a:srgbClr val="0D47A1"/>
+            <a:srgbClr val="E8E8E8"/>
           </a:solidFill>
           <a:ln>
             <a:noFill/>
@@ -4372,70 +3889,164 @@
       </p:sp>
       <p:sp>
         <p:nvSpPr>
+          <p:cNvPr id="6" name="TextBox 5"/>
+          <p:cNvSpPr txBox="1"/>
+          <p:nvPr/>
+        </p:nvSpPr>
+        <p:spPr>
+          <a:xfrm>
+            <a:off x="320040" y="475488"/>
+            <a:ext cx="8503920" cy="777240"/>
+          </a:xfrm>
+          <a:prstGeom prst="rect">
+            <a:avLst/>
+          </a:prstGeom>
+          <a:noFill/>
+        </p:spPr>
+        <p:txBody>
+          <a:bodyPr wrap="square">
+            <a:spAutoFit/>
+          </a:bodyPr>
+          <a:lstStyle/>
+          <a:p>
+            <a:pPr algn="l"/>
+            <a:r>
+              <a:rPr sz="1350" b="1" i="0">
+                <a:solidFill>
+                  <a:srgbClr val="111111"/>
+                </a:solidFill>
+                <a:latin typeface="Arial"/>
+              </a:rPr>
+              <a:t>Brasil lidera a queda — mas ainda é o maior desmatador tropical.</a:t>
+            </a:r>
+          </a:p>
+        </p:txBody>
+      </p:sp>
+      <p:sp>
+        <p:nvSpPr>
           <p:cNvPr id="7" name="TextBox 6"/>
           <p:cNvSpPr txBox="1"/>
           <p:nvPr/>
         </p:nvSpPr>
         <p:spPr>
           <a:xfrm>
-            <a:off x="502920" y="2670048"/>
-            <a:ext cx="7772400" cy="384048"/>
-          </a:xfrm>
-          <a:prstGeom prst="rect">
-            <a:avLst/>
-          </a:prstGeom>
-          <a:noFill/>
-        </p:spPr>
-        <p:txBody>
-          <a:bodyPr wrap="square">
-            <a:spAutoFit/>
-          </a:bodyPr>
-          <a:lstStyle/>
-          <a:p>
-            <a:pPr algn="l"/>
-            <a:r>
-              <a:rPr sz="1000" b="0" i="0">
+            <a:off x="320040" y="1234440"/>
+            <a:ext cx="8503920" cy="347472"/>
+          </a:xfrm>
+          <a:prstGeom prst="rect">
+            <a:avLst/>
+          </a:prstGeom>
+          <a:noFill/>
+        </p:spPr>
+        <p:txBody>
+          <a:bodyPr wrap="square">
+            <a:spAutoFit/>
+          </a:bodyPr>
+          <a:lstStyle/>
+          <a:p>
+            <a:pPr algn="l"/>
+            <a:r>
+              <a:rPr sz="850" b="0" i="0">
                 <a:solidFill>
                   <a:srgbClr val="555555"/>
                 </a:solidFill>
                 <a:latin typeface="Arial"/>
               </a:rPr>
-              <a:t>PRODES · INPE Data  |  Press Briefing  ·  2026</a:t>
-            </a:r>
-          </a:p>
-        </p:txBody>
-      </p:sp>
-      <p:sp>
-        <p:nvSpPr>
-          <p:cNvPr id="8" name="TextBox 7"/>
-          <p:cNvSpPr txBox="1"/>
-          <p:nvPr/>
-        </p:nvSpPr>
-        <p:spPr>
-          <a:xfrm>
-            <a:off x="502920" y="3182112"/>
-            <a:ext cx="7772400" cy="347472"/>
-          </a:xfrm>
-          <a:prstGeom prst="rect">
-            <a:avLst/>
-          </a:prstGeom>
-          <a:noFill/>
-        </p:spPr>
-        <p:txBody>
-          <a:bodyPr wrap="square">
-            <a:spAutoFit/>
-          </a:bodyPr>
-          <a:lstStyle/>
-          <a:p>
-            <a:pPr algn="l"/>
-            <a:r>
-              <a:rPr sz="900" b="0" i="1">
+              <a:t>Perda de floresta tropical por país (km²)  ·  2023  ·  Fonte: GFW / FAO</a:t>
+            </a:r>
+          </a:p>
+        </p:txBody>
+      </p:sp>
+      <p:pic>
+        <p:nvPicPr>
+          <p:cNvPr id="8" name="Picture 7" descr="image.png"/>
+          <p:cNvPicPr>
+            <a:picLocks noChangeAspect="1"/>
+          </p:cNvPicPr>
+          <p:nvPr/>
+        </p:nvPicPr>
+        <p:blipFill>
+          <a:blip r:embed="rId2"/>
+          <a:stretch>
+            <a:fillRect/>
+          </a:stretch>
+        </p:blipFill>
+        <p:spPr>
+          <a:xfrm>
+            <a:off x="365760" y="1481328"/>
+            <a:ext cx="8412480" cy="3143453"/>
+          </a:xfrm>
+          <a:prstGeom prst="rect">
+            <a:avLst/>
+          </a:prstGeom>
+        </p:spPr>
+      </p:pic>
+      <p:sp>
+        <p:nvSpPr>
+          <p:cNvPr id="9" name="TextBox 8"/>
+          <p:cNvSpPr txBox="1"/>
+          <p:nvPr/>
+        </p:nvSpPr>
+        <p:spPr>
+          <a:xfrm>
+            <a:off x="320040" y="4434840"/>
+            <a:ext cx="8503920" cy="320040"/>
+          </a:xfrm>
+          <a:prstGeom prst="rect">
+            <a:avLst/>
+          </a:prstGeom>
+          <a:noFill/>
+        </p:spPr>
+        <p:txBody>
+          <a:bodyPr wrap="square">
+            <a:spAutoFit/>
+          </a:bodyPr>
+          <a:lstStyle/>
+          <a:p>
+            <a:pPr algn="l"/>
+            <a:r>
+              <a:rPr sz="650" b="0" i="1">
                 <a:solidFill>
                   <a:srgbClr val="999999"/>
                 </a:solidFill>
                 <a:latin typeface="Arial"/>
               </a:rPr>
-              <a:t>Imazon — Institute for People and the Environment in Amazonia</a:t>
+              <a:t>* GFW mede perda de cobertura arbórea; PRODES mede desmatamento. Metodologias distintas.</a:t>
+            </a:r>
+          </a:p>
+        </p:txBody>
+      </p:sp>
+      <p:sp>
+        <p:nvSpPr>
+          <p:cNvPr id="10" name="TextBox 9"/>
+          <p:cNvSpPr txBox="1"/>
+          <p:nvPr/>
+        </p:nvSpPr>
+        <p:spPr>
+          <a:xfrm>
+            <a:off x="320040" y="4864608"/>
+            <a:ext cx="8503920" cy="256032"/>
+          </a:xfrm>
+          <a:prstGeom prst="rect">
+            <a:avLst/>
+          </a:prstGeom>
+          <a:noFill/>
+        </p:spPr>
+        <p:txBody>
+          <a:bodyPr wrap="square">
+            <a:spAutoFit/>
+          </a:bodyPr>
+          <a:lstStyle/>
+          <a:p>
+            <a:pPr algn="l"/>
+            <a:r>
+              <a:rPr sz="650" b="0" i="0">
+                <a:solidFill>
+                  <a:srgbClr val="999999"/>
+                </a:solidFill>
+                <a:latin typeface="Arial"/>
+              </a:rPr>
+              <a:t>Fonte: Global Forest Watch / FAO 2023 · Dados aproximados — metodologias distintas</a:t>
             </a:r>
           </a:p>
         </p:txBody>
@@ -4473,7 +4084,7 @@
             <a:avLst/>
           </a:prstGeom>
           <a:solidFill>
-            <a:srgbClr val="0D47A1"/>
+            <a:srgbClr val="1B5E20"/>
           </a:solidFill>
           <a:ln>
             <a:noFill/>
@@ -4516,7 +4127,7 @@
             <a:avLst/>
           </a:prstGeom>
           <a:solidFill>
-            <a:srgbClr val="0D47A1"/>
+            <a:srgbClr val="1B5E20"/>
           </a:solidFill>
           <a:ln>
             <a:noFill/>
@@ -4570,11 +4181,11 @@
             <a:r>
               <a:rPr sz="700" b="1" i="0">
                 <a:solidFill>
-                  <a:srgbClr val="0D47A1"/>
-                </a:solidFill>
-                <a:latin typeface="Arial"/>
-              </a:rPr>
-              <a:t>LEGAL AMAZON</a:t>
+                  <a:srgbClr val="1B5E20"/>
+                </a:solidFill>
+                <a:latin typeface="Arial"/>
+              </a:rPr>
+              <a:t>CAUSAS &amp; RISCOS</a:t>
             </a:r>
           </a:p>
         </p:txBody>
@@ -4630,64 +4241,64 @@
         </p:nvSpPr>
         <p:spPr>
           <a:xfrm>
-            <a:off x="320040" y="502920"/>
-            <a:ext cx="3474720" cy="1371600"/>
-          </a:xfrm>
-          <a:prstGeom prst="rect">
-            <a:avLst/>
-          </a:prstGeom>
-          <a:noFill/>
-        </p:spPr>
-        <p:txBody>
-          <a:bodyPr wrap="none">
-            <a:spAutoFit/>
-          </a:bodyPr>
-          <a:lstStyle/>
-          <a:p>
-            <a:pPr algn="l"/>
-            <a:r>
-              <a:rPr sz="8800" b="1" i="0">
+            <a:off x="320040" y="475488"/>
+            <a:ext cx="8503920" cy="777240"/>
+          </a:xfrm>
+          <a:prstGeom prst="rect">
+            <a:avLst/>
+          </a:prstGeom>
+          <a:noFill/>
+        </p:spPr>
+        <p:txBody>
+          <a:bodyPr wrap="square">
+            <a:spAutoFit/>
+          </a:bodyPr>
+          <a:lstStyle/>
+          <a:p>
+            <a:pPr algn="l"/>
+            <a:r>
+              <a:rPr sz="1350" b="1" i="0">
+                <a:solidFill>
+                  <a:srgbClr val="111111"/>
+                </a:solidFill>
+                <a:latin typeface="Arial"/>
+              </a:rPr>
+              <a:t>O que explica a queda — e o que pode revertê-la.</a:t>
+            </a:r>
+          </a:p>
+        </p:txBody>
+      </p:sp>
+      <p:sp>
+        <p:nvSpPr>
+          <p:cNvPr id="7" name="TextBox 6"/>
+          <p:cNvSpPr txBox="1"/>
+          <p:nvPr/>
+        </p:nvSpPr>
+        <p:spPr>
+          <a:xfrm>
+            <a:off x="320040" y="1353312"/>
+            <a:ext cx="8503920" cy="347472"/>
+          </a:xfrm>
+          <a:prstGeom prst="rect">
+            <a:avLst/>
+          </a:prstGeom>
+          <a:noFill/>
+        </p:spPr>
+        <p:txBody>
+          <a:bodyPr wrap="square">
+            <a:spAutoFit/>
+          </a:bodyPr>
+          <a:lstStyle/>
+          <a:p>
+            <a:pPr algn="l"/>
+            <a:r>
+              <a:rPr sz="1100" b="1" i="0">
                 <a:solidFill>
                   <a:srgbClr val="2E7D32"/>
                 </a:solidFill>
                 <a:latin typeface="Arial"/>
               </a:rPr>
-              <a:t>99%</a:t>
-            </a:r>
-          </a:p>
-        </p:txBody>
-      </p:sp>
-      <p:sp>
-        <p:nvSpPr>
-          <p:cNvPr id="7" name="TextBox 6"/>
-          <p:cNvSpPr txBox="1"/>
-          <p:nvPr/>
-        </p:nvSpPr>
-        <p:spPr>
-          <a:xfrm>
-            <a:off x="320040" y="1737360"/>
-            <a:ext cx="8503920" cy="777240"/>
-          </a:xfrm>
-          <a:prstGeom prst="rect">
-            <a:avLst/>
-          </a:prstGeom>
-          <a:noFill/>
-        </p:spPr>
-        <p:txBody>
-          <a:bodyPr wrap="square">
-            <a:spAutoFit/>
-          </a:bodyPr>
-          <a:lstStyle/>
-          <a:p>
-            <a:pPr algn="l"/>
-            <a:r>
-              <a:rPr sz="1500" b="1" i="0">
-                <a:solidFill>
-                  <a:srgbClr val="111111"/>
-                </a:solidFill>
-                <a:latin typeface="Arial"/>
-              </a:rPr>
-              <a:t>Amazon deforestation fell 99% in 18 years.</a:t>
+              <a:t>▲  Fiscalização reforçada</a:t>
             </a:r>
           </a:p>
         </p:txBody>
@@ -4700,76 +4311,169 @@
         </p:nvSpPr>
         <p:spPr>
           <a:xfrm>
-            <a:off x="320040" y="2450592"/>
-            <a:ext cx="8503920" cy="914400"/>
-          </a:xfrm>
-          <a:prstGeom prst="rect">
-            <a:avLst/>
-          </a:prstGeom>
-          <a:noFill/>
-        </p:spPr>
-        <p:txBody>
-          <a:bodyPr wrap="square">
-            <a:spAutoFit/>
-          </a:bodyPr>
-          <a:lstStyle/>
-          <a:p>
-            <a:pPr algn="l"/>
-            <a:r>
-              <a:rPr sz="1050" b="0" i="0">
+            <a:off x="320040" y="1691640"/>
+            <a:ext cx="8503920" cy="685800"/>
+          </a:xfrm>
+          <a:prstGeom prst="rect">
+            <a:avLst/>
+          </a:prstGeom>
+          <a:noFill/>
+        </p:spPr>
+        <p:txBody>
+          <a:bodyPr wrap="square">
+            <a:spAutoFit/>
+          </a:bodyPr>
+          <a:lstStyle/>
+          <a:p>
+            <a:pPr algn="l"/>
+            <a:r>
+              <a:rPr sz="950" b="0" i="0">
                 <a:solidFill>
                   <a:srgbClr val="555555"/>
                 </a:solidFill>
                 <a:latin typeface="Arial"/>
               </a:rPr>
-              <a:t>From 7,509,061 km² in 2007 to 44,620 km² in 2025 — lowest figure since 2000.</a:t>
-            </a:r>
-          </a:p>
-          <a:p>
-            <a:pPr algn="l"/>
-            <a:r>
-              <a:rPr sz="1050" b="0" i="0">
+              <a:t>Ibama e PF multiplicaram autuações e embargos desde 2023. Operações coordenadas reduziram o desmatamento ilegal.</a:t>
+            </a:r>
+          </a:p>
+        </p:txBody>
+      </p:sp>
+      <p:sp>
+        <p:nvSpPr>
+          <p:cNvPr id="9" name="TextBox 8"/>
+          <p:cNvSpPr txBox="1"/>
+          <p:nvPr/>
+        </p:nvSpPr>
+        <p:spPr>
+          <a:xfrm>
+            <a:off x="320040" y="2496312"/>
+            <a:ext cx="8503920" cy="347472"/>
+          </a:xfrm>
+          <a:prstGeom prst="rect">
+            <a:avLst/>
+          </a:prstGeom>
+          <a:noFill/>
+        </p:spPr>
+        <p:txBody>
+          <a:bodyPr wrap="square">
+            <a:spAutoFit/>
+          </a:bodyPr>
+          <a:lstStyle/>
+          <a:p>
+            <a:pPr algn="l"/>
+            <a:r>
+              <a:rPr sz="1100" b="1" i="0">
+                <a:solidFill>
+                  <a:srgbClr val="2E7D32"/>
+                </a:solidFill>
+                <a:latin typeface="Arial"/>
+              </a:rPr>
+              <a:t>▲  Financiamento climático</a:t>
+            </a:r>
+          </a:p>
+        </p:txBody>
+      </p:sp>
+      <p:sp>
+        <p:nvSpPr>
+          <p:cNvPr id="10" name="TextBox 9"/>
+          <p:cNvSpPr txBox="1"/>
+          <p:nvPr/>
+        </p:nvSpPr>
+        <p:spPr>
+          <a:xfrm>
+            <a:off x="320040" y="2834640"/>
+            <a:ext cx="8503920" cy="685800"/>
+          </a:xfrm>
+          <a:prstGeom prst="rect">
+            <a:avLst/>
+          </a:prstGeom>
+          <a:noFill/>
+        </p:spPr>
+        <p:txBody>
+          <a:bodyPr wrap="square">
+            <a:spAutoFit/>
+          </a:bodyPr>
+          <a:lstStyle/>
+          <a:p>
+            <a:pPr algn="l"/>
+            <a:r>
+              <a:rPr sz="950" b="0" i="0">
                 <a:solidFill>
                   <a:srgbClr val="555555"/>
                 </a:solidFill>
                 <a:latin typeface="Arial"/>
               </a:rPr>
-              <a:t>Yet still 11.2× the target set for 2028.</a:t>
-            </a:r>
-          </a:p>
-        </p:txBody>
-      </p:sp>
-      <p:sp>
-        <p:nvSpPr>
-          <p:cNvPr id="9" name="TextBox 8"/>
-          <p:cNvSpPr txBox="1"/>
-          <p:nvPr/>
-        </p:nvSpPr>
-        <p:spPr>
-          <a:xfrm>
-            <a:off x="320040" y="4864608"/>
-            <a:ext cx="8503920" cy="256032"/>
-          </a:xfrm>
-          <a:prstGeom prst="rect">
-            <a:avLst/>
-          </a:prstGeom>
-          <a:noFill/>
-        </p:spPr>
-        <p:txBody>
-          <a:bodyPr wrap="square">
-            <a:spAutoFit/>
-          </a:bodyPr>
-          <a:lstStyle/>
-          <a:p>
-            <a:pPr algn="l"/>
-            <a:r>
-              <a:rPr sz="650" b="0" i="0">
-                <a:solidFill>
-                  <a:srgbClr val="999999"/>
-                </a:solidFill>
-                <a:latin typeface="Arial"/>
-              </a:rPr>
-              <a:t>Source: INPE/PRODES · Calculated from GeoParquet data</a:t>
+              <a:t>Fundo Amazônia recebeu +R$ 3 bi em 2023–24 (Noruega, Alemanha, EUA). Primeira fase do REDD+ Amazon operacional.</a:t>
+            </a:r>
+          </a:p>
+        </p:txBody>
+      </p:sp>
+      <p:sp>
+        <p:nvSpPr>
+          <p:cNvPr id="11" name="TextBox 10"/>
+          <p:cNvSpPr txBox="1"/>
+          <p:nvPr/>
+        </p:nvSpPr>
+        <p:spPr>
+          <a:xfrm>
+            <a:off x="320040" y="3639312"/>
+            <a:ext cx="8503920" cy="347472"/>
+          </a:xfrm>
+          <a:prstGeom prst="rect">
+            <a:avLst/>
+          </a:prstGeom>
+          <a:noFill/>
+        </p:spPr>
+        <p:txBody>
+          <a:bodyPr wrap="square">
+            <a:spAutoFit/>
+          </a:bodyPr>
+          <a:lstStyle/>
+          <a:p>
+            <a:pPr algn="l"/>
+            <a:r>
+              <a:rPr sz="1100" b="1" i="0">
+                <a:solidFill>
+                  <a:srgbClr val="C0392B"/>
+                </a:solidFill>
+                <a:latin typeface="Arial"/>
+              </a:rPr>
+              <a:t>▼  Risco: anistia fundiária</a:t>
+            </a:r>
+          </a:p>
+        </p:txBody>
+      </p:sp>
+      <p:sp>
+        <p:nvSpPr>
+          <p:cNvPr id="12" name="TextBox 11"/>
+          <p:cNvSpPr txBox="1"/>
+          <p:nvPr/>
+        </p:nvSpPr>
+        <p:spPr>
+          <a:xfrm>
+            <a:off x="320040" y="3977639"/>
+            <a:ext cx="8503920" cy="685800"/>
+          </a:xfrm>
+          <a:prstGeom prst="rect">
+            <a:avLst/>
+          </a:prstGeom>
+          <a:noFill/>
+        </p:spPr>
+        <p:txBody>
+          <a:bodyPr wrap="square">
+            <a:spAutoFit/>
+          </a:bodyPr>
+          <a:lstStyle/>
+          <a:p>
+            <a:pPr algn="l"/>
+            <a:r>
+              <a:rPr sz="950" b="0" i="0">
+                <a:solidFill>
+                  <a:srgbClr val="555555"/>
+                </a:solidFill>
+                <a:latin typeface="Arial"/>
+              </a:rPr>
+              <a:t>Projetos de lei que regularizam desmatamentos ilegais antes de 2008 ameaçam criar incentivos para novos crimes ambientais.</a:t>
             </a:r>
           </a:p>
         </p:txBody>
@@ -4801,13 +4505,13 @@
         <p:spPr>
           <a:xfrm>
             <a:off x="0" y="0"/>
-            <a:ext cx="9144000" cy="50292"/>
+            <a:ext cx="9144000" cy="960120"/>
           </a:xfrm>
           <a:prstGeom prst="rect">
             <a:avLst/>
           </a:prstGeom>
           <a:solidFill>
-            <a:srgbClr val="0D47A1"/>
+            <a:srgbClr val="1B5E20"/>
           </a:solidFill>
           <a:ln>
             <a:noFill/>
@@ -4837,7 +4541,77 @@
       </p:sp>
       <p:sp>
         <p:nvSpPr>
-          <p:cNvPr id="3" name="Rectangle 2"/>
+          <p:cNvPr id="3" name="TextBox 2"/>
+          <p:cNvSpPr txBox="1"/>
+          <p:nvPr/>
+        </p:nvSpPr>
+        <p:spPr>
+          <a:xfrm>
+            <a:off x="320040" y="73152"/>
+            <a:ext cx="8503920" cy="256032"/>
+          </a:xfrm>
+          <a:prstGeom prst="rect">
+            <a:avLst/>
+          </a:prstGeom>
+          <a:noFill/>
+        </p:spPr>
+        <p:txBody>
+          <a:bodyPr wrap="square">
+            <a:spAutoFit/>
+          </a:bodyPr>
+          <a:lstStyle/>
+          <a:p>
+            <a:pPr algn="l"/>
+            <a:r>
+              <a:rPr sz="700" b="1" i="0">
+                <a:solidFill>
+                  <a:srgbClr val="FFFFFF"/>
+                </a:solidFill>
+                <a:latin typeface="Arial"/>
+              </a:rPr>
+              <a:t>MENSAGENS-CHAVE</a:t>
+            </a:r>
+          </a:p>
+        </p:txBody>
+      </p:sp>
+      <p:sp>
+        <p:nvSpPr>
+          <p:cNvPr id="4" name="TextBox 3"/>
+          <p:cNvSpPr txBox="1"/>
+          <p:nvPr/>
+        </p:nvSpPr>
+        <p:spPr>
+          <a:xfrm>
+            <a:off x="320040" y="301752"/>
+            <a:ext cx="8503920" cy="566928"/>
+          </a:xfrm>
+          <a:prstGeom prst="rect">
+            <a:avLst/>
+          </a:prstGeom>
+          <a:noFill/>
+        </p:spPr>
+        <p:txBody>
+          <a:bodyPr wrap="square">
+            <a:spAutoFit/>
+          </a:bodyPr>
+          <a:lstStyle/>
+          <a:p>
+            <a:pPr algn="l"/>
+            <a:r>
+              <a:rPr sz="1400" b="1" i="0">
+                <a:solidFill>
+                  <a:srgbClr val="FFFFFF"/>
+                </a:solidFill>
+                <a:latin typeface="Arial"/>
+              </a:rPr>
+              <a:t>Três mensagens desta apresentação.</a:t>
+            </a:r>
+          </a:p>
+        </p:txBody>
+      </p:sp>
+      <p:sp>
+        <p:nvSpPr>
+          <p:cNvPr id="5" name="Rectangle 4"/>
           <p:cNvSpPr/>
           <p:nvPr/>
         </p:nvSpPr>
@@ -4850,7 +4624,7 @@
             <a:avLst/>
           </a:prstGeom>
           <a:solidFill>
-            <a:srgbClr val="0D47A1"/>
+            <a:srgbClr val="1B5E20"/>
           </a:solidFill>
           <a:ln>
             <a:noFill/>
@@ -4880,58 +4654,25 @@
       </p:sp>
       <p:sp>
         <p:nvSpPr>
-          <p:cNvPr id="4" name="TextBox 3"/>
-          <p:cNvSpPr txBox="1"/>
-          <p:nvPr/>
-        </p:nvSpPr>
-        <p:spPr>
-          <a:xfrm>
-            <a:off x="320040" y="164592"/>
-            <a:ext cx="8503920" cy="256032"/>
-          </a:xfrm>
-          <a:prstGeom prst="rect">
-            <a:avLst/>
-          </a:prstGeom>
-          <a:noFill/>
-        </p:spPr>
-        <p:txBody>
-          <a:bodyPr wrap="square">
-            <a:spAutoFit/>
-          </a:bodyPr>
-          <a:lstStyle/>
-          <a:p>
-            <a:pPr algn="l"/>
-            <a:r>
-              <a:rPr sz="700" b="1" i="0">
-                <a:solidFill>
-                  <a:srgbClr val="0D47A1"/>
-                </a:solidFill>
-                <a:latin typeface="Arial"/>
-              </a:rPr>
-              <a:t>LEGAL AMAZON</a:t>
-            </a:r>
-          </a:p>
-        </p:txBody>
-      </p:sp>
-      <p:sp>
-        <p:nvSpPr>
-          <p:cNvPr id="5" name="Rectangle 4"/>
+          <p:cNvPr id="6" name="Rectangle 5"/>
           <p:cNvSpPr/>
           <p:nvPr/>
         </p:nvSpPr>
         <p:spPr>
           <a:xfrm>
-            <a:off x="320040" y="429768"/>
-            <a:ext cx="8503920" cy="4572"/>
+            <a:off x="256032" y="1024128"/>
+            <a:ext cx="8631936" cy="1170432"/>
           </a:xfrm>
           <a:prstGeom prst="rect">
             <a:avLst/>
           </a:prstGeom>
           <a:solidFill>
-            <a:srgbClr val="E8E8E8"/>
+            <a:srgbClr val="F5F5F5"/>
           </a:solidFill>
-          <a:ln>
-            <a:noFill/>
+          <a:ln w="6350">
+            <a:solidFill>
+              <a:srgbClr val="E0E0E0"/>
+            </a:solidFill>
           </a:ln>
         </p:spPr>
         <p:style>
@@ -4958,129 +4699,534 @@
       </p:sp>
       <p:sp>
         <p:nvSpPr>
-          <p:cNvPr id="6" name="TextBox 5"/>
-          <p:cNvSpPr txBox="1"/>
-          <p:nvPr/>
-        </p:nvSpPr>
-        <p:spPr>
-          <a:xfrm>
-            <a:off x="320040" y="475488"/>
-            <a:ext cx="8503920" cy="777240"/>
-          </a:xfrm>
-          <a:prstGeom prst="rect">
-            <a:avLst/>
-          </a:prstGeom>
-          <a:noFill/>
-        </p:spPr>
-        <p:txBody>
-          <a:bodyPr wrap="square">
-            <a:spAutoFit/>
-          </a:bodyPr>
-          <a:lstStyle/>
-          <a:p>
-            <a:pPr algn="l"/>
-            <a:r>
-              <a:rPr sz="1350" b="1" i="0">
+          <p:cNvPr id="7" name="Rectangle 6"/>
+          <p:cNvSpPr/>
+          <p:nvPr/>
+        </p:nvSpPr>
+        <p:spPr>
+          <a:xfrm>
+            <a:off x="256032" y="1024128"/>
+            <a:ext cx="347472" cy="1170432"/>
+          </a:xfrm>
+          <a:prstGeom prst="rect">
+            <a:avLst/>
+          </a:prstGeom>
+          <a:solidFill>
+            <a:srgbClr val="1B5E20"/>
+          </a:solidFill>
+          <a:ln>
+            <a:noFill/>
+          </a:ln>
+        </p:spPr>
+        <p:style>
+          <a:lnRef idx="1">
+            <a:schemeClr val="accent1"/>
+          </a:lnRef>
+          <a:fillRef idx="3">
+            <a:schemeClr val="accent1"/>
+          </a:fillRef>
+          <a:effectRef idx="2">
+            <a:schemeClr val="accent1"/>
+          </a:effectRef>
+          <a:fontRef idx="minor">
+            <a:schemeClr val="lt1"/>
+          </a:fontRef>
+        </p:style>
+        <p:txBody>
+          <a:bodyPr rtlCol="0" anchor="ctr"/>
+          <a:lstStyle/>
+          <a:p>
+            <a:pPr algn="ctr"/>
+          </a:p>
+        </p:txBody>
+      </p:sp>
+      <p:sp>
+        <p:nvSpPr>
+          <p:cNvPr id="8" name="TextBox 7"/>
+          <p:cNvSpPr txBox="1"/>
+          <p:nvPr/>
+        </p:nvSpPr>
+        <p:spPr>
+          <a:xfrm>
+            <a:off x="265176" y="1371600"/>
+            <a:ext cx="329184" cy="457200"/>
+          </a:xfrm>
+          <a:prstGeom prst="rect">
+            <a:avLst/>
+          </a:prstGeom>
+          <a:noFill/>
+        </p:spPr>
+        <p:txBody>
+          <a:bodyPr wrap="square">
+            <a:spAutoFit/>
+          </a:bodyPr>
+          <a:lstStyle/>
+          <a:p>
+            <a:pPr algn="ctr"/>
+            <a:r>
+              <a:rPr sz="1800" b="1" i="0">
+                <a:solidFill>
+                  <a:srgbClr val="FFFFFF"/>
+                </a:solidFill>
+                <a:latin typeface="Arial"/>
+              </a:rPr>
+              <a:t>1</a:t>
+            </a:r>
+          </a:p>
+        </p:txBody>
+      </p:sp>
+      <p:sp>
+        <p:nvSpPr>
+          <p:cNvPr id="9" name="TextBox 8"/>
+          <p:cNvSpPr txBox="1"/>
+          <p:nvPr/>
+        </p:nvSpPr>
+        <p:spPr>
+          <a:xfrm>
+            <a:off x="685800" y="1115568"/>
+            <a:ext cx="8092440" cy="384048"/>
+          </a:xfrm>
+          <a:prstGeom prst="rect">
+            <a:avLst/>
+          </a:prstGeom>
+          <a:noFill/>
+        </p:spPr>
+        <p:txBody>
+          <a:bodyPr wrap="square">
+            <a:spAutoFit/>
+          </a:bodyPr>
+          <a:lstStyle/>
+          <a:p>
+            <a:pPr algn="l"/>
+            <a:r>
+              <a:rPr sz="1100" b="1" i="0">
                 <a:solidFill>
                   <a:srgbClr val="111111"/>
                 </a:solidFill>
                 <a:latin typeface="Arial"/>
               </a:rPr>
-              <a:t>Peak in 2007, steady decline since — but the 2028 target remains out of reach.</a:t>
-            </a:r>
-          </a:p>
-        </p:txBody>
-      </p:sp>
-      <p:sp>
-        <p:nvSpPr>
-          <p:cNvPr id="7" name="TextBox 6"/>
-          <p:cNvSpPr txBox="1"/>
-          <p:nvPr/>
-        </p:nvSpPr>
-        <p:spPr>
-          <a:xfrm>
-            <a:off x="320040" y="1234440"/>
-            <a:ext cx="8503920" cy="347472"/>
-          </a:xfrm>
-          <a:prstGeom prst="rect">
-            <a:avLst/>
-          </a:prstGeom>
-          <a:noFill/>
-        </p:spPr>
-        <p:txBody>
-          <a:bodyPr wrap="square">
-            <a:spAutoFit/>
-          </a:bodyPr>
-          <a:lstStyle/>
-          <a:p>
-            <a:pPr algn="l"/>
-            <a:r>
-              <a:rPr sz="850" b="0" i="0">
+              <a:t>A queda de 99% é real — mas frágil.</a:t>
+            </a:r>
+          </a:p>
+        </p:txBody>
+      </p:sp>
+      <p:sp>
+        <p:nvSpPr>
+          <p:cNvPr id="10" name="TextBox 9"/>
+          <p:cNvSpPr txBox="1"/>
+          <p:nvPr/>
+        </p:nvSpPr>
+        <p:spPr>
+          <a:xfrm>
+            <a:off x="685800" y="1499616"/>
+            <a:ext cx="8092440" cy="594360"/>
+          </a:xfrm>
+          <a:prstGeom prst="rect">
+            <a:avLst/>
+          </a:prstGeom>
+          <a:noFill/>
+        </p:spPr>
+        <p:txBody>
+          <a:bodyPr wrap="square">
+            <a:spAutoFit/>
+          </a:bodyPr>
+          <a:lstStyle/>
+          <a:p>
+            <a:pPr algn="l"/>
+            <a:r>
+              <a:rPr sz="950" b="0" i="0">
                 <a:solidFill>
                   <a:srgbClr val="555555"/>
                 </a:solidFill>
                 <a:latin typeface="Arial"/>
               </a:rPr>
-              <a:t>Annual deforestation in Brazil's Legal Amazon (km²)  ·  2000–2028</a:t>
-            </a:r>
-          </a:p>
-        </p:txBody>
-      </p:sp>
-      <p:pic>
-        <p:nvPicPr>
-          <p:cNvPr id="8" name="Picture 7" descr="image.png"/>
-          <p:cNvPicPr>
-            <a:picLocks noChangeAspect="1"/>
-          </p:cNvPicPr>
-          <p:nvPr/>
-        </p:nvPicPr>
-        <p:blipFill>
-          <a:blip r:embed="rId2"/>
-          <a:stretch>
-            <a:fillRect/>
-          </a:stretch>
-        </p:blipFill>
-        <p:spPr>
-          <a:xfrm>
-            <a:off x="182880" y="1481328"/>
-            <a:ext cx="8778240" cy="3821673"/>
-          </a:xfrm>
-          <a:prstGeom prst="rect">
-            <a:avLst/>
-          </a:prstGeom>
-        </p:spPr>
-      </p:pic>
-      <p:sp>
-        <p:nvSpPr>
-          <p:cNvPr id="9" name="TextBox 8"/>
-          <p:cNvSpPr txBox="1"/>
-          <p:nvPr/>
-        </p:nvSpPr>
-        <p:spPr>
-          <a:xfrm>
-            <a:off x="320040" y="4864608"/>
-            <a:ext cx="8503920" cy="256032"/>
-          </a:xfrm>
-          <a:prstGeom prst="rect">
-            <a:avLst/>
-          </a:prstGeom>
-          <a:noFill/>
-        </p:spPr>
-        <p:txBody>
-          <a:bodyPr wrap="square">
-            <a:spAutoFit/>
-          </a:bodyPr>
-          <a:lstStyle/>
-          <a:p>
-            <a:pPr algn="l"/>
-            <a:r>
-              <a:rPr sz="650" b="0" i="0">
-                <a:solidFill>
-                  <a:srgbClr val="999999"/>
-                </a:solidFill>
-                <a:latin typeface="Arial"/>
-              </a:rPr>
-              <a:t>Source: INPE/PRODES · Calculated from GeoParquet data</a:t>
+              <a:t>A redução desde 2007 é histórica. Qualquer mudança na política de fiscalização pode revertê-la rapidamente.</a:t>
+            </a:r>
+          </a:p>
+        </p:txBody>
+      </p:sp>
+      <p:sp>
+        <p:nvSpPr>
+          <p:cNvPr id="11" name="Rectangle 10"/>
+          <p:cNvSpPr/>
+          <p:nvPr/>
+        </p:nvSpPr>
+        <p:spPr>
+          <a:xfrm>
+            <a:off x="256032" y="2322576"/>
+            <a:ext cx="8631936" cy="1170432"/>
+          </a:xfrm>
+          <a:prstGeom prst="rect">
+            <a:avLst/>
+          </a:prstGeom>
+          <a:solidFill>
+            <a:srgbClr val="F5F5F5"/>
+          </a:solidFill>
+          <a:ln w="6350">
+            <a:solidFill>
+              <a:srgbClr val="E0E0E0"/>
+            </a:solidFill>
+          </a:ln>
+        </p:spPr>
+        <p:style>
+          <a:lnRef idx="1">
+            <a:schemeClr val="accent1"/>
+          </a:lnRef>
+          <a:fillRef idx="3">
+            <a:schemeClr val="accent1"/>
+          </a:fillRef>
+          <a:effectRef idx="2">
+            <a:schemeClr val="accent1"/>
+          </a:effectRef>
+          <a:fontRef idx="minor">
+            <a:schemeClr val="lt1"/>
+          </a:fontRef>
+        </p:style>
+        <p:txBody>
+          <a:bodyPr rtlCol="0" anchor="ctr"/>
+          <a:lstStyle/>
+          <a:p>
+            <a:pPr algn="ctr"/>
+          </a:p>
+        </p:txBody>
+      </p:sp>
+      <p:sp>
+        <p:nvSpPr>
+          <p:cNvPr id="12" name="Rectangle 11"/>
+          <p:cNvSpPr/>
+          <p:nvPr/>
+        </p:nvSpPr>
+        <p:spPr>
+          <a:xfrm>
+            <a:off x="256032" y="2322576"/>
+            <a:ext cx="347472" cy="1170432"/>
+          </a:xfrm>
+          <a:prstGeom prst="rect">
+            <a:avLst/>
+          </a:prstGeom>
+          <a:solidFill>
+            <a:srgbClr val="1B5E20"/>
+          </a:solidFill>
+          <a:ln>
+            <a:noFill/>
+          </a:ln>
+        </p:spPr>
+        <p:style>
+          <a:lnRef idx="1">
+            <a:schemeClr val="accent1"/>
+          </a:lnRef>
+          <a:fillRef idx="3">
+            <a:schemeClr val="accent1"/>
+          </a:fillRef>
+          <a:effectRef idx="2">
+            <a:schemeClr val="accent1"/>
+          </a:effectRef>
+          <a:fontRef idx="minor">
+            <a:schemeClr val="lt1"/>
+          </a:fontRef>
+        </p:style>
+        <p:txBody>
+          <a:bodyPr rtlCol="0" anchor="ctr"/>
+          <a:lstStyle/>
+          <a:p>
+            <a:pPr algn="ctr"/>
+          </a:p>
+        </p:txBody>
+      </p:sp>
+      <p:sp>
+        <p:nvSpPr>
+          <p:cNvPr id="13" name="TextBox 12"/>
+          <p:cNvSpPr txBox="1"/>
+          <p:nvPr/>
+        </p:nvSpPr>
+        <p:spPr>
+          <a:xfrm>
+            <a:off x="265176" y="2670048"/>
+            <a:ext cx="329184" cy="457200"/>
+          </a:xfrm>
+          <a:prstGeom prst="rect">
+            <a:avLst/>
+          </a:prstGeom>
+          <a:noFill/>
+        </p:spPr>
+        <p:txBody>
+          <a:bodyPr wrap="square">
+            <a:spAutoFit/>
+          </a:bodyPr>
+          <a:lstStyle/>
+          <a:p>
+            <a:pPr algn="ctr"/>
+            <a:r>
+              <a:rPr sz="1800" b="1" i="0">
+                <a:solidFill>
+                  <a:srgbClr val="FFFFFF"/>
+                </a:solidFill>
+                <a:latin typeface="Arial"/>
+              </a:rPr>
+              <a:t>2</a:t>
+            </a:r>
+          </a:p>
+        </p:txBody>
+      </p:sp>
+      <p:sp>
+        <p:nvSpPr>
+          <p:cNvPr id="14" name="TextBox 13"/>
+          <p:cNvSpPr txBox="1"/>
+          <p:nvPr/>
+        </p:nvSpPr>
+        <p:spPr>
+          <a:xfrm>
+            <a:off x="685800" y="2414016"/>
+            <a:ext cx="8092440" cy="384048"/>
+          </a:xfrm>
+          <a:prstGeom prst="rect">
+            <a:avLst/>
+          </a:prstGeom>
+          <a:noFill/>
+        </p:spPr>
+        <p:txBody>
+          <a:bodyPr wrap="square">
+            <a:spAutoFit/>
+          </a:bodyPr>
+          <a:lstStyle/>
+          <a:p>
+            <a:pPr algn="l"/>
+            <a:r>
+              <a:rPr sz="1100" b="1" i="0">
+                <a:solidFill>
+                  <a:srgbClr val="111111"/>
+                </a:solidFill>
+                <a:latin typeface="Arial"/>
+              </a:rPr>
+              <a:t>O Cerrado está em crise silenciosa.</a:t>
+            </a:r>
+          </a:p>
+        </p:txBody>
+      </p:sp>
+      <p:sp>
+        <p:nvSpPr>
+          <p:cNvPr id="15" name="TextBox 14"/>
+          <p:cNvSpPr txBox="1"/>
+          <p:nvPr/>
+        </p:nvSpPr>
+        <p:spPr>
+          <a:xfrm>
+            <a:off x="685800" y="2798064"/>
+            <a:ext cx="8092440" cy="594360"/>
+          </a:xfrm>
+          <a:prstGeom prst="rect">
+            <a:avLst/>
+          </a:prstGeom>
+          <a:noFill/>
+        </p:spPr>
+        <p:txBody>
+          <a:bodyPr wrap="square">
+            <a:spAutoFit/>
+          </a:bodyPr>
+          <a:lstStyle/>
+          <a:p>
+            <a:pPr algn="l"/>
+            <a:r>
+              <a:rPr sz="950" b="0" i="0">
+                <a:solidFill>
+                  <a:srgbClr val="555555"/>
+                </a:solidFill>
+                <a:latin typeface="Arial"/>
+              </a:rPr>
+              <a:t>Perde tanto quanto a Amazônia, tem 53% de cobertura original e recebe proporcionalmente muito menos recursos e atenção.</a:t>
+            </a:r>
+          </a:p>
+        </p:txBody>
+      </p:sp>
+      <p:sp>
+        <p:nvSpPr>
+          <p:cNvPr id="16" name="Rectangle 15"/>
+          <p:cNvSpPr/>
+          <p:nvPr/>
+        </p:nvSpPr>
+        <p:spPr>
+          <a:xfrm>
+            <a:off x="256032" y="3621024"/>
+            <a:ext cx="8631936" cy="1170432"/>
+          </a:xfrm>
+          <a:prstGeom prst="rect">
+            <a:avLst/>
+          </a:prstGeom>
+          <a:solidFill>
+            <a:srgbClr val="F5F5F5"/>
+          </a:solidFill>
+          <a:ln w="6350">
+            <a:solidFill>
+              <a:srgbClr val="E0E0E0"/>
+            </a:solidFill>
+          </a:ln>
+        </p:spPr>
+        <p:style>
+          <a:lnRef idx="1">
+            <a:schemeClr val="accent1"/>
+          </a:lnRef>
+          <a:fillRef idx="3">
+            <a:schemeClr val="accent1"/>
+          </a:fillRef>
+          <a:effectRef idx="2">
+            <a:schemeClr val="accent1"/>
+          </a:effectRef>
+          <a:fontRef idx="minor">
+            <a:schemeClr val="lt1"/>
+          </a:fontRef>
+        </p:style>
+        <p:txBody>
+          <a:bodyPr rtlCol="0" anchor="ctr"/>
+          <a:lstStyle/>
+          <a:p>
+            <a:pPr algn="ctr"/>
+          </a:p>
+        </p:txBody>
+      </p:sp>
+      <p:sp>
+        <p:nvSpPr>
+          <p:cNvPr id="17" name="Rectangle 16"/>
+          <p:cNvSpPr/>
+          <p:nvPr/>
+        </p:nvSpPr>
+        <p:spPr>
+          <a:xfrm>
+            <a:off x="256032" y="3621024"/>
+            <a:ext cx="347472" cy="1170432"/>
+          </a:xfrm>
+          <a:prstGeom prst="rect">
+            <a:avLst/>
+          </a:prstGeom>
+          <a:solidFill>
+            <a:srgbClr val="1B5E20"/>
+          </a:solidFill>
+          <a:ln>
+            <a:noFill/>
+          </a:ln>
+        </p:spPr>
+        <p:style>
+          <a:lnRef idx="1">
+            <a:schemeClr val="accent1"/>
+          </a:lnRef>
+          <a:fillRef idx="3">
+            <a:schemeClr val="accent1"/>
+          </a:fillRef>
+          <a:effectRef idx="2">
+            <a:schemeClr val="accent1"/>
+          </a:effectRef>
+          <a:fontRef idx="minor">
+            <a:schemeClr val="lt1"/>
+          </a:fontRef>
+        </p:style>
+        <p:txBody>
+          <a:bodyPr rtlCol="0" anchor="ctr"/>
+          <a:lstStyle/>
+          <a:p>
+            <a:pPr algn="ctr"/>
+          </a:p>
+        </p:txBody>
+      </p:sp>
+      <p:sp>
+        <p:nvSpPr>
+          <p:cNvPr id="18" name="TextBox 17"/>
+          <p:cNvSpPr txBox="1"/>
+          <p:nvPr/>
+        </p:nvSpPr>
+        <p:spPr>
+          <a:xfrm>
+            <a:off x="265176" y="3968496"/>
+            <a:ext cx="329184" cy="457200"/>
+          </a:xfrm>
+          <a:prstGeom prst="rect">
+            <a:avLst/>
+          </a:prstGeom>
+          <a:noFill/>
+        </p:spPr>
+        <p:txBody>
+          <a:bodyPr wrap="square">
+            <a:spAutoFit/>
+          </a:bodyPr>
+          <a:lstStyle/>
+          <a:p>
+            <a:pPr algn="ctr"/>
+            <a:r>
+              <a:rPr sz="1800" b="1" i="0">
+                <a:solidFill>
+                  <a:srgbClr val="FFFFFF"/>
+                </a:solidFill>
+                <a:latin typeface="Arial"/>
+              </a:rPr>
+              <a:t>3</a:t>
+            </a:r>
+          </a:p>
+        </p:txBody>
+      </p:sp>
+      <p:sp>
+        <p:nvSpPr>
+          <p:cNvPr id="19" name="TextBox 18"/>
+          <p:cNvSpPr txBox="1"/>
+          <p:nvPr/>
+        </p:nvSpPr>
+        <p:spPr>
+          <a:xfrm>
+            <a:off x="685800" y="3712463"/>
+            <a:ext cx="8092440" cy="384048"/>
+          </a:xfrm>
+          <a:prstGeom prst="rect">
+            <a:avLst/>
+          </a:prstGeom>
+          <a:noFill/>
+        </p:spPr>
+        <p:txBody>
+          <a:bodyPr wrap="square">
+            <a:spAutoFit/>
+          </a:bodyPr>
+          <a:lstStyle/>
+          <a:p>
+            <a:pPr algn="l"/>
+            <a:r>
+              <a:rPr sz="1100" b="1" i="0">
+                <a:solidFill>
+                  <a:srgbClr val="111111"/>
+                </a:solidFill>
+                <a:latin typeface="Arial"/>
+              </a:rPr>
+              <a:t>A meta de 4.000 km² em 2028 exige ação agora.</a:t>
+            </a:r>
+          </a:p>
+        </p:txBody>
+      </p:sp>
+      <p:sp>
+        <p:nvSpPr>
+          <p:cNvPr id="20" name="TextBox 19"/>
+          <p:cNvSpPr txBox="1"/>
+          <p:nvPr/>
+        </p:nvSpPr>
+        <p:spPr>
+          <a:xfrm>
+            <a:off x="685800" y="4096512"/>
+            <a:ext cx="8092440" cy="594360"/>
+          </a:xfrm>
+          <a:prstGeom prst="rect">
+            <a:avLst/>
+          </a:prstGeom>
+          <a:noFill/>
+        </p:spPr>
+        <p:txBody>
+          <a:bodyPr wrap="square">
+            <a:spAutoFit/>
+          </a:bodyPr>
+          <a:lstStyle/>
+          <a:p>
+            <a:pPr algn="l"/>
+            <a:r>
+              <a:rPr sz="950" b="0" i="0">
+                <a:solidFill>
+                  <a:srgbClr val="555555"/>
+                </a:solidFill>
+                <a:latin typeface="Arial"/>
+              </a:rPr>
+              <a:t>Para chegar à meta, o Brasil precisa reduzir mais 91% nos próximos três anos. O tempo está curto.</a:t>
             </a:r>
           </a:p>
         </p:txBody>
@@ -5197,8 +5343,8 @@
         </p:nvSpPr>
         <p:spPr>
           <a:xfrm>
-            <a:off x="320040" y="164592"/>
-            <a:ext cx="8503920" cy="256032"/>
+            <a:off x="320040" y="109728"/>
+            <a:ext cx="1371600" cy="228600"/>
           </a:xfrm>
           <a:prstGeom prst="rect">
             <a:avLst/>
@@ -5219,27 +5365,74 @@
                 </a:solidFill>
                 <a:latin typeface="Arial"/>
               </a:rPr>
-              <a:t>BY BIOME</a:t>
-            </a:r>
-          </a:p>
-        </p:txBody>
-      </p:sp>
-      <p:sp>
-        <p:nvSpPr>
-          <p:cNvPr id="5" name="Rectangle 4"/>
+              <a:t>EN-US</a:t>
+            </a:r>
+          </a:p>
+        </p:txBody>
+      </p:sp>
+      <p:sp>
+        <p:nvSpPr>
+          <p:cNvPr id="5" name="TextBox 4"/>
+          <p:cNvSpPr txBox="1"/>
+          <p:nvPr/>
+        </p:nvSpPr>
+        <p:spPr>
+          <a:xfrm>
+            <a:off x="502920" y="640080"/>
+            <a:ext cx="7772400" cy="1737360"/>
+          </a:xfrm>
+          <a:prstGeom prst="rect">
+            <a:avLst/>
+          </a:prstGeom>
+          <a:noFill/>
+        </p:spPr>
+        <p:txBody>
+          <a:bodyPr wrap="square">
+            <a:spAutoFit/>
+          </a:bodyPr>
+          <a:lstStyle/>
+          <a:p>
+            <a:pPr algn="l"/>
+            <a:r>
+              <a:rPr sz="3000" b="1" i="0">
+                <a:solidFill>
+                  <a:srgbClr val="111111"/>
+                </a:solidFill>
+                <a:latin typeface="Georgia"/>
+              </a:rPr>
+              <a:t>Brazil's Deforestation</a:t>
+            </a:r>
+          </a:p>
+          <a:p>
+            <a:pPr algn="l"/>
+            <a:r>
+              <a:rPr sz="3000" b="1" i="0">
+                <a:solidFill>
+                  <a:srgbClr val="111111"/>
+                </a:solidFill>
+                <a:latin typeface="Georgia"/>
+              </a:rPr>
+              <a:t>Is Down — But Not Enough.</a:t>
+            </a:r>
+          </a:p>
+        </p:txBody>
+      </p:sp>
+      <p:sp>
+        <p:nvSpPr>
+          <p:cNvPr id="6" name="Rectangle 5"/>
           <p:cNvSpPr/>
           <p:nvPr/>
         </p:nvSpPr>
         <p:spPr>
           <a:xfrm>
-            <a:off x="320040" y="429768"/>
-            <a:ext cx="8503920" cy="4572"/>
+            <a:off x="502920" y="2514600"/>
+            <a:ext cx="2560320" cy="50292"/>
           </a:xfrm>
           <a:prstGeom prst="rect">
             <a:avLst/>
           </a:prstGeom>
           <a:solidFill>
-            <a:srgbClr val="E8E8E8"/>
+            <a:srgbClr val="0D47A1"/>
           </a:solidFill>
           <a:ln>
             <a:noFill/>
@@ -5269,129 +5462,70 @@
       </p:sp>
       <p:sp>
         <p:nvSpPr>
-          <p:cNvPr id="6" name="TextBox 5"/>
-          <p:cNvSpPr txBox="1"/>
-          <p:nvPr/>
-        </p:nvSpPr>
-        <p:spPr>
-          <a:xfrm>
-            <a:off x="320040" y="475488"/>
-            <a:ext cx="8503920" cy="777240"/>
-          </a:xfrm>
-          <a:prstGeom prst="rect">
-            <a:avLst/>
-          </a:prstGeom>
-          <a:noFill/>
-        </p:spPr>
-        <p:txBody>
-          <a:bodyPr wrap="square">
-            <a:spAutoFit/>
-          </a:bodyPr>
-          <a:lstStyle/>
-          <a:p>
-            <a:pPr algn="l"/>
-            <a:r>
-              <a:rPr sz="1350" b="1" i="0">
-                <a:solidFill>
-                  <a:srgbClr val="111111"/>
-                </a:solidFill>
-                <a:latin typeface="Arial"/>
-              </a:rPr>
-              <a:t>The Cerrado loses as much as the Amazon — and gets far less attention.</a:t>
-            </a:r>
-          </a:p>
-        </p:txBody>
-      </p:sp>
-      <p:sp>
-        <p:nvSpPr>
           <p:cNvPr id="7" name="TextBox 6"/>
           <p:cNvSpPr txBox="1"/>
           <p:nvPr/>
         </p:nvSpPr>
         <p:spPr>
           <a:xfrm>
-            <a:off x="320040" y="1234440"/>
-            <a:ext cx="8503920" cy="347472"/>
-          </a:xfrm>
-          <a:prstGeom prst="rect">
-            <a:avLst/>
-          </a:prstGeom>
-          <a:noFill/>
-        </p:spPr>
-        <p:txBody>
-          <a:bodyPr wrap="square">
-            <a:spAutoFit/>
-          </a:bodyPr>
-          <a:lstStyle/>
-          <a:p>
-            <a:pPr algn="l"/>
-            <a:r>
-              <a:rPr sz="850" b="0" i="0">
+            <a:off x="502920" y="2670048"/>
+            <a:ext cx="7772400" cy="384048"/>
+          </a:xfrm>
+          <a:prstGeom prst="rect">
+            <a:avLst/>
+          </a:prstGeom>
+          <a:noFill/>
+        </p:spPr>
+        <p:txBody>
+          <a:bodyPr wrap="square">
+            <a:spAutoFit/>
+          </a:bodyPr>
+          <a:lstStyle/>
+          <a:p>
+            <a:pPr algn="l"/>
+            <a:r>
+              <a:rPr sz="1000" b="0" i="0">
                 <a:solidFill>
                   <a:srgbClr val="555555"/>
                 </a:solidFill>
                 <a:latin typeface="Arial"/>
               </a:rPr>
-              <a:t>Deforestation by Brazilian biome (km²)  ·  2025</a:t>
-            </a:r>
-          </a:p>
-        </p:txBody>
-      </p:sp>
-      <p:pic>
-        <p:nvPicPr>
-          <p:cNvPr id="8" name="Picture 7" descr="image.png"/>
-          <p:cNvPicPr>
-            <a:picLocks noChangeAspect="1"/>
-          </p:cNvPicPr>
-          <p:nvPr/>
-        </p:nvPicPr>
-        <p:blipFill>
-          <a:blip r:embed="rId2"/>
-          <a:stretch>
-            <a:fillRect/>
-          </a:stretch>
-        </p:blipFill>
-        <p:spPr>
-          <a:xfrm>
-            <a:off x="365760" y="1481328"/>
-            <a:ext cx="8412480" cy="3427465"/>
-          </a:xfrm>
-          <a:prstGeom prst="rect">
-            <a:avLst/>
-          </a:prstGeom>
-        </p:spPr>
-      </p:pic>
-      <p:sp>
-        <p:nvSpPr>
-          <p:cNvPr id="9" name="TextBox 8"/>
-          <p:cNvSpPr txBox="1"/>
-          <p:nvPr/>
-        </p:nvSpPr>
-        <p:spPr>
-          <a:xfrm>
-            <a:off x="320040" y="4864608"/>
-            <a:ext cx="8503920" cy="256032"/>
-          </a:xfrm>
-          <a:prstGeom prst="rect">
-            <a:avLst/>
-          </a:prstGeom>
-          <a:noFill/>
-        </p:spPr>
-        <p:txBody>
-          <a:bodyPr wrap="square">
-            <a:spAutoFit/>
-          </a:bodyPr>
-          <a:lstStyle/>
-          <a:p>
-            <a:pPr algn="l"/>
-            <a:r>
-              <a:rPr sz="650" b="0" i="0">
+              <a:t>PRODES · INPE Data  |  Press Briefing  ·  2026</a:t>
+            </a:r>
+          </a:p>
+        </p:txBody>
+      </p:sp>
+      <p:sp>
+        <p:nvSpPr>
+          <p:cNvPr id="8" name="TextBox 7"/>
+          <p:cNvSpPr txBox="1"/>
+          <p:nvPr/>
+        </p:nvSpPr>
+        <p:spPr>
+          <a:xfrm>
+            <a:off x="502920" y="3182112"/>
+            <a:ext cx="7772400" cy="347472"/>
+          </a:xfrm>
+          <a:prstGeom prst="rect">
+            <a:avLst/>
+          </a:prstGeom>
+          <a:noFill/>
+        </p:spPr>
+        <p:txBody>
+          <a:bodyPr wrap="square">
+            <a:spAutoFit/>
+          </a:bodyPr>
+          <a:lstStyle/>
+          <a:p>
+            <a:pPr algn="l"/>
+            <a:r>
+              <a:rPr sz="900" b="0" i="1">
                 <a:solidFill>
                   <a:srgbClr val="999999"/>
                 </a:solidFill>
                 <a:latin typeface="Arial"/>
               </a:rPr>
-              <a:t>Source: INPE/PRODES · Calculated from GeoParquet data</a:t>
+              <a:t>Imazon — Institute for People and the Environment in Amazonia</a:t>
             </a:r>
           </a:p>
         </p:txBody>
@@ -5530,7 +5664,7 @@
                 </a:solidFill>
                 <a:latin typeface="Arial"/>
               </a:rPr>
-              <a:t>CERRADO SPOTLIGHT</a:t>
+              <a:t>LEGAL AMAZON</a:t>
             </a:r>
           </a:p>
         </p:txBody>
@@ -5586,7 +5720,42 @@
         </p:nvSpPr>
         <p:spPr>
           <a:xfrm>
-            <a:off x="320040" y="475488"/>
+            <a:off x="320040" y="502920"/>
+            <a:ext cx="3474720" cy="1371600"/>
+          </a:xfrm>
+          <a:prstGeom prst="rect">
+            <a:avLst/>
+          </a:prstGeom>
+          <a:noFill/>
+        </p:spPr>
+        <p:txBody>
+          <a:bodyPr wrap="none">
+            <a:spAutoFit/>
+          </a:bodyPr>
+          <a:lstStyle/>
+          <a:p>
+            <a:pPr algn="l"/>
+            <a:r>
+              <a:rPr sz="8800" b="1" i="0">
+                <a:solidFill>
+                  <a:srgbClr val="2E7D32"/>
+                </a:solidFill>
+                <a:latin typeface="Arial"/>
+              </a:rPr>
+              <a:t>99%</a:t>
+            </a:r>
+          </a:p>
+        </p:txBody>
+      </p:sp>
+      <p:sp>
+        <p:nvSpPr>
+          <p:cNvPr id="7" name="TextBox 6"/>
+          <p:cNvSpPr txBox="1"/>
+          <p:nvPr/>
+        </p:nvSpPr>
+        <p:spPr>
+          <a:xfrm>
+            <a:off x="320040" y="1737360"/>
             <a:ext cx="8503920" cy="777240"/>
           </a:xfrm>
           <a:prstGeom prst="rect">
@@ -5602,59 +5771,14 @@
           <a:p>
             <a:pPr algn="l"/>
             <a:r>
-              <a:rPr sz="1350" b="1" i="0">
+              <a:rPr sz="1500" b="1" i="0">
                 <a:solidFill>
                   <a:srgbClr val="111111"/>
                 </a:solidFill>
                 <a:latin typeface="Arial"/>
               </a:rPr>
-              <a:t>The Cerrado is Brazil's most proportionally threatened biome.</a:t>
-            </a:r>
-          </a:p>
-        </p:txBody>
-      </p:sp>
-      <p:sp>
-        <p:nvSpPr>
-          <p:cNvPr id="7" name="Rectangle 6"/>
-          <p:cNvSpPr/>
-          <p:nvPr/>
-        </p:nvSpPr>
-        <p:spPr>
-          <a:xfrm>
-            <a:off x="365760" y="1353312"/>
-            <a:ext cx="3977639" cy="1783080"/>
-          </a:xfrm>
-          <a:prstGeom prst="rect">
-            <a:avLst/>
-          </a:prstGeom>
-          <a:solidFill>
-            <a:srgbClr val="FFF8E1"/>
-          </a:solidFill>
-          <a:ln w="6350">
-            <a:solidFill>
-              <a:srgbClr val="C0392B"/>
-            </a:solidFill>
-          </a:ln>
-        </p:spPr>
-        <p:style>
-          <a:lnRef idx="1">
-            <a:schemeClr val="accent1"/>
-          </a:lnRef>
-          <a:fillRef idx="3">
-            <a:schemeClr val="accent1"/>
-          </a:fillRef>
-          <a:effectRef idx="2">
-            <a:schemeClr val="accent1"/>
-          </a:effectRef>
-          <a:fontRef idx="minor">
-            <a:schemeClr val="lt1"/>
-          </a:fontRef>
-        </p:style>
-        <p:txBody>
-          <a:bodyPr rtlCol="0" anchor="ctr"/>
-          <a:lstStyle/>
-          <a:p>
-            <a:pPr algn="ctr"/>
+              <a:t>Amazon deforestation fell 99% in 18 years.</a:t>
+            </a:r>
           </a:p>
         </p:txBody>
       </p:sp>
@@ -5666,29 +5790,41 @@
         </p:nvSpPr>
         <p:spPr>
           <a:xfrm>
-            <a:off x="594360" y="1444752"/>
-            <a:ext cx="3520440" cy="822960"/>
-          </a:xfrm>
-          <a:prstGeom prst="rect">
-            <a:avLst/>
-          </a:prstGeom>
-          <a:noFill/>
-        </p:spPr>
-        <p:txBody>
-          <a:bodyPr wrap="square">
-            <a:spAutoFit/>
-          </a:bodyPr>
-          <a:lstStyle/>
-          <a:p>
-            <a:pPr algn="l"/>
-            <a:r>
-              <a:rPr sz="3800" b="1" i="0">
-                <a:solidFill>
-                  <a:srgbClr val="C0392B"/>
-                </a:solidFill>
-                <a:latin typeface="Arial"/>
-              </a:rPr>
-              <a:t>36,176</a:t>
+            <a:off x="320040" y="2450592"/>
+            <a:ext cx="8503920" cy="914400"/>
+          </a:xfrm>
+          <a:prstGeom prst="rect">
+            <a:avLst/>
+          </a:prstGeom>
+          <a:noFill/>
+        </p:spPr>
+        <p:txBody>
+          <a:bodyPr wrap="square">
+            <a:spAutoFit/>
+          </a:bodyPr>
+          <a:lstStyle/>
+          <a:p>
+            <a:pPr algn="l"/>
+            <a:r>
+              <a:rPr sz="1050" b="0" i="0">
+                <a:solidFill>
+                  <a:srgbClr val="555555"/>
+                </a:solidFill>
+                <a:latin typeface="Arial"/>
+              </a:rPr>
+              <a:t>From 7,509,061 km² in 2007 to 44,620 km² in 2025 — lowest figure since 2000.</a:t>
+            </a:r>
+          </a:p>
+          <a:p>
+            <a:pPr algn="l"/>
+            <a:r>
+              <a:rPr sz="1050" b="0" i="0">
+                <a:solidFill>
+                  <a:srgbClr val="555555"/>
+                </a:solidFill>
+                <a:latin typeface="Arial"/>
+              </a:rPr>
+              <a:t>Yet still 11.2× the target set for 2028.</a:t>
             </a:r>
           </a:p>
         </p:txBody>
@@ -5696,215 +5832,6 @@
       <p:sp>
         <p:nvSpPr>
           <p:cNvPr id="9" name="TextBox 8"/>
-          <p:cNvSpPr txBox="1"/>
-          <p:nvPr/>
-        </p:nvSpPr>
-        <p:spPr>
-          <a:xfrm>
-            <a:off x="594360" y="2176272"/>
-            <a:ext cx="3520440" cy="822960"/>
-          </a:xfrm>
-          <a:prstGeom prst="rect">
-            <a:avLst/>
-          </a:prstGeom>
-          <a:noFill/>
-        </p:spPr>
-        <p:txBody>
-          <a:bodyPr wrap="square">
-            <a:spAutoFit/>
-          </a:bodyPr>
-          <a:lstStyle/>
-          <a:p>
-            <a:pPr algn="l"/>
-            <a:r>
-              <a:rPr sz="950" b="0" i="0">
-                <a:solidFill>
-                  <a:srgbClr val="555555"/>
-                </a:solidFill>
-                <a:latin typeface="Arial"/>
-              </a:rPr>
-              <a:t>km² deforested in the Cerrado</a:t>
-            </a:r>
-          </a:p>
-          <a:p>
-            <a:pPr algn="l"/>
-            <a:r>
-              <a:rPr sz="950" b="0" i="0">
-                <a:solidFill>
-                  <a:srgbClr val="555555"/>
-                </a:solidFill>
-                <a:latin typeface="Arial"/>
-              </a:rPr>
-              <a:t>— almost as much as the Amazon</a:t>
-            </a:r>
-          </a:p>
-        </p:txBody>
-      </p:sp>
-      <p:sp>
-        <p:nvSpPr>
-          <p:cNvPr id="10" name="Rectangle 9"/>
-          <p:cNvSpPr/>
-          <p:nvPr/>
-        </p:nvSpPr>
-        <p:spPr>
-          <a:xfrm>
-            <a:off x="4709160" y="1353312"/>
-            <a:ext cx="3977639" cy="1783080"/>
-          </a:xfrm>
-          <a:prstGeom prst="rect">
-            <a:avLst/>
-          </a:prstGeom>
-          <a:solidFill>
-            <a:srgbClr val="FFF8E1"/>
-          </a:solidFill>
-          <a:ln w="6350">
-            <a:solidFill>
-              <a:srgbClr val="C0392B"/>
-            </a:solidFill>
-          </a:ln>
-        </p:spPr>
-        <p:style>
-          <a:lnRef idx="1">
-            <a:schemeClr val="accent1"/>
-          </a:lnRef>
-          <a:fillRef idx="3">
-            <a:schemeClr val="accent1"/>
-          </a:fillRef>
-          <a:effectRef idx="2">
-            <a:schemeClr val="accent1"/>
-          </a:effectRef>
-          <a:fontRef idx="minor">
-            <a:schemeClr val="lt1"/>
-          </a:fontRef>
-        </p:style>
-        <p:txBody>
-          <a:bodyPr rtlCol="0" anchor="ctr"/>
-          <a:lstStyle/>
-          <a:p>
-            <a:pPr algn="ctr"/>
-          </a:p>
-        </p:txBody>
-      </p:sp>
-      <p:sp>
-        <p:nvSpPr>
-          <p:cNvPr id="11" name="TextBox 10"/>
-          <p:cNvSpPr txBox="1"/>
-          <p:nvPr/>
-        </p:nvSpPr>
-        <p:spPr>
-          <a:xfrm>
-            <a:off x="4937760" y="1444752"/>
-            <a:ext cx="3520440" cy="822960"/>
-          </a:xfrm>
-          <a:prstGeom prst="rect">
-            <a:avLst/>
-          </a:prstGeom>
-          <a:noFill/>
-        </p:spPr>
-        <p:txBody>
-          <a:bodyPr wrap="square">
-            <a:spAutoFit/>
-          </a:bodyPr>
-          <a:lstStyle/>
-          <a:p>
-            <a:pPr algn="l"/>
-            <a:r>
-              <a:rPr sz="3800" b="1" i="0">
-                <a:solidFill>
-                  <a:srgbClr val="C0392B"/>
-                </a:solidFill>
-                <a:latin typeface="Arial"/>
-              </a:rPr>
-              <a:t>53%</a:t>
-            </a:r>
-          </a:p>
-        </p:txBody>
-      </p:sp>
-      <p:sp>
-        <p:nvSpPr>
-          <p:cNvPr id="12" name="TextBox 11"/>
-          <p:cNvSpPr txBox="1"/>
-          <p:nvPr/>
-        </p:nvSpPr>
-        <p:spPr>
-          <a:xfrm>
-            <a:off x="4937760" y="2176272"/>
-            <a:ext cx="3520440" cy="822960"/>
-          </a:xfrm>
-          <a:prstGeom prst="rect">
-            <a:avLst/>
-          </a:prstGeom>
-          <a:noFill/>
-        </p:spPr>
-        <p:txBody>
-          <a:bodyPr wrap="square">
-            <a:spAutoFit/>
-          </a:bodyPr>
-          <a:lstStyle/>
-          <a:p>
-            <a:pPr algn="l"/>
-            <a:r>
-              <a:rPr sz="950" b="0" i="0">
-                <a:solidFill>
-                  <a:srgbClr val="555555"/>
-                </a:solidFill>
-                <a:latin typeface="Arial"/>
-              </a:rPr>
-              <a:t>of original cover remaining</a:t>
-            </a:r>
-          </a:p>
-          <a:p>
-            <a:pPr algn="l"/>
-            <a:r>
-              <a:rPr sz="950" b="0" i="0">
-                <a:solidFill>
-                  <a:srgbClr val="555555"/>
-                </a:solidFill>
-                <a:latin typeface="Arial"/>
-              </a:rPr>
-              <a:t>— Atlantic Forest already lost 87%</a:t>
-            </a:r>
-          </a:p>
-        </p:txBody>
-      </p:sp>
-      <p:sp>
-        <p:nvSpPr>
-          <p:cNvPr id="13" name="TextBox 12"/>
-          <p:cNvSpPr txBox="1"/>
-          <p:nvPr/>
-        </p:nvSpPr>
-        <p:spPr>
-          <a:xfrm>
-            <a:off x="320040" y="3246120"/>
-            <a:ext cx="8503920" cy="914400"/>
-          </a:xfrm>
-          <a:prstGeom prst="rect">
-            <a:avLst/>
-          </a:prstGeom>
-          <a:noFill/>
-        </p:spPr>
-        <p:txBody>
-          <a:bodyPr wrap="square">
-            <a:spAutoFit/>
-          </a:bodyPr>
-          <a:lstStyle/>
-          <a:p>
-            <a:pPr algn="l"/>
-            <a:r>
-              <a:rPr sz="950" b="0" i="0">
-                <a:solidFill>
-                  <a:srgbClr val="555555"/>
-                </a:solidFill>
-                <a:latin typeface="Arial"/>
-              </a:rPr>
-              <a:t>The Cerrado harbors 5% of the world's biodiversity and regulates the water cycle of Brazil's main river basins. It receives less than 10% of Amazon Fund resources.</a:t>
-            </a:r>
-          </a:p>
-        </p:txBody>
-      </p:sp>
-      <p:sp>
-        <p:nvSpPr>
-          <p:cNvPr id="14" name="TextBox 13"/>
           <p:cNvSpPr txBox="1"/>
           <p:nvPr/>
         </p:nvSpPr>
@@ -5932,7 +5859,7 @@
                 </a:solidFill>
                 <a:latin typeface="Arial"/>
               </a:rPr>
-              <a:t>Source: INPE/PRODES · Calculated from GeoParquet data  ·  MapBiomas 2023</a:t>
+              <a:t>Source: INPE/PRODES · Calculated from GeoParquet data</a:t>
             </a:r>
           </a:p>
         </p:txBody>
@@ -6071,7 +5998,7 @@
                 </a:solidFill>
                 <a:latin typeface="Arial"/>
               </a:rPr>
-              <a:t>FOREST COVER</a:t>
+              <a:t>LEGAL AMAZON</a:t>
             </a:r>
           </a:p>
         </p:txBody>
@@ -6149,7 +6076,7 @@
                 </a:solidFill>
                 <a:latin typeface="Arial"/>
               </a:rPr>
-              <a:t>Atlantic Forest: 13% remains. Pantanal: 86%. Cerrado: 53%.</a:t>
+              <a:t>Peak in 2007, steady decline since — but the 2028 target remains out of reach.</a:t>
             </a:r>
           </a:p>
         </p:txBody>
@@ -6184,7 +6111,7 @@
                 </a:solidFill>
                 <a:latin typeface="Arial"/>
               </a:rPr>
-              <a:t>Remaining native vegetation by biome (% of original area)  ·  MapBiomas 2023</a:t>
+              <a:t>Annual deforestation in Brazil's Legal Amazon (km²)  ·  2000–2028</a:t>
             </a:r>
           </a:p>
         </p:txBody>
@@ -6205,8 +6132,8 @@
         </p:blipFill>
         <p:spPr>
           <a:xfrm>
-            <a:off x="365760" y="1481328"/>
-            <a:ext cx="8412480" cy="3427465"/>
+            <a:off x="182880" y="1481328"/>
+            <a:ext cx="8778240" cy="3821673"/>
           </a:xfrm>
           <a:prstGeom prst="rect">
             <a:avLst/>
@@ -6243,7 +6170,7 @@
                 </a:solidFill>
                 <a:latin typeface="Arial"/>
               </a:rPr>
-              <a:t>Source: MapBiomas 2023 · Annual Land Cover and Use Mapping Project</a:t>
+              <a:t>Source: INPE/PRODES · Calculated from GeoParquet data</a:t>
             </a:r>
           </a:p>
         </p:txBody>
@@ -6382,7 +6309,7 @@
                 </a:solidFill>
                 <a:latin typeface="Arial"/>
               </a:rPr>
-              <a:t>2028 TARGET</a:t>
+              <a:t>LEGAL AMAZON</a:t>
             </a:r>
           </a:p>
         </p:txBody>
@@ -6460,7 +6387,7 @@
                 </a:solidFill>
                 <a:latin typeface="Arial"/>
               </a:rPr>
-              <a:t>The 4000 km² target for 2028 requires a further 91% cut.</a:t>
+              <a:t>Where are the 44,620 km² deforested in 2025?</a:t>
             </a:r>
           </a:p>
         </p:txBody>
@@ -6495,7 +6422,7 @@
                 </a:solidFill>
                 <a:latin typeface="Arial"/>
               </a:rPr>
-              <a:t>Observed trend and reduction target (km²)  ·  2000–2028</a:t>
+              <a:t>Deforestation polygons in Brazil's Legal Amazon · 2015–2025 · colored by detection year</a:t>
             </a:r>
           </a:p>
         </p:txBody>
@@ -6516,8 +6443,8 @@
         </p:blipFill>
         <p:spPr>
           <a:xfrm>
-            <a:off x="182880" y="1481328"/>
-            <a:ext cx="8778240" cy="3867427"/>
+            <a:off x="182880" y="1463040"/>
+            <a:ext cx="5486400" cy="4001669"/>
           </a:xfrm>
           <a:prstGeom prst="rect">
             <a:avLst/>
@@ -6526,7 +6453,262 @@
       </p:pic>
       <p:sp>
         <p:nvSpPr>
-          <p:cNvPr id="9" name="TextBox 8"/>
+          <p:cNvPr id="9" name="Rectangle 8"/>
+          <p:cNvSpPr/>
+          <p:nvPr/>
+        </p:nvSpPr>
+        <p:spPr>
+          <a:xfrm>
+            <a:off x="5852160" y="1481328"/>
+            <a:ext cx="3063240" cy="3383280"/>
+          </a:xfrm>
+          <a:prstGeom prst="rect">
+            <a:avLst/>
+          </a:prstGeom>
+          <a:solidFill>
+            <a:srgbClr val="F8F5F0"/>
+          </a:solidFill>
+          <a:ln w="6350">
+            <a:solidFill>
+              <a:srgbClr val="E0E0E0"/>
+            </a:solidFill>
+          </a:ln>
+        </p:spPr>
+        <p:style>
+          <a:lnRef idx="1">
+            <a:schemeClr val="accent1"/>
+          </a:lnRef>
+          <a:fillRef idx="3">
+            <a:schemeClr val="accent1"/>
+          </a:fillRef>
+          <a:effectRef idx="2">
+            <a:schemeClr val="accent1"/>
+          </a:effectRef>
+          <a:fontRef idx="minor">
+            <a:schemeClr val="lt1"/>
+          </a:fontRef>
+        </p:style>
+        <p:txBody>
+          <a:bodyPr rtlCol="0" anchor="ctr"/>
+          <a:lstStyle/>
+          <a:p>
+            <a:pPr algn="ctr"/>
+          </a:p>
+        </p:txBody>
+      </p:sp>
+      <p:sp>
+        <p:nvSpPr>
+          <p:cNvPr id="10" name="TextBox 9"/>
+          <p:cNvSpPr txBox="1"/>
+          <p:nvPr/>
+        </p:nvSpPr>
+        <p:spPr>
+          <a:xfrm>
+            <a:off x="6035040" y="1600200"/>
+            <a:ext cx="2743200" cy="502920"/>
+          </a:xfrm>
+          <a:prstGeom prst="rect">
+            <a:avLst/>
+          </a:prstGeom>
+          <a:noFill/>
+        </p:spPr>
+        <p:txBody>
+          <a:bodyPr wrap="square">
+            <a:spAutoFit/>
+          </a:bodyPr>
+          <a:lstStyle/>
+          <a:p>
+            <a:pPr algn="l"/>
+            <a:r>
+              <a:rPr sz="2200" b="1" i="0">
+                <a:solidFill>
+                  <a:srgbClr val="C0392B"/>
+                </a:solidFill>
+                <a:latin typeface="Arial"/>
+              </a:rPr>
+              <a:t>44,620 km²</a:t>
+            </a:r>
+          </a:p>
+        </p:txBody>
+      </p:sp>
+      <p:sp>
+        <p:nvSpPr>
+          <p:cNvPr id="11" name="TextBox 10"/>
+          <p:cNvSpPr txBox="1"/>
+          <p:nvPr/>
+        </p:nvSpPr>
+        <p:spPr>
+          <a:xfrm>
+            <a:off x="6035040" y="2075688"/>
+            <a:ext cx="2743200" cy="384048"/>
+          </a:xfrm>
+          <a:prstGeom prst="rect">
+            <a:avLst/>
+          </a:prstGeom>
+          <a:noFill/>
+        </p:spPr>
+        <p:txBody>
+          <a:bodyPr wrap="square">
+            <a:spAutoFit/>
+          </a:bodyPr>
+          <a:lstStyle/>
+          <a:p>
+            <a:pPr algn="l"/>
+            <a:r>
+              <a:rPr sz="900" b="0" i="0">
+                <a:solidFill>
+                  <a:srgbClr val="555555"/>
+                </a:solidFill>
+                <a:latin typeface="Arial"/>
+              </a:rPr>
+              <a:t>deforested in 2025</a:t>
+            </a:r>
+          </a:p>
+        </p:txBody>
+      </p:sp>
+      <p:sp>
+        <p:nvSpPr>
+          <p:cNvPr id="12" name="TextBox 11"/>
+          <p:cNvSpPr txBox="1"/>
+          <p:nvPr/>
+        </p:nvSpPr>
+        <p:spPr>
+          <a:xfrm>
+            <a:off x="6035040" y="2651760"/>
+            <a:ext cx="2743200" cy="502920"/>
+          </a:xfrm>
+          <a:prstGeom prst="rect">
+            <a:avLst/>
+          </a:prstGeom>
+          <a:noFill/>
+        </p:spPr>
+        <p:txBody>
+          <a:bodyPr wrap="square">
+            <a:spAutoFit/>
+          </a:bodyPr>
+          <a:lstStyle/>
+          <a:p>
+            <a:pPr algn="l"/>
+            <a:r>
+              <a:rPr sz="2200" b="1" i="0">
+                <a:solidFill>
+                  <a:srgbClr val="1A5276"/>
+                </a:solidFill>
+                <a:latin typeface="Arial"/>
+              </a:rPr>
+              <a:t>−99%</a:t>
+            </a:r>
+          </a:p>
+        </p:txBody>
+      </p:sp>
+      <p:sp>
+        <p:nvSpPr>
+          <p:cNvPr id="13" name="TextBox 12"/>
+          <p:cNvSpPr txBox="1"/>
+          <p:nvPr/>
+        </p:nvSpPr>
+        <p:spPr>
+          <a:xfrm>
+            <a:off x="6035040" y="3127248"/>
+            <a:ext cx="2743200" cy="384048"/>
+          </a:xfrm>
+          <a:prstGeom prst="rect">
+            <a:avLst/>
+          </a:prstGeom>
+          <a:noFill/>
+        </p:spPr>
+        <p:txBody>
+          <a:bodyPr wrap="square">
+            <a:spAutoFit/>
+          </a:bodyPr>
+          <a:lstStyle/>
+          <a:p>
+            <a:pPr algn="l"/>
+            <a:r>
+              <a:rPr sz="900" b="0" i="0">
+                <a:solidFill>
+                  <a:srgbClr val="555555"/>
+                </a:solidFill>
+                <a:latin typeface="Arial"/>
+              </a:rPr>
+              <a:t>since 2007 peak</a:t>
+            </a:r>
+          </a:p>
+        </p:txBody>
+      </p:sp>
+      <p:sp>
+        <p:nvSpPr>
+          <p:cNvPr id="14" name="TextBox 13"/>
+          <p:cNvSpPr txBox="1"/>
+          <p:nvPr/>
+        </p:nvSpPr>
+        <p:spPr>
+          <a:xfrm>
+            <a:off x="6035040" y="3703320"/>
+            <a:ext cx="2743200" cy="502920"/>
+          </a:xfrm>
+          <a:prstGeom prst="rect">
+            <a:avLst/>
+          </a:prstGeom>
+          <a:noFill/>
+        </p:spPr>
+        <p:txBody>
+          <a:bodyPr wrap="square">
+            <a:spAutoFit/>
+          </a:bodyPr>
+          <a:lstStyle/>
+          <a:p>
+            <a:pPr algn="l"/>
+            <a:r>
+              <a:rPr sz="2200" b="1" i="0">
+                <a:solidFill>
+                  <a:srgbClr val="2E7D32"/>
+                </a:solidFill>
+                <a:latin typeface="Arial"/>
+              </a:rPr>
+              <a:t>4,000 km²</a:t>
+            </a:r>
+          </a:p>
+        </p:txBody>
+      </p:sp>
+      <p:sp>
+        <p:nvSpPr>
+          <p:cNvPr id="15" name="TextBox 14"/>
+          <p:cNvSpPr txBox="1"/>
+          <p:nvPr/>
+        </p:nvSpPr>
+        <p:spPr>
+          <a:xfrm>
+            <a:off x="6035040" y="4178808"/>
+            <a:ext cx="2743200" cy="384048"/>
+          </a:xfrm>
+          <a:prstGeom prst="rect">
+            <a:avLst/>
+          </a:prstGeom>
+          <a:noFill/>
+        </p:spPr>
+        <p:txBody>
+          <a:bodyPr wrap="square">
+            <a:spAutoFit/>
+          </a:bodyPr>
+          <a:lstStyle/>
+          <a:p>
+            <a:pPr algn="l"/>
+            <a:r>
+              <a:rPr sz="900" b="0" i="0">
+                <a:solidFill>
+                  <a:srgbClr val="555555"/>
+                </a:solidFill>
+                <a:latin typeface="Arial"/>
+              </a:rPr>
+              <a:t>2028 target</a:t>
+            </a:r>
+          </a:p>
+        </p:txBody>
+      </p:sp>
+      <p:sp>
+        <p:nvSpPr>
+          <p:cNvPr id="16" name="TextBox 15"/>
           <p:cNvSpPr txBox="1"/>
           <p:nvPr/>
         </p:nvSpPr>
@@ -6693,7 +6875,7 @@
                 </a:solidFill>
                 <a:latin typeface="Arial"/>
               </a:rPr>
-              <a:t>GLOBAL CONTEXT</a:t>
+              <a:t>BY BIOME</a:t>
             </a:r>
           </a:p>
         </p:txBody>
@@ -6771,7 +6953,7 @@
                 </a:solidFill>
                 <a:latin typeface="Arial"/>
               </a:rPr>
-              <a:t>Brazil leads the decline — but remains the world's largest tropical deforester.</a:t>
+              <a:t>The Cerrado loses as much as the Amazon — and gets far less attention.</a:t>
             </a:r>
           </a:p>
         </p:txBody>
@@ -6806,7 +6988,7 @@
                 </a:solidFill>
                 <a:latin typeface="Arial"/>
               </a:rPr>
-              <a:t>Tropical forest loss by country (km²)  ·  2023  ·  Source: GFW / FAO</a:t>
+              <a:t>Deforestation by Brazilian biome (km²)  ·  2025</a:t>
             </a:r>
           </a:p>
         </p:txBody>
@@ -6828,7 +7010,7 @@
         <p:spPr>
           <a:xfrm>
             <a:off x="365760" y="1481328"/>
-            <a:ext cx="8412480" cy="3143453"/>
+            <a:ext cx="8412480" cy="3427465"/>
           </a:xfrm>
           <a:prstGeom prst="rect">
             <a:avLst/>
@@ -6838,41 +7020,6 @@
       <p:sp>
         <p:nvSpPr>
           <p:cNvPr id="9" name="TextBox 8"/>
-          <p:cNvSpPr txBox="1"/>
-          <p:nvPr/>
-        </p:nvSpPr>
-        <p:spPr>
-          <a:xfrm>
-            <a:off x="320040" y="4434840"/>
-            <a:ext cx="8503920" cy="320040"/>
-          </a:xfrm>
-          <a:prstGeom prst="rect">
-            <a:avLst/>
-          </a:prstGeom>
-          <a:noFill/>
-        </p:spPr>
-        <p:txBody>
-          <a:bodyPr wrap="square">
-            <a:spAutoFit/>
-          </a:bodyPr>
-          <a:lstStyle/>
-          <a:p>
-            <a:pPr algn="l"/>
-            <a:r>
-              <a:rPr sz="650" b="0" i="1">
-                <a:solidFill>
-                  <a:srgbClr val="999999"/>
-                </a:solidFill>
-                <a:latin typeface="Arial"/>
-              </a:rPr>
-              <a:t>* GFW measures tree-cover loss; PRODES measures deforestation. Different methodologies.</a:t>
-            </a:r>
-          </a:p>
-        </p:txBody>
-      </p:sp>
-      <p:sp>
-        <p:nvSpPr>
-          <p:cNvPr id="10" name="TextBox 9"/>
           <p:cNvSpPr txBox="1"/>
           <p:nvPr/>
         </p:nvSpPr>
@@ -6900,7 +7047,7 @@
                 </a:solidFill>
                 <a:latin typeface="Arial"/>
               </a:rPr>
-              <a:t>Source: Global Forest Watch / FAO 2023 · Approximate data — methodologies differ</a:t>
+              <a:t>Source: INPE/PRODES · Calculated from GeoParquet data</a:t>
             </a:r>
           </a:p>
         </p:txBody>
@@ -7039,7 +7186,7 @@
                 </a:solidFill>
                 <a:latin typeface="Arial"/>
               </a:rPr>
-              <a:t>DRIVERS &amp; RISKS</a:t>
+              <a:t>CERRADO SPOTLIGHT</a:t>
             </a:r>
           </a:p>
         </p:txBody>
@@ -7117,43 +7264,53 @@
                 </a:solidFill>
                 <a:latin typeface="Arial"/>
               </a:rPr>
-              <a:t>What drove the decline — and what could reverse it.</a:t>
-            </a:r>
-          </a:p>
-        </p:txBody>
-      </p:sp>
-      <p:sp>
-        <p:nvSpPr>
-          <p:cNvPr id="7" name="TextBox 6"/>
-          <p:cNvSpPr txBox="1"/>
-          <p:nvPr/>
-        </p:nvSpPr>
-        <p:spPr>
-          <a:xfrm>
-            <a:off x="320040" y="1353312"/>
-            <a:ext cx="8503920" cy="347472"/>
-          </a:xfrm>
-          <a:prstGeom prst="rect">
-            <a:avLst/>
-          </a:prstGeom>
-          <a:noFill/>
-        </p:spPr>
-        <p:txBody>
-          <a:bodyPr wrap="square">
-            <a:spAutoFit/>
-          </a:bodyPr>
-          <a:lstStyle/>
-          <a:p>
-            <a:pPr algn="l"/>
-            <a:r>
-              <a:rPr sz="1100" b="1" i="0">
-                <a:solidFill>
-                  <a:srgbClr val="2E7D32"/>
-                </a:solidFill>
-                <a:latin typeface="Arial"/>
-              </a:rPr>
-              <a:t>▲  Enforcement strengthened</a:t>
-            </a:r>
+              <a:t>The Cerrado is Brazil's most proportionally threatened biome.</a:t>
+            </a:r>
+          </a:p>
+        </p:txBody>
+      </p:sp>
+      <p:sp>
+        <p:nvSpPr>
+          <p:cNvPr id="7" name="Rectangle 6"/>
+          <p:cNvSpPr/>
+          <p:nvPr/>
+        </p:nvSpPr>
+        <p:spPr>
+          <a:xfrm>
+            <a:off x="365760" y="1353312"/>
+            <a:ext cx="3977639" cy="1783080"/>
+          </a:xfrm>
+          <a:prstGeom prst="rect">
+            <a:avLst/>
+          </a:prstGeom>
+          <a:solidFill>
+            <a:srgbClr val="FFF8E1"/>
+          </a:solidFill>
+          <a:ln w="6350">
+            <a:solidFill>
+              <a:srgbClr val="C0392B"/>
+            </a:solidFill>
+          </a:ln>
+        </p:spPr>
+        <p:style>
+          <a:lnRef idx="1">
+            <a:schemeClr val="accent1"/>
+          </a:lnRef>
+          <a:fillRef idx="3">
+            <a:schemeClr val="accent1"/>
+          </a:fillRef>
+          <a:effectRef idx="2">
+            <a:schemeClr val="accent1"/>
+          </a:effectRef>
+          <a:fontRef idx="minor">
+            <a:schemeClr val="lt1"/>
+          </a:fontRef>
+        </p:style>
+        <p:txBody>
+          <a:bodyPr rtlCol="0" anchor="ctr"/>
+          <a:lstStyle/>
+          <a:p>
+            <a:pPr algn="ctr"/>
           </a:p>
         </p:txBody>
       </p:sp>
@@ -7165,8 +7322,43 @@
         </p:nvSpPr>
         <p:spPr>
           <a:xfrm>
-            <a:off x="320040" y="1691640"/>
-            <a:ext cx="8503920" cy="685800"/>
+            <a:off x="594360" y="1444752"/>
+            <a:ext cx="3520440" cy="822960"/>
+          </a:xfrm>
+          <a:prstGeom prst="rect">
+            <a:avLst/>
+          </a:prstGeom>
+          <a:noFill/>
+        </p:spPr>
+        <p:txBody>
+          <a:bodyPr wrap="square">
+            <a:spAutoFit/>
+          </a:bodyPr>
+          <a:lstStyle/>
+          <a:p>
+            <a:pPr algn="l"/>
+            <a:r>
+              <a:rPr sz="3800" b="1" i="0">
+                <a:solidFill>
+                  <a:srgbClr val="C0392B"/>
+                </a:solidFill>
+                <a:latin typeface="Arial"/>
+              </a:rPr>
+              <a:t>57,882</a:t>
+            </a:r>
+          </a:p>
+        </p:txBody>
+      </p:sp>
+      <p:sp>
+        <p:nvSpPr>
+          <p:cNvPr id="9" name="TextBox 8"/>
+          <p:cNvSpPr txBox="1"/>
+          <p:nvPr/>
+        </p:nvSpPr>
+        <p:spPr>
+          <a:xfrm>
+            <a:off x="594360" y="2176272"/>
+            <a:ext cx="3520440" cy="822960"/>
           </a:xfrm>
           <a:prstGeom prst="rect">
             <a:avLst/>
@@ -7187,67 +7379,9 @@
                 </a:solidFill>
                 <a:latin typeface="Arial"/>
               </a:rPr>
-              <a:t>Ibama and Federal Police multiplied fines and embargoes from 2023. Coordinated operations reduced illegal deforestation.</a:t>
-            </a:r>
-          </a:p>
-        </p:txBody>
-      </p:sp>
-      <p:sp>
-        <p:nvSpPr>
-          <p:cNvPr id="9" name="TextBox 8"/>
-          <p:cNvSpPr txBox="1"/>
-          <p:nvPr/>
-        </p:nvSpPr>
-        <p:spPr>
-          <a:xfrm>
-            <a:off x="320040" y="2496312"/>
-            <a:ext cx="8503920" cy="347472"/>
-          </a:xfrm>
-          <a:prstGeom prst="rect">
-            <a:avLst/>
-          </a:prstGeom>
-          <a:noFill/>
-        </p:spPr>
-        <p:txBody>
-          <a:bodyPr wrap="square">
-            <a:spAutoFit/>
-          </a:bodyPr>
-          <a:lstStyle/>
-          <a:p>
-            <a:pPr algn="l"/>
-            <a:r>
-              <a:rPr sz="1100" b="1" i="0">
-                <a:solidFill>
-                  <a:srgbClr val="2E7D32"/>
-                </a:solidFill>
-                <a:latin typeface="Arial"/>
-              </a:rPr>
-              <a:t>▲  Climate finance increased</a:t>
-            </a:r>
-          </a:p>
-        </p:txBody>
-      </p:sp>
-      <p:sp>
-        <p:nvSpPr>
-          <p:cNvPr id="10" name="TextBox 9"/>
-          <p:cNvSpPr txBox="1"/>
-          <p:nvPr/>
-        </p:nvSpPr>
-        <p:spPr>
-          <a:xfrm>
-            <a:off x="320040" y="2834640"/>
-            <a:ext cx="8503920" cy="685800"/>
-          </a:xfrm>
-          <a:prstGeom prst="rect">
-            <a:avLst/>
-          </a:prstGeom>
-          <a:noFill/>
-        </p:spPr>
-        <p:txBody>
-          <a:bodyPr wrap="square">
-            <a:spAutoFit/>
-          </a:bodyPr>
-          <a:lstStyle/>
+              <a:t>km² deforested in the Cerrado</a:t>
+            </a:r>
+          </a:p>
           <a:p>
             <a:pPr algn="l"/>
             <a:r>
@@ -7257,8 +7391,53 @@
                 </a:solidFill>
                 <a:latin typeface="Arial"/>
               </a:rPr>
-              <a:t>Amazon Fund received BRL 3 bn+ in 2023–24 (Norway, Germany, USA). First phase of REDD+ Amazon operational.</a:t>
-            </a:r>
+              <a:t>— almost as much as the Amazon</a:t>
+            </a:r>
+          </a:p>
+        </p:txBody>
+      </p:sp>
+      <p:sp>
+        <p:nvSpPr>
+          <p:cNvPr id="10" name="Rectangle 9"/>
+          <p:cNvSpPr/>
+          <p:nvPr/>
+        </p:nvSpPr>
+        <p:spPr>
+          <a:xfrm>
+            <a:off x="4709160" y="1353312"/>
+            <a:ext cx="3977639" cy="1783080"/>
+          </a:xfrm>
+          <a:prstGeom prst="rect">
+            <a:avLst/>
+          </a:prstGeom>
+          <a:solidFill>
+            <a:srgbClr val="FFF8E1"/>
+          </a:solidFill>
+          <a:ln w="6350">
+            <a:solidFill>
+              <a:srgbClr val="C0392B"/>
+            </a:solidFill>
+          </a:ln>
+        </p:spPr>
+        <p:style>
+          <a:lnRef idx="1">
+            <a:schemeClr val="accent1"/>
+          </a:lnRef>
+          <a:fillRef idx="3">
+            <a:schemeClr val="accent1"/>
+          </a:fillRef>
+          <a:effectRef idx="2">
+            <a:schemeClr val="accent1"/>
+          </a:effectRef>
+          <a:fontRef idx="minor">
+            <a:schemeClr val="lt1"/>
+          </a:fontRef>
+        </p:style>
+        <p:txBody>
+          <a:bodyPr rtlCol="0" anchor="ctr"/>
+          <a:lstStyle/>
+          <a:p>
+            <a:pPr algn="ctr"/>
           </a:p>
         </p:txBody>
       </p:sp>
@@ -7270,29 +7449,29 @@
         </p:nvSpPr>
         <p:spPr>
           <a:xfrm>
-            <a:off x="320040" y="3639312"/>
-            <a:ext cx="8503920" cy="347472"/>
-          </a:xfrm>
-          <a:prstGeom prst="rect">
-            <a:avLst/>
-          </a:prstGeom>
-          <a:noFill/>
-        </p:spPr>
-        <p:txBody>
-          <a:bodyPr wrap="square">
-            <a:spAutoFit/>
-          </a:bodyPr>
-          <a:lstStyle/>
-          <a:p>
-            <a:pPr algn="l"/>
-            <a:r>
-              <a:rPr sz="1100" b="1" i="0">
+            <a:off x="4937760" y="1444752"/>
+            <a:ext cx="3520440" cy="822960"/>
+          </a:xfrm>
+          <a:prstGeom prst="rect">
+            <a:avLst/>
+          </a:prstGeom>
+          <a:noFill/>
+        </p:spPr>
+        <p:txBody>
+          <a:bodyPr wrap="square">
+            <a:spAutoFit/>
+          </a:bodyPr>
+          <a:lstStyle/>
+          <a:p>
+            <a:pPr algn="l"/>
+            <a:r>
+              <a:rPr sz="3800" b="1" i="0">
                 <a:solidFill>
                   <a:srgbClr val="C0392B"/>
                 </a:solidFill>
                 <a:latin typeface="Arial"/>
               </a:rPr>
-              <a:t>▼  Risk: land regularization bills</a:t>
+              <a:t>53%</a:t>
             </a:r>
           </a:p>
         </p:txBody>
@@ -7305,8 +7484,8 @@
         </p:nvSpPr>
         <p:spPr>
           <a:xfrm>
-            <a:off x="320040" y="3977639"/>
-            <a:ext cx="8503920" cy="685800"/>
+            <a:off x="4937760" y="2176272"/>
+            <a:ext cx="3520440" cy="822960"/>
           </a:xfrm>
           <a:prstGeom prst="rect">
             <a:avLst/>
@@ -7327,7 +7506,89 @@
                 </a:solidFill>
                 <a:latin typeface="Arial"/>
               </a:rPr>
-              <a:t>Legislation that would amnesty illegal deforestation before 2008 risks creating incentives for new environmental crimes.</a:t>
+              <a:t>of original cover remaining</a:t>
+            </a:r>
+          </a:p>
+          <a:p>
+            <a:pPr algn="l"/>
+            <a:r>
+              <a:rPr sz="950" b="0" i="0">
+                <a:solidFill>
+                  <a:srgbClr val="555555"/>
+                </a:solidFill>
+                <a:latin typeface="Arial"/>
+              </a:rPr>
+              <a:t>— Atlantic Forest already lost 87%</a:t>
+            </a:r>
+          </a:p>
+        </p:txBody>
+      </p:sp>
+      <p:sp>
+        <p:nvSpPr>
+          <p:cNvPr id="13" name="TextBox 12"/>
+          <p:cNvSpPr txBox="1"/>
+          <p:nvPr/>
+        </p:nvSpPr>
+        <p:spPr>
+          <a:xfrm>
+            <a:off x="320040" y="3246120"/>
+            <a:ext cx="8503920" cy="914400"/>
+          </a:xfrm>
+          <a:prstGeom prst="rect">
+            <a:avLst/>
+          </a:prstGeom>
+          <a:noFill/>
+        </p:spPr>
+        <p:txBody>
+          <a:bodyPr wrap="square">
+            <a:spAutoFit/>
+          </a:bodyPr>
+          <a:lstStyle/>
+          <a:p>
+            <a:pPr algn="l"/>
+            <a:r>
+              <a:rPr sz="950" b="0" i="0">
+                <a:solidFill>
+                  <a:srgbClr val="555555"/>
+                </a:solidFill>
+                <a:latin typeface="Arial"/>
+              </a:rPr>
+              <a:t>The Cerrado harbors 5% of the world's biodiversity and regulates the water cycle of Brazil's main river basins. It receives less than 10% of Amazon Fund resources.</a:t>
+            </a:r>
+          </a:p>
+        </p:txBody>
+      </p:sp>
+      <p:sp>
+        <p:nvSpPr>
+          <p:cNvPr id="14" name="TextBox 13"/>
+          <p:cNvSpPr txBox="1"/>
+          <p:nvPr/>
+        </p:nvSpPr>
+        <p:spPr>
+          <a:xfrm>
+            <a:off x="320040" y="4864608"/>
+            <a:ext cx="8503920" cy="256032"/>
+          </a:xfrm>
+          <a:prstGeom prst="rect">
+            <a:avLst/>
+          </a:prstGeom>
+          <a:noFill/>
+        </p:spPr>
+        <p:txBody>
+          <a:bodyPr wrap="square">
+            <a:spAutoFit/>
+          </a:bodyPr>
+          <a:lstStyle/>
+          <a:p>
+            <a:pPr algn="l"/>
+            <a:r>
+              <a:rPr sz="650" b="0" i="0">
+                <a:solidFill>
+                  <a:srgbClr val="999999"/>
+                </a:solidFill>
+                <a:latin typeface="Arial"/>
+              </a:rPr>
+              <a:t>Source: INPE/PRODES · Calculated from GeoParquet data  ·  MapBiomas 2023</a:t>
             </a:r>
           </a:p>
         </p:txBody>
@@ -7684,6 +7945,1437 @@
         <p:nvPr/>
       </p:nvGrpSpPr>
       <p:grpSpPr/>
+    </p:spTree>
+  </p:cSld>
+  <p:clrMapOvr>
+    <a:masterClrMapping/>
+  </p:clrMapOvr>
+</p:sld>
+</file>
+
+<file path=ppt/slides/slide21.xml><?xml version="1.0" encoding="utf-8"?>
+<p:sld xmlns:a="http://schemas.openxmlformats.org/drawingml/2006/main" xmlns:p="http://schemas.openxmlformats.org/presentationml/2006/main" xmlns:r="http://schemas.openxmlformats.org/officeDocument/2006/relationships">
+  <p:cSld>
+    <p:spTree>
+      <p:nvGrpSpPr>
+        <p:cNvPr id="1" name=""/>
+        <p:cNvGrpSpPr/>
+        <p:nvPr/>
+      </p:nvGrpSpPr>
+      <p:grpSpPr/>
+    </p:spTree>
+  </p:cSld>
+  <p:clrMapOvr>
+    <a:masterClrMapping/>
+  </p:clrMapOvr>
+</p:sld>
+</file>
+
+<file path=ppt/slides/slide22.xml><?xml version="1.0" encoding="utf-8"?>
+<p:sld xmlns:a="http://schemas.openxmlformats.org/drawingml/2006/main" xmlns:p="http://schemas.openxmlformats.org/presentationml/2006/main" xmlns:r="http://schemas.openxmlformats.org/officeDocument/2006/relationships">
+  <p:cSld>
+    <p:spTree>
+      <p:nvGrpSpPr>
+        <p:cNvPr id="1" name=""/>
+        <p:cNvGrpSpPr/>
+        <p:nvPr/>
+      </p:nvGrpSpPr>
+      <p:grpSpPr/>
+      <p:sp>
+        <p:nvSpPr>
+          <p:cNvPr id="2" name="Rectangle 1"/>
+          <p:cNvSpPr/>
+          <p:nvPr/>
+        </p:nvSpPr>
+        <p:spPr>
+          <a:xfrm>
+            <a:off x="0" y="0"/>
+            <a:ext cx="9144000" cy="50292"/>
+          </a:xfrm>
+          <a:prstGeom prst="rect">
+            <a:avLst/>
+          </a:prstGeom>
+          <a:solidFill>
+            <a:srgbClr val="0D47A1"/>
+          </a:solidFill>
+          <a:ln>
+            <a:noFill/>
+          </a:ln>
+        </p:spPr>
+        <p:style>
+          <a:lnRef idx="1">
+            <a:schemeClr val="accent1"/>
+          </a:lnRef>
+          <a:fillRef idx="3">
+            <a:schemeClr val="accent1"/>
+          </a:fillRef>
+          <a:effectRef idx="2">
+            <a:schemeClr val="accent1"/>
+          </a:effectRef>
+          <a:fontRef idx="minor">
+            <a:schemeClr val="lt1"/>
+          </a:fontRef>
+        </p:style>
+        <p:txBody>
+          <a:bodyPr rtlCol="0" anchor="ctr"/>
+          <a:lstStyle/>
+          <a:p>
+            <a:pPr algn="ctr"/>
+          </a:p>
+        </p:txBody>
+      </p:sp>
+      <p:sp>
+        <p:nvSpPr>
+          <p:cNvPr id="3" name="Rectangle 2"/>
+          <p:cNvSpPr/>
+          <p:nvPr/>
+        </p:nvSpPr>
+        <p:spPr>
+          <a:xfrm>
+            <a:off x="0" y="5093208"/>
+            <a:ext cx="9144000" cy="50292"/>
+          </a:xfrm>
+          <a:prstGeom prst="rect">
+            <a:avLst/>
+          </a:prstGeom>
+          <a:solidFill>
+            <a:srgbClr val="0D47A1"/>
+          </a:solidFill>
+          <a:ln>
+            <a:noFill/>
+          </a:ln>
+        </p:spPr>
+        <p:style>
+          <a:lnRef idx="1">
+            <a:schemeClr val="accent1"/>
+          </a:lnRef>
+          <a:fillRef idx="3">
+            <a:schemeClr val="accent1"/>
+          </a:fillRef>
+          <a:effectRef idx="2">
+            <a:schemeClr val="accent1"/>
+          </a:effectRef>
+          <a:fontRef idx="minor">
+            <a:schemeClr val="lt1"/>
+          </a:fontRef>
+        </p:style>
+        <p:txBody>
+          <a:bodyPr rtlCol="0" anchor="ctr"/>
+          <a:lstStyle/>
+          <a:p>
+            <a:pPr algn="ctr"/>
+          </a:p>
+        </p:txBody>
+      </p:sp>
+      <p:sp>
+        <p:nvSpPr>
+          <p:cNvPr id="4" name="TextBox 3"/>
+          <p:cNvSpPr txBox="1"/>
+          <p:nvPr/>
+        </p:nvSpPr>
+        <p:spPr>
+          <a:xfrm>
+            <a:off x="320040" y="164592"/>
+            <a:ext cx="8503920" cy="256032"/>
+          </a:xfrm>
+          <a:prstGeom prst="rect">
+            <a:avLst/>
+          </a:prstGeom>
+          <a:noFill/>
+        </p:spPr>
+        <p:txBody>
+          <a:bodyPr wrap="square">
+            <a:spAutoFit/>
+          </a:bodyPr>
+          <a:lstStyle/>
+          <a:p>
+            <a:pPr algn="l"/>
+            <a:r>
+              <a:rPr sz="700" b="1" i="0">
+                <a:solidFill>
+                  <a:srgbClr val="0D47A1"/>
+                </a:solidFill>
+                <a:latin typeface="Arial"/>
+              </a:rPr>
+              <a:t>FOREST COVER</a:t>
+            </a:r>
+          </a:p>
+        </p:txBody>
+      </p:sp>
+      <p:sp>
+        <p:nvSpPr>
+          <p:cNvPr id="5" name="Rectangle 4"/>
+          <p:cNvSpPr/>
+          <p:nvPr/>
+        </p:nvSpPr>
+        <p:spPr>
+          <a:xfrm>
+            <a:off x="320040" y="429768"/>
+            <a:ext cx="8503920" cy="4572"/>
+          </a:xfrm>
+          <a:prstGeom prst="rect">
+            <a:avLst/>
+          </a:prstGeom>
+          <a:solidFill>
+            <a:srgbClr val="E8E8E8"/>
+          </a:solidFill>
+          <a:ln>
+            <a:noFill/>
+          </a:ln>
+        </p:spPr>
+        <p:style>
+          <a:lnRef idx="1">
+            <a:schemeClr val="accent1"/>
+          </a:lnRef>
+          <a:fillRef idx="3">
+            <a:schemeClr val="accent1"/>
+          </a:fillRef>
+          <a:effectRef idx="2">
+            <a:schemeClr val="accent1"/>
+          </a:effectRef>
+          <a:fontRef idx="minor">
+            <a:schemeClr val="lt1"/>
+          </a:fontRef>
+        </p:style>
+        <p:txBody>
+          <a:bodyPr rtlCol="0" anchor="ctr"/>
+          <a:lstStyle/>
+          <a:p>
+            <a:pPr algn="ctr"/>
+          </a:p>
+        </p:txBody>
+      </p:sp>
+      <p:sp>
+        <p:nvSpPr>
+          <p:cNvPr id="6" name="TextBox 5"/>
+          <p:cNvSpPr txBox="1"/>
+          <p:nvPr/>
+        </p:nvSpPr>
+        <p:spPr>
+          <a:xfrm>
+            <a:off x="320040" y="475488"/>
+            <a:ext cx="8503920" cy="777240"/>
+          </a:xfrm>
+          <a:prstGeom prst="rect">
+            <a:avLst/>
+          </a:prstGeom>
+          <a:noFill/>
+        </p:spPr>
+        <p:txBody>
+          <a:bodyPr wrap="square">
+            <a:spAutoFit/>
+          </a:bodyPr>
+          <a:lstStyle/>
+          <a:p>
+            <a:pPr algn="l"/>
+            <a:r>
+              <a:rPr sz="1350" b="1" i="0">
+                <a:solidFill>
+                  <a:srgbClr val="111111"/>
+                </a:solidFill>
+                <a:latin typeface="Arial"/>
+              </a:rPr>
+              <a:t>Atlantic Forest: 13% remains. Pantanal: 86%. Cerrado: 53%.</a:t>
+            </a:r>
+          </a:p>
+        </p:txBody>
+      </p:sp>
+      <p:sp>
+        <p:nvSpPr>
+          <p:cNvPr id="7" name="TextBox 6"/>
+          <p:cNvSpPr txBox="1"/>
+          <p:nvPr/>
+        </p:nvSpPr>
+        <p:spPr>
+          <a:xfrm>
+            <a:off x="320040" y="1234440"/>
+            <a:ext cx="8503920" cy="347472"/>
+          </a:xfrm>
+          <a:prstGeom prst="rect">
+            <a:avLst/>
+          </a:prstGeom>
+          <a:noFill/>
+        </p:spPr>
+        <p:txBody>
+          <a:bodyPr wrap="square">
+            <a:spAutoFit/>
+          </a:bodyPr>
+          <a:lstStyle/>
+          <a:p>
+            <a:pPr algn="l"/>
+            <a:r>
+              <a:rPr sz="850" b="0" i="0">
+                <a:solidFill>
+                  <a:srgbClr val="555555"/>
+                </a:solidFill>
+                <a:latin typeface="Arial"/>
+              </a:rPr>
+              <a:t>Remaining native vegetation by biome (% of original area)  ·  MapBiomas 2023</a:t>
+            </a:r>
+          </a:p>
+        </p:txBody>
+      </p:sp>
+      <p:pic>
+        <p:nvPicPr>
+          <p:cNvPr id="8" name="Picture 7" descr="image.png"/>
+          <p:cNvPicPr>
+            <a:picLocks noChangeAspect="1"/>
+          </p:cNvPicPr>
+          <p:nvPr/>
+        </p:nvPicPr>
+        <p:blipFill>
+          <a:blip r:embed="rId2"/>
+          <a:stretch>
+            <a:fillRect/>
+          </a:stretch>
+        </p:blipFill>
+        <p:spPr>
+          <a:xfrm>
+            <a:off x="365760" y="1481328"/>
+            <a:ext cx="8412480" cy="3427465"/>
+          </a:xfrm>
+          <a:prstGeom prst="rect">
+            <a:avLst/>
+          </a:prstGeom>
+        </p:spPr>
+      </p:pic>
+      <p:sp>
+        <p:nvSpPr>
+          <p:cNvPr id="9" name="TextBox 8"/>
+          <p:cNvSpPr txBox="1"/>
+          <p:nvPr/>
+        </p:nvSpPr>
+        <p:spPr>
+          <a:xfrm>
+            <a:off x="320040" y="4864608"/>
+            <a:ext cx="8503920" cy="256032"/>
+          </a:xfrm>
+          <a:prstGeom prst="rect">
+            <a:avLst/>
+          </a:prstGeom>
+          <a:noFill/>
+        </p:spPr>
+        <p:txBody>
+          <a:bodyPr wrap="square">
+            <a:spAutoFit/>
+          </a:bodyPr>
+          <a:lstStyle/>
+          <a:p>
+            <a:pPr algn="l"/>
+            <a:r>
+              <a:rPr sz="650" b="0" i="0">
+                <a:solidFill>
+                  <a:srgbClr val="999999"/>
+                </a:solidFill>
+                <a:latin typeface="Arial"/>
+              </a:rPr>
+              <a:t>Source: MapBiomas 2023 · Annual Land Cover and Use Mapping Project</a:t>
+            </a:r>
+          </a:p>
+        </p:txBody>
+      </p:sp>
+    </p:spTree>
+  </p:cSld>
+  <p:clrMapOvr>
+    <a:masterClrMapping/>
+  </p:clrMapOvr>
+</p:sld>
+</file>
+
+<file path=ppt/slides/slide23.xml><?xml version="1.0" encoding="utf-8"?>
+<p:sld xmlns:a="http://schemas.openxmlformats.org/drawingml/2006/main" xmlns:p="http://schemas.openxmlformats.org/presentationml/2006/main" xmlns:r="http://schemas.openxmlformats.org/officeDocument/2006/relationships">
+  <p:cSld>
+    <p:spTree>
+      <p:nvGrpSpPr>
+        <p:cNvPr id="1" name=""/>
+        <p:cNvGrpSpPr/>
+        <p:nvPr/>
+      </p:nvGrpSpPr>
+      <p:grpSpPr/>
+      <p:sp>
+        <p:nvSpPr>
+          <p:cNvPr id="2" name="Rectangle 1"/>
+          <p:cNvSpPr/>
+          <p:nvPr/>
+        </p:nvSpPr>
+        <p:spPr>
+          <a:xfrm>
+            <a:off x="0" y="0"/>
+            <a:ext cx="9144000" cy="50292"/>
+          </a:xfrm>
+          <a:prstGeom prst="rect">
+            <a:avLst/>
+          </a:prstGeom>
+          <a:solidFill>
+            <a:srgbClr val="0D47A1"/>
+          </a:solidFill>
+          <a:ln>
+            <a:noFill/>
+          </a:ln>
+        </p:spPr>
+        <p:style>
+          <a:lnRef idx="1">
+            <a:schemeClr val="accent1"/>
+          </a:lnRef>
+          <a:fillRef idx="3">
+            <a:schemeClr val="accent1"/>
+          </a:fillRef>
+          <a:effectRef idx="2">
+            <a:schemeClr val="accent1"/>
+          </a:effectRef>
+          <a:fontRef idx="minor">
+            <a:schemeClr val="lt1"/>
+          </a:fontRef>
+        </p:style>
+        <p:txBody>
+          <a:bodyPr rtlCol="0" anchor="ctr"/>
+          <a:lstStyle/>
+          <a:p>
+            <a:pPr algn="ctr"/>
+          </a:p>
+        </p:txBody>
+      </p:sp>
+      <p:sp>
+        <p:nvSpPr>
+          <p:cNvPr id="3" name="Rectangle 2"/>
+          <p:cNvSpPr/>
+          <p:nvPr/>
+        </p:nvSpPr>
+        <p:spPr>
+          <a:xfrm>
+            <a:off x="0" y="5093208"/>
+            <a:ext cx="9144000" cy="50292"/>
+          </a:xfrm>
+          <a:prstGeom prst="rect">
+            <a:avLst/>
+          </a:prstGeom>
+          <a:solidFill>
+            <a:srgbClr val="0D47A1"/>
+          </a:solidFill>
+          <a:ln>
+            <a:noFill/>
+          </a:ln>
+        </p:spPr>
+        <p:style>
+          <a:lnRef idx="1">
+            <a:schemeClr val="accent1"/>
+          </a:lnRef>
+          <a:fillRef idx="3">
+            <a:schemeClr val="accent1"/>
+          </a:fillRef>
+          <a:effectRef idx="2">
+            <a:schemeClr val="accent1"/>
+          </a:effectRef>
+          <a:fontRef idx="minor">
+            <a:schemeClr val="lt1"/>
+          </a:fontRef>
+        </p:style>
+        <p:txBody>
+          <a:bodyPr rtlCol="0" anchor="ctr"/>
+          <a:lstStyle/>
+          <a:p>
+            <a:pPr algn="ctr"/>
+          </a:p>
+        </p:txBody>
+      </p:sp>
+      <p:sp>
+        <p:nvSpPr>
+          <p:cNvPr id="4" name="TextBox 3"/>
+          <p:cNvSpPr txBox="1"/>
+          <p:nvPr/>
+        </p:nvSpPr>
+        <p:spPr>
+          <a:xfrm>
+            <a:off x="320040" y="164592"/>
+            <a:ext cx="8503920" cy="256032"/>
+          </a:xfrm>
+          <a:prstGeom prst="rect">
+            <a:avLst/>
+          </a:prstGeom>
+          <a:noFill/>
+        </p:spPr>
+        <p:txBody>
+          <a:bodyPr wrap="square">
+            <a:spAutoFit/>
+          </a:bodyPr>
+          <a:lstStyle/>
+          <a:p>
+            <a:pPr algn="l"/>
+            <a:r>
+              <a:rPr sz="700" b="1" i="0">
+                <a:solidFill>
+                  <a:srgbClr val="0D47A1"/>
+                </a:solidFill>
+                <a:latin typeface="Arial"/>
+              </a:rPr>
+              <a:t>2028 TARGET</a:t>
+            </a:r>
+          </a:p>
+        </p:txBody>
+      </p:sp>
+      <p:sp>
+        <p:nvSpPr>
+          <p:cNvPr id="5" name="Rectangle 4"/>
+          <p:cNvSpPr/>
+          <p:nvPr/>
+        </p:nvSpPr>
+        <p:spPr>
+          <a:xfrm>
+            <a:off x="320040" y="429768"/>
+            <a:ext cx="8503920" cy="4572"/>
+          </a:xfrm>
+          <a:prstGeom prst="rect">
+            <a:avLst/>
+          </a:prstGeom>
+          <a:solidFill>
+            <a:srgbClr val="E8E8E8"/>
+          </a:solidFill>
+          <a:ln>
+            <a:noFill/>
+          </a:ln>
+        </p:spPr>
+        <p:style>
+          <a:lnRef idx="1">
+            <a:schemeClr val="accent1"/>
+          </a:lnRef>
+          <a:fillRef idx="3">
+            <a:schemeClr val="accent1"/>
+          </a:fillRef>
+          <a:effectRef idx="2">
+            <a:schemeClr val="accent1"/>
+          </a:effectRef>
+          <a:fontRef idx="minor">
+            <a:schemeClr val="lt1"/>
+          </a:fontRef>
+        </p:style>
+        <p:txBody>
+          <a:bodyPr rtlCol="0" anchor="ctr"/>
+          <a:lstStyle/>
+          <a:p>
+            <a:pPr algn="ctr"/>
+          </a:p>
+        </p:txBody>
+      </p:sp>
+      <p:sp>
+        <p:nvSpPr>
+          <p:cNvPr id="6" name="TextBox 5"/>
+          <p:cNvSpPr txBox="1"/>
+          <p:nvPr/>
+        </p:nvSpPr>
+        <p:spPr>
+          <a:xfrm>
+            <a:off x="320040" y="475488"/>
+            <a:ext cx="8503920" cy="777240"/>
+          </a:xfrm>
+          <a:prstGeom prst="rect">
+            <a:avLst/>
+          </a:prstGeom>
+          <a:noFill/>
+        </p:spPr>
+        <p:txBody>
+          <a:bodyPr wrap="square">
+            <a:spAutoFit/>
+          </a:bodyPr>
+          <a:lstStyle/>
+          <a:p>
+            <a:pPr algn="l"/>
+            <a:r>
+              <a:rPr sz="1350" b="1" i="0">
+                <a:solidFill>
+                  <a:srgbClr val="111111"/>
+                </a:solidFill>
+                <a:latin typeface="Arial"/>
+              </a:rPr>
+              <a:t>The 4000 km² target for 2028 requires a further 91% cut.</a:t>
+            </a:r>
+          </a:p>
+        </p:txBody>
+      </p:sp>
+      <p:sp>
+        <p:nvSpPr>
+          <p:cNvPr id="7" name="TextBox 6"/>
+          <p:cNvSpPr txBox="1"/>
+          <p:nvPr/>
+        </p:nvSpPr>
+        <p:spPr>
+          <a:xfrm>
+            <a:off x="320040" y="1234440"/>
+            <a:ext cx="8503920" cy="347472"/>
+          </a:xfrm>
+          <a:prstGeom prst="rect">
+            <a:avLst/>
+          </a:prstGeom>
+          <a:noFill/>
+        </p:spPr>
+        <p:txBody>
+          <a:bodyPr wrap="square">
+            <a:spAutoFit/>
+          </a:bodyPr>
+          <a:lstStyle/>
+          <a:p>
+            <a:pPr algn="l"/>
+            <a:r>
+              <a:rPr sz="850" b="0" i="0">
+                <a:solidFill>
+                  <a:srgbClr val="555555"/>
+                </a:solidFill>
+                <a:latin typeface="Arial"/>
+              </a:rPr>
+              <a:t>Observed trend and reduction target (km²)  ·  2000–2028</a:t>
+            </a:r>
+          </a:p>
+        </p:txBody>
+      </p:sp>
+      <p:pic>
+        <p:nvPicPr>
+          <p:cNvPr id="8" name="Picture 7" descr="image.png"/>
+          <p:cNvPicPr>
+            <a:picLocks noChangeAspect="1"/>
+          </p:cNvPicPr>
+          <p:nvPr/>
+        </p:nvPicPr>
+        <p:blipFill>
+          <a:blip r:embed="rId2"/>
+          <a:stretch>
+            <a:fillRect/>
+          </a:stretch>
+        </p:blipFill>
+        <p:spPr>
+          <a:xfrm>
+            <a:off x="182880" y="1481328"/>
+            <a:ext cx="8778240" cy="3867427"/>
+          </a:xfrm>
+          <a:prstGeom prst="rect">
+            <a:avLst/>
+          </a:prstGeom>
+        </p:spPr>
+      </p:pic>
+      <p:sp>
+        <p:nvSpPr>
+          <p:cNvPr id="9" name="TextBox 8"/>
+          <p:cNvSpPr txBox="1"/>
+          <p:nvPr/>
+        </p:nvSpPr>
+        <p:spPr>
+          <a:xfrm>
+            <a:off x="320040" y="4864608"/>
+            <a:ext cx="8503920" cy="256032"/>
+          </a:xfrm>
+          <a:prstGeom prst="rect">
+            <a:avLst/>
+          </a:prstGeom>
+          <a:noFill/>
+        </p:spPr>
+        <p:txBody>
+          <a:bodyPr wrap="square">
+            <a:spAutoFit/>
+          </a:bodyPr>
+          <a:lstStyle/>
+          <a:p>
+            <a:pPr algn="l"/>
+            <a:r>
+              <a:rPr sz="650" b="0" i="0">
+                <a:solidFill>
+                  <a:srgbClr val="999999"/>
+                </a:solidFill>
+                <a:latin typeface="Arial"/>
+              </a:rPr>
+              <a:t>Source: INPE/PRODES · Calculated from GeoParquet data</a:t>
+            </a:r>
+          </a:p>
+        </p:txBody>
+      </p:sp>
+    </p:spTree>
+  </p:cSld>
+  <p:clrMapOvr>
+    <a:masterClrMapping/>
+  </p:clrMapOvr>
+</p:sld>
+</file>
+
+<file path=ppt/slides/slide24.xml><?xml version="1.0" encoding="utf-8"?>
+<p:sld xmlns:a="http://schemas.openxmlformats.org/drawingml/2006/main" xmlns:p="http://schemas.openxmlformats.org/presentationml/2006/main" xmlns:r="http://schemas.openxmlformats.org/officeDocument/2006/relationships">
+  <p:cSld>
+    <p:spTree>
+      <p:nvGrpSpPr>
+        <p:cNvPr id="1" name=""/>
+        <p:cNvGrpSpPr/>
+        <p:nvPr/>
+      </p:nvGrpSpPr>
+      <p:grpSpPr/>
+      <p:sp>
+        <p:nvSpPr>
+          <p:cNvPr id="2" name="Rectangle 1"/>
+          <p:cNvSpPr/>
+          <p:nvPr/>
+        </p:nvSpPr>
+        <p:spPr>
+          <a:xfrm>
+            <a:off x="0" y="0"/>
+            <a:ext cx="9144000" cy="50292"/>
+          </a:xfrm>
+          <a:prstGeom prst="rect">
+            <a:avLst/>
+          </a:prstGeom>
+          <a:solidFill>
+            <a:srgbClr val="0D47A1"/>
+          </a:solidFill>
+          <a:ln>
+            <a:noFill/>
+          </a:ln>
+        </p:spPr>
+        <p:style>
+          <a:lnRef idx="1">
+            <a:schemeClr val="accent1"/>
+          </a:lnRef>
+          <a:fillRef idx="3">
+            <a:schemeClr val="accent1"/>
+          </a:fillRef>
+          <a:effectRef idx="2">
+            <a:schemeClr val="accent1"/>
+          </a:effectRef>
+          <a:fontRef idx="minor">
+            <a:schemeClr val="lt1"/>
+          </a:fontRef>
+        </p:style>
+        <p:txBody>
+          <a:bodyPr rtlCol="0" anchor="ctr"/>
+          <a:lstStyle/>
+          <a:p>
+            <a:pPr algn="ctr"/>
+          </a:p>
+        </p:txBody>
+      </p:sp>
+      <p:sp>
+        <p:nvSpPr>
+          <p:cNvPr id="3" name="Rectangle 2"/>
+          <p:cNvSpPr/>
+          <p:nvPr/>
+        </p:nvSpPr>
+        <p:spPr>
+          <a:xfrm>
+            <a:off x="0" y="5093208"/>
+            <a:ext cx="9144000" cy="50292"/>
+          </a:xfrm>
+          <a:prstGeom prst="rect">
+            <a:avLst/>
+          </a:prstGeom>
+          <a:solidFill>
+            <a:srgbClr val="0D47A1"/>
+          </a:solidFill>
+          <a:ln>
+            <a:noFill/>
+          </a:ln>
+        </p:spPr>
+        <p:style>
+          <a:lnRef idx="1">
+            <a:schemeClr val="accent1"/>
+          </a:lnRef>
+          <a:fillRef idx="3">
+            <a:schemeClr val="accent1"/>
+          </a:fillRef>
+          <a:effectRef idx="2">
+            <a:schemeClr val="accent1"/>
+          </a:effectRef>
+          <a:fontRef idx="minor">
+            <a:schemeClr val="lt1"/>
+          </a:fontRef>
+        </p:style>
+        <p:txBody>
+          <a:bodyPr rtlCol="0" anchor="ctr"/>
+          <a:lstStyle/>
+          <a:p>
+            <a:pPr algn="ctr"/>
+          </a:p>
+        </p:txBody>
+      </p:sp>
+      <p:sp>
+        <p:nvSpPr>
+          <p:cNvPr id="4" name="TextBox 3"/>
+          <p:cNvSpPr txBox="1"/>
+          <p:nvPr/>
+        </p:nvSpPr>
+        <p:spPr>
+          <a:xfrm>
+            <a:off x="320040" y="164592"/>
+            <a:ext cx="8503920" cy="256032"/>
+          </a:xfrm>
+          <a:prstGeom prst="rect">
+            <a:avLst/>
+          </a:prstGeom>
+          <a:noFill/>
+        </p:spPr>
+        <p:txBody>
+          <a:bodyPr wrap="square">
+            <a:spAutoFit/>
+          </a:bodyPr>
+          <a:lstStyle/>
+          <a:p>
+            <a:pPr algn="l"/>
+            <a:r>
+              <a:rPr sz="700" b="1" i="0">
+                <a:solidFill>
+                  <a:srgbClr val="0D47A1"/>
+                </a:solidFill>
+                <a:latin typeface="Arial"/>
+              </a:rPr>
+              <a:t>GLOBAL CONTEXT</a:t>
+            </a:r>
+          </a:p>
+        </p:txBody>
+      </p:sp>
+      <p:sp>
+        <p:nvSpPr>
+          <p:cNvPr id="5" name="Rectangle 4"/>
+          <p:cNvSpPr/>
+          <p:nvPr/>
+        </p:nvSpPr>
+        <p:spPr>
+          <a:xfrm>
+            <a:off x="320040" y="429768"/>
+            <a:ext cx="8503920" cy="4572"/>
+          </a:xfrm>
+          <a:prstGeom prst="rect">
+            <a:avLst/>
+          </a:prstGeom>
+          <a:solidFill>
+            <a:srgbClr val="E8E8E8"/>
+          </a:solidFill>
+          <a:ln>
+            <a:noFill/>
+          </a:ln>
+        </p:spPr>
+        <p:style>
+          <a:lnRef idx="1">
+            <a:schemeClr val="accent1"/>
+          </a:lnRef>
+          <a:fillRef idx="3">
+            <a:schemeClr val="accent1"/>
+          </a:fillRef>
+          <a:effectRef idx="2">
+            <a:schemeClr val="accent1"/>
+          </a:effectRef>
+          <a:fontRef idx="minor">
+            <a:schemeClr val="lt1"/>
+          </a:fontRef>
+        </p:style>
+        <p:txBody>
+          <a:bodyPr rtlCol="0" anchor="ctr"/>
+          <a:lstStyle/>
+          <a:p>
+            <a:pPr algn="ctr"/>
+          </a:p>
+        </p:txBody>
+      </p:sp>
+      <p:sp>
+        <p:nvSpPr>
+          <p:cNvPr id="6" name="TextBox 5"/>
+          <p:cNvSpPr txBox="1"/>
+          <p:nvPr/>
+        </p:nvSpPr>
+        <p:spPr>
+          <a:xfrm>
+            <a:off x="320040" y="475488"/>
+            <a:ext cx="8503920" cy="777240"/>
+          </a:xfrm>
+          <a:prstGeom prst="rect">
+            <a:avLst/>
+          </a:prstGeom>
+          <a:noFill/>
+        </p:spPr>
+        <p:txBody>
+          <a:bodyPr wrap="square">
+            <a:spAutoFit/>
+          </a:bodyPr>
+          <a:lstStyle/>
+          <a:p>
+            <a:pPr algn="l"/>
+            <a:r>
+              <a:rPr sz="1350" b="1" i="0">
+                <a:solidFill>
+                  <a:srgbClr val="111111"/>
+                </a:solidFill>
+                <a:latin typeface="Arial"/>
+              </a:rPr>
+              <a:t>Brazil leads the decline — but remains the world's largest tropical deforester.</a:t>
+            </a:r>
+          </a:p>
+        </p:txBody>
+      </p:sp>
+      <p:sp>
+        <p:nvSpPr>
+          <p:cNvPr id="7" name="TextBox 6"/>
+          <p:cNvSpPr txBox="1"/>
+          <p:nvPr/>
+        </p:nvSpPr>
+        <p:spPr>
+          <a:xfrm>
+            <a:off x="320040" y="1234440"/>
+            <a:ext cx="8503920" cy="347472"/>
+          </a:xfrm>
+          <a:prstGeom prst="rect">
+            <a:avLst/>
+          </a:prstGeom>
+          <a:noFill/>
+        </p:spPr>
+        <p:txBody>
+          <a:bodyPr wrap="square">
+            <a:spAutoFit/>
+          </a:bodyPr>
+          <a:lstStyle/>
+          <a:p>
+            <a:pPr algn="l"/>
+            <a:r>
+              <a:rPr sz="850" b="0" i="0">
+                <a:solidFill>
+                  <a:srgbClr val="555555"/>
+                </a:solidFill>
+                <a:latin typeface="Arial"/>
+              </a:rPr>
+              <a:t>Tropical forest loss by country (km²)  ·  2023  ·  Source: GFW / FAO</a:t>
+            </a:r>
+          </a:p>
+        </p:txBody>
+      </p:sp>
+      <p:pic>
+        <p:nvPicPr>
+          <p:cNvPr id="8" name="Picture 7" descr="image.png"/>
+          <p:cNvPicPr>
+            <a:picLocks noChangeAspect="1"/>
+          </p:cNvPicPr>
+          <p:nvPr/>
+        </p:nvPicPr>
+        <p:blipFill>
+          <a:blip r:embed="rId2"/>
+          <a:stretch>
+            <a:fillRect/>
+          </a:stretch>
+        </p:blipFill>
+        <p:spPr>
+          <a:xfrm>
+            <a:off x="365760" y="1481328"/>
+            <a:ext cx="8412480" cy="3143453"/>
+          </a:xfrm>
+          <a:prstGeom prst="rect">
+            <a:avLst/>
+          </a:prstGeom>
+        </p:spPr>
+      </p:pic>
+      <p:sp>
+        <p:nvSpPr>
+          <p:cNvPr id="9" name="TextBox 8"/>
+          <p:cNvSpPr txBox="1"/>
+          <p:nvPr/>
+        </p:nvSpPr>
+        <p:spPr>
+          <a:xfrm>
+            <a:off x="320040" y="4434840"/>
+            <a:ext cx="8503920" cy="320040"/>
+          </a:xfrm>
+          <a:prstGeom prst="rect">
+            <a:avLst/>
+          </a:prstGeom>
+          <a:noFill/>
+        </p:spPr>
+        <p:txBody>
+          <a:bodyPr wrap="square">
+            <a:spAutoFit/>
+          </a:bodyPr>
+          <a:lstStyle/>
+          <a:p>
+            <a:pPr algn="l"/>
+            <a:r>
+              <a:rPr sz="650" b="0" i="1">
+                <a:solidFill>
+                  <a:srgbClr val="999999"/>
+                </a:solidFill>
+                <a:latin typeface="Arial"/>
+              </a:rPr>
+              <a:t>* GFW measures tree-cover loss; PRODES measures deforestation. Different methodologies.</a:t>
+            </a:r>
+          </a:p>
+        </p:txBody>
+      </p:sp>
+      <p:sp>
+        <p:nvSpPr>
+          <p:cNvPr id="10" name="TextBox 9"/>
+          <p:cNvSpPr txBox="1"/>
+          <p:nvPr/>
+        </p:nvSpPr>
+        <p:spPr>
+          <a:xfrm>
+            <a:off x="320040" y="4864608"/>
+            <a:ext cx="8503920" cy="256032"/>
+          </a:xfrm>
+          <a:prstGeom prst="rect">
+            <a:avLst/>
+          </a:prstGeom>
+          <a:noFill/>
+        </p:spPr>
+        <p:txBody>
+          <a:bodyPr wrap="square">
+            <a:spAutoFit/>
+          </a:bodyPr>
+          <a:lstStyle/>
+          <a:p>
+            <a:pPr algn="l"/>
+            <a:r>
+              <a:rPr sz="650" b="0" i="0">
+                <a:solidFill>
+                  <a:srgbClr val="999999"/>
+                </a:solidFill>
+                <a:latin typeface="Arial"/>
+              </a:rPr>
+              <a:t>Source: Global Forest Watch / FAO 2023 · Approximate data — methodologies differ</a:t>
+            </a:r>
+          </a:p>
+        </p:txBody>
+      </p:sp>
+    </p:spTree>
+  </p:cSld>
+  <p:clrMapOvr>
+    <a:masterClrMapping/>
+  </p:clrMapOvr>
+</p:sld>
+</file>
+
+<file path=ppt/slides/slide25.xml><?xml version="1.0" encoding="utf-8"?>
+<p:sld xmlns:a="http://schemas.openxmlformats.org/drawingml/2006/main" xmlns:p="http://schemas.openxmlformats.org/presentationml/2006/main" xmlns:r="http://schemas.openxmlformats.org/officeDocument/2006/relationships">
+  <p:cSld>
+    <p:spTree>
+      <p:nvGrpSpPr>
+        <p:cNvPr id="1" name=""/>
+        <p:cNvGrpSpPr/>
+        <p:nvPr/>
+      </p:nvGrpSpPr>
+      <p:grpSpPr/>
+      <p:sp>
+        <p:nvSpPr>
+          <p:cNvPr id="2" name="Rectangle 1"/>
+          <p:cNvSpPr/>
+          <p:nvPr/>
+        </p:nvSpPr>
+        <p:spPr>
+          <a:xfrm>
+            <a:off x="0" y="0"/>
+            <a:ext cx="9144000" cy="50292"/>
+          </a:xfrm>
+          <a:prstGeom prst="rect">
+            <a:avLst/>
+          </a:prstGeom>
+          <a:solidFill>
+            <a:srgbClr val="0D47A1"/>
+          </a:solidFill>
+          <a:ln>
+            <a:noFill/>
+          </a:ln>
+        </p:spPr>
+        <p:style>
+          <a:lnRef idx="1">
+            <a:schemeClr val="accent1"/>
+          </a:lnRef>
+          <a:fillRef idx="3">
+            <a:schemeClr val="accent1"/>
+          </a:fillRef>
+          <a:effectRef idx="2">
+            <a:schemeClr val="accent1"/>
+          </a:effectRef>
+          <a:fontRef idx="minor">
+            <a:schemeClr val="lt1"/>
+          </a:fontRef>
+        </p:style>
+        <p:txBody>
+          <a:bodyPr rtlCol="0" anchor="ctr"/>
+          <a:lstStyle/>
+          <a:p>
+            <a:pPr algn="ctr"/>
+          </a:p>
+        </p:txBody>
+      </p:sp>
+      <p:sp>
+        <p:nvSpPr>
+          <p:cNvPr id="3" name="Rectangle 2"/>
+          <p:cNvSpPr/>
+          <p:nvPr/>
+        </p:nvSpPr>
+        <p:spPr>
+          <a:xfrm>
+            <a:off x="0" y="5093208"/>
+            <a:ext cx="9144000" cy="50292"/>
+          </a:xfrm>
+          <a:prstGeom prst="rect">
+            <a:avLst/>
+          </a:prstGeom>
+          <a:solidFill>
+            <a:srgbClr val="0D47A1"/>
+          </a:solidFill>
+          <a:ln>
+            <a:noFill/>
+          </a:ln>
+        </p:spPr>
+        <p:style>
+          <a:lnRef idx="1">
+            <a:schemeClr val="accent1"/>
+          </a:lnRef>
+          <a:fillRef idx="3">
+            <a:schemeClr val="accent1"/>
+          </a:fillRef>
+          <a:effectRef idx="2">
+            <a:schemeClr val="accent1"/>
+          </a:effectRef>
+          <a:fontRef idx="minor">
+            <a:schemeClr val="lt1"/>
+          </a:fontRef>
+        </p:style>
+        <p:txBody>
+          <a:bodyPr rtlCol="0" anchor="ctr"/>
+          <a:lstStyle/>
+          <a:p>
+            <a:pPr algn="ctr"/>
+          </a:p>
+        </p:txBody>
+      </p:sp>
+      <p:sp>
+        <p:nvSpPr>
+          <p:cNvPr id="4" name="TextBox 3"/>
+          <p:cNvSpPr txBox="1"/>
+          <p:nvPr/>
+        </p:nvSpPr>
+        <p:spPr>
+          <a:xfrm>
+            <a:off x="320040" y="164592"/>
+            <a:ext cx="8503920" cy="256032"/>
+          </a:xfrm>
+          <a:prstGeom prst="rect">
+            <a:avLst/>
+          </a:prstGeom>
+          <a:noFill/>
+        </p:spPr>
+        <p:txBody>
+          <a:bodyPr wrap="square">
+            <a:spAutoFit/>
+          </a:bodyPr>
+          <a:lstStyle/>
+          <a:p>
+            <a:pPr algn="l"/>
+            <a:r>
+              <a:rPr sz="700" b="1" i="0">
+                <a:solidFill>
+                  <a:srgbClr val="0D47A1"/>
+                </a:solidFill>
+                <a:latin typeface="Arial"/>
+              </a:rPr>
+              <a:t>DRIVERS &amp; RISKS</a:t>
+            </a:r>
+          </a:p>
+        </p:txBody>
+      </p:sp>
+      <p:sp>
+        <p:nvSpPr>
+          <p:cNvPr id="5" name="Rectangle 4"/>
+          <p:cNvSpPr/>
+          <p:nvPr/>
+        </p:nvSpPr>
+        <p:spPr>
+          <a:xfrm>
+            <a:off x="320040" y="429768"/>
+            <a:ext cx="8503920" cy="4572"/>
+          </a:xfrm>
+          <a:prstGeom prst="rect">
+            <a:avLst/>
+          </a:prstGeom>
+          <a:solidFill>
+            <a:srgbClr val="E8E8E8"/>
+          </a:solidFill>
+          <a:ln>
+            <a:noFill/>
+          </a:ln>
+        </p:spPr>
+        <p:style>
+          <a:lnRef idx="1">
+            <a:schemeClr val="accent1"/>
+          </a:lnRef>
+          <a:fillRef idx="3">
+            <a:schemeClr val="accent1"/>
+          </a:fillRef>
+          <a:effectRef idx="2">
+            <a:schemeClr val="accent1"/>
+          </a:effectRef>
+          <a:fontRef idx="minor">
+            <a:schemeClr val="lt1"/>
+          </a:fontRef>
+        </p:style>
+        <p:txBody>
+          <a:bodyPr rtlCol="0" anchor="ctr"/>
+          <a:lstStyle/>
+          <a:p>
+            <a:pPr algn="ctr"/>
+          </a:p>
+        </p:txBody>
+      </p:sp>
+      <p:sp>
+        <p:nvSpPr>
+          <p:cNvPr id="6" name="TextBox 5"/>
+          <p:cNvSpPr txBox="1"/>
+          <p:nvPr/>
+        </p:nvSpPr>
+        <p:spPr>
+          <a:xfrm>
+            <a:off x="320040" y="475488"/>
+            <a:ext cx="8503920" cy="777240"/>
+          </a:xfrm>
+          <a:prstGeom prst="rect">
+            <a:avLst/>
+          </a:prstGeom>
+          <a:noFill/>
+        </p:spPr>
+        <p:txBody>
+          <a:bodyPr wrap="square">
+            <a:spAutoFit/>
+          </a:bodyPr>
+          <a:lstStyle/>
+          <a:p>
+            <a:pPr algn="l"/>
+            <a:r>
+              <a:rPr sz="1350" b="1" i="0">
+                <a:solidFill>
+                  <a:srgbClr val="111111"/>
+                </a:solidFill>
+                <a:latin typeface="Arial"/>
+              </a:rPr>
+              <a:t>What drove the decline — and what could reverse it.</a:t>
+            </a:r>
+          </a:p>
+        </p:txBody>
+      </p:sp>
+      <p:sp>
+        <p:nvSpPr>
+          <p:cNvPr id="7" name="TextBox 6"/>
+          <p:cNvSpPr txBox="1"/>
+          <p:nvPr/>
+        </p:nvSpPr>
+        <p:spPr>
+          <a:xfrm>
+            <a:off x="320040" y="1353312"/>
+            <a:ext cx="8503920" cy="347472"/>
+          </a:xfrm>
+          <a:prstGeom prst="rect">
+            <a:avLst/>
+          </a:prstGeom>
+          <a:noFill/>
+        </p:spPr>
+        <p:txBody>
+          <a:bodyPr wrap="square">
+            <a:spAutoFit/>
+          </a:bodyPr>
+          <a:lstStyle/>
+          <a:p>
+            <a:pPr algn="l"/>
+            <a:r>
+              <a:rPr sz="1100" b="1" i="0">
+                <a:solidFill>
+                  <a:srgbClr val="2E7D32"/>
+                </a:solidFill>
+                <a:latin typeface="Arial"/>
+              </a:rPr>
+              <a:t>▲  Enforcement strengthened</a:t>
+            </a:r>
+          </a:p>
+        </p:txBody>
+      </p:sp>
+      <p:sp>
+        <p:nvSpPr>
+          <p:cNvPr id="8" name="TextBox 7"/>
+          <p:cNvSpPr txBox="1"/>
+          <p:nvPr/>
+        </p:nvSpPr>
+        <p:spPr>
+          <a:xfrm>
+            <a:off x="320040" y="1691640"/>
+            <a:ext cx="8503920" cy="685800"/>
+          </a:xfrm>
+          <a:prstGeom prst="rect">
+            <a:avLst/>
+          </a:prstGeom>
+          <a:noFill/>
+        </p:spPr>
+        <p:txBody>
+          <a:bodyPr wrap="square">
+            <a:spAutoFit/>
+          </a:bodyPr>
+          <a:lstStyle/>
+          <a:p>
+            <a:pPr algn="l"/>
+            <a:r>
+              <a:rPr sz="950" b="0" i="0">
+                <a:solidFill>
+                  <a:srgbClr val="555555"/>
+                </a:solidFill>
+                <a:latin typeface="Arial"/>
+              </a:rPr>
+              <a:t>Ibama and Federal Police multiplied fines and embargoes from 2023. Coordinated operations reduced illegal deforestation.</a:t>
+            </a:r>
+          </a:p>
+        </p:txBody>
+      </p:sp>
+      <p:sp>
+        <p:nvSpPr>
+          <p:cNvPr id="9" name="TextBox 8"/>
+          <p:cNvSpPr txBox="1"/>
+          <p:nvPr/>
+        </p:nvSpPr>
+        <p:spPr>
+          <a:xfrm>
+            <a:off x="320040" y="2496312"/>
+            <a:ext cx="8503920" cy="347472"/>
+          </a:xfrm>
+          <a:prstGeom prst="rect">
+            <a:avLst/>
+          </a:prstGeom>
+          <a:noFill/>
+        </p:spPr>
+        <p:txBody>
+          <a:bodyPr wrap="square">
+            <a:spAutoFit/>
+          </a:bodyPr>
+          <a:lstStyle/>
+          <a:p>
+            <a:pPr algn="l"/>
+            <a:r>
+              <a:rPr sz="1100" b="1" i="0">
+                <a:solidFill>
+                  <a:srgbClr val="2E7D32"/>
+                </a:solidFill>
+                <a:latin typeface="Arial"/>
+              </a:rPr>
+              <a:t>▲  Climate finance increased</a:t>
+            </a:r>
+          </a:p>
+        </p:txBody>
+      </p:sp>
+      <p:sp>
+        <p:nvSpPr>
+          <p:cNvPr id="10" name="TextBox 9"/>
+          <p:cNvSpPr txBox="1"/>
+          <p:nvPr/>
+        </p:nvSpPr>
+        <p:spPr>
+          <a:xfrm>
+            <a:off x="320040" y="2834640"/>
+            <a:ext cx="8503920" cy="685800"/>
+          </a:xfrm>
+          <a:prstGeom prst="rect">
+            <a:avLst/>
+          </a:prstGeom>
+          <a:noFill/>
+        </p:spPr>
+        <p:txBody>
+          <a:bodyPr wrap="square">
+            <a:spAutoFit/>
+          </a:bodyPr>
+          <a:lstStyle/>
+          <a:p>
+            <a:pPr algn="l"/>
+            <a:r>
+              <a:rPr sz="950" b="0" i="0">
+                <a:solidFill>
+                  <a:srgbClr val="555555"/>
+                </a:solidFill>
+                <a:latin typeface="Arial"/>
+              </a:rPr>
+              <a:t>Amazon Fund received BRL 3 bn+ in 2023–24 (Norway, Germany, USA). First phase of REDD+ Amazon operational.</a:t>
+            </a:r>
+          </a:p>
+        </p:txBody>
+      </p:sp>
+      <p:sp>
+        <p:nvSpPr>
+          <p:cNvPr id="11" name="TextBox 10"/>
+          <p:cNvSpPr txBox="1"/>
+          <p:nvPr/>
+        </p:nvSpPr>
+        <p:spPr>
+          <a:xfrm>
+            <a:off x="320040" y="3639312"/>
+            <a:ext cx="8503920" cy="347472"/>
+          </a:xfrm>
+          <a:prstGeom prst="rect">
+            <a:avLst/>
+          </a:prstGeom>
+          <a:noFill/>
+        </p:spPr>
+        <p:txBody>
+          <a:bodyPr wrap="square">
+            <a:spAutoFit/>
+          </a:bodyPr>
+          <a:lstStyle/>
+          <a:p>
+            <a:pPr algn="l"/>
+            <a:r>
+              <a:rPr sz="1100" b="1" i="0">
+                <a:solidFill>
+                  <a:srgbClr val="C0392B"/>
+                </a:solidFill>
+                <a:latin typeface="Arial"/>
+              </a:rPr>
+              <a:t>▼  Risk: land regularization bills</a:t>
+            </a:r>
+          </a:p>
+        </p:txBody>
+      </p:sp>
+      <p:sp>
+        <p:nvSpPr>
+          <p:cNvPr id="12" name="TextBox 11"/>
+          <p:cNvSpPr txBox="1"/>
+          <p:nvPr/>
+        </p:nvSpPr>
+        <p:spPr>
+          <a:xfrm>
+            <a:off x="320040" y="3977639"/>
+            <a:ext cx="8503920" cy="685800"/>
+          </a:xfrm>
+          <a:prstGeom prst="rect">
+            <a:avLst/>
+          </a:prstGeom>
+          <a:noFill/>
+        </p:spPr>
+        <p:txBody>
+          <a:bodyPr wrap="square">
+            <a:spAutoFit/>
+          </a:bodyPr>
+          <a:lstStyle/>
+          <a:p>
+            <a:pPr algn="l"/>
+            <a:r>
+              <a:rPr sz="950" b="0" i="0">
+                <a:solidFill>
+                  <a:srgbClr val="555555"/>
+                </a:solidFill>
+                <a:latin typeface="Arial"/>
+              </a:rPr>
+              <a:t>Legislation that would amnesty illegal deforestation before 2008 risks creating incentives for new environmental crimes.</a:t>
+            </a:r>
+          </a:p>
+        </p:txBody>
+      </p:sp>
+    </p:spTree>
+  </p:cSld>
+  <p:clrMapOvr>
+    <a:masterClrMapping/>
+  </p:clrMapOvr>
+</p:sld>
+</file>
+
+<file path=ppt/slides/slide26.xml><?xml version="1.0" encoding="utf-8"?>
+<p:sld xmlns:a="http://schemas.openxmlformats.org/drawingml/2006/main" xmlns:p="http://schemas.openxmlformats.org/presentationml/2006/main" xmlns:r="http://schemas.openxmlformats.org/officeDocument/2006/relationships">
+  <p:cSld>
+    <p:spTree>
+      <p:nvGrpSpPr>
+        <p:cNvPr id="1" name=""/>
+        <p:cNvGrpSpPr/>
+        <p:nvPr/>
+      </p:nvGrpSpPr>
+      <p:grpSpPr/>
       <p:sp>
         <p:nvSpPr>
           <p:cNvPr id="2" name="Rectangle 1"/>
@@ -8864,7 +10556,7 @@
                 </a:solidFill>
                 <a:latin typeface="Arial"/>
               </a:rPr>
-              <a:t>POR BIOMA</a:t>
+              <a:t>AMAZÔNIA LEGAL</a:t>
             </a:r>
           </a:p>
         </p:txBody>
@@ -8942,7 +10634,7 @@
                 </a:solidFill>
                 <a:latin typeface="Arial"/>
               </a:rPr>
-              <a:t>O Cerrado perde tanto quanto a Amazônia — e recebe menos atenção.</a:t>
+              <a:t>Onde estão as 44.620 km² desmatadas em 2025?</a:t>
             </a:r>
           </a:p>
         </p:txBody>
@@ -8977,7 +10669,7 @@
                 </a:solidFill>
                 <a:latin typeface="Arial"/>
               </a:rPr>
-              <a:t>Desmatamento por bioma brasileiro (km²)  ·  2025</a:t>
+              <a:t>Polígonos de desmatamento na Amazônia Legal · 2015–2025 · cores por ano de detecção</a:t>
             </a:r>
           </a:p>
         </p:txBody>
@@ -8998,8 +10690,8 @@
         </p:blipFill>
         <p:spPr>
           <a:xfrm>
-            <a:off x="365760" y="1481328"/>
-            <a:ext cx="8412480" cy="3427465"/>
+            <a:off x="182880" y="1463040"/>
+            <a:ext cx="5486400" cy="4001669"/>
           </a:xfrm>
           <a:prstGeom prst="rect">
             <a:avLst/>
@@ -9008,7 +10700,262 @@
       </p:pic>
       <p:sp>
         <p:nvSpPr>
-          <p:cNvPr id="9" name="TextBox 8"/>
+          <p:cNvPr id="9" name="Rectangle 8"/>
+          <p:cNvSpPr/>
+          <p:nvPr/>
+        </p:nvSpPr>
+        <p:spPr>
+          <a:xfrm>
+            <a:off x="5852160" y="1481328"/>
+            <a:ext cx="3063240" cy="3383280"/>
+          </a:xfrm>
+          <a:prstGeom prst="rect">
+            <a:avLst/>
+          </a:prstGeom>
+          <a:solidFill>
+            <a:srgbClr val="F8F5F0"/>
+          </a:solidFill>
+          <a:ln w="6350">
+            <a:solidFill>
+              <a:srgbClr val="E0E0E0"/>
+            </a:solidFill>
+          </a:ln>
+        </p:spPr>
+        <p:style>
+          <a:lnRef idx="1">
+            <a:schemeClr val="accent1"/>
+          </a:lnRef>
+          <a:fillRef idx="3">
+            <a:schemeClr val="accent1"/>
+          </a:fillRef>
+          <a:effectRef idx="2">
+            <a:schemeClr val="accent1"/>
+          </a:effectRef>
+          <a:fontRef idx="minor">
+            <a:schemeClr val="lt1"/>
+          </a:fontRef>
+        </p:style>
+        <p:txBody>
+          <a:bodyPr rtlCol="0" anchor="ctr"/>
+          <a:lstStyle/>
+          <a:p>
+            <a:pPr algn="ctr"/>
+          </a:p>
+        </p:txBody>
+      </p:sp>
+      <p:sp>
+        <p:nvSpPr>
+          <p:cNvPr id="10" name="TextBox 9"/>
+          <p:cNvSpPr txBox="1"/>
+          <p:nvPr/>
+        </p:nvSpPr>
+        <p:spPr>
+          <a:xfrm>
+            <a:off x="6035040" y="1600200"/>
+            <a:ext cx="2743200" cy="502920"/>
+          </a:xfrm>
+          <a:prstGeom prst="rect">
+            <a:avLst/>
+          </a:prstGeom>
+          <a:noFill/>
+        </p:spPr>
+        <p:txBody>
+          <a:bodyPr wrap="square">
+            <a:spAutoFit/>
+          </a:bodyPr>
+          <a:lstStyle/>
+          <a:p>
+            <a:pPr algn="l"/>
+            <a:r>
+              <a:rPr sz="2200" b="1" i="0">
+                <a:solidFill>
+                  <a:srgbClr val="C0392B"/>
+                </a:solidFill>
+                <a:latin typeface="Arial"/>
+              </a:rPr>
+              <a:t>44.620 km²</a:t>
+            </a:r>
+          </a:p>
+        </p:txBody>
+      </p:sp>
+      <p:sp>
+        <p:nvSpPr>
+          <p:cNvPr id="11" name="TextBox 10"/>
+          <p:cNvSpPr txBox="1"/>
+          <p:nvPr/>
+        </p:nvSpPr>
+        <p:spPr>
+          <a:xfrm>
+            <a:off x="6035040" y="2075688"/>
+            <a:ext cx="2743200" cy="384048"/>
+          </a:xfrm>
+          <a:prstGeom prst="rect">
+            <a:avLst/>
+          </a:prstGeom>
+          <a:noFill/>
+        </p:spPr>
+        <p:txBody>
+          <a:bodyPr wrap="square">
+            <a:spAutoFit/>
+          </a:bodyPr>
+          <a:lstStyle/>
+          <a:p>
+            <a:pPr algn="l"/>
+            <a:r>
+              <a:rPr sz="900" b="0" i="0">
+                <a:solidFill>
+                  <a:srgbClr val="555555"/>
+                </a:solidFill>
+                <a:latin typeface="Arial"/>
+              </a:rPr>
+              <a:t>desmatados em 2025</a:t>
+            </a:r>
+          </a:p>
+        </p:txBody>
+      </p:sp>
+      <p:sp>
+        <p:nvSpPr>
+          <p:cNvPr id="12" name="TextBox 11"/>
+          <p:cNvSpPr txBox="1"/>
+          <p:nvPr/>
+        </p:nvSpPr>
+        <p:spPr>
+          <a:xfrm>
+            <a:off x="6035040" y="2651760"/>
+            <a:ext cx="2743200" cy="502920"/>
+          </a:xfrm>
+          <a:prstGeom prst="rect">
+            <a:avLst/>
+          </a:prstGeom>
+          <a:noFill/>
+        </p:spPr>
+        <p:txBody>
+          <a:bodyPr wrap="square">
+            <a:spAutoFit/>
+          </a:bodyPr>
+          <a:lstStyle/>
+          <a:p>
+            <a:pPr algn="l"/>
+            <a:r>
+              <a:rPr sz="2200" b="1" i="0">
+                <a:solidFill>
+                  <a:srgbClr val="1A5276"/>
+                </a:solidFill>
+                <a:latin typeface="Arial"/>
+              </a:rPr>
+              <a:t>−99%</a:t>
+            </a:r>
+          </a:p>
+        </p:txBody>
+      </p:sp>
+      <p:sp>
+        <p:nvSpPr>
+          <p:cNvPr id="13" name="TextBox 12"/>
+          <p:cNvSpPr txBox="1"/>
+          <p:nvPr/>
+        </p:nvSpPr>
+        <p:spPr>
+          <a:xfrm>
+            <a:off x="6035040" y="3127248"/>
+            <a:ext cx="2743200" cy="384048"/>
+          </a:xfrm>
+          <a:prstGeom prst="rect">
+            <a:avLst/>
+          </a:prstGeom>
+          <a:noFill/>
+        </p:spPr>
+        <p:txBody>
+          <a:bodyPr wrap="square">
+            <a:spAutoFit/>
+          </a:bodyPr>
+          <a:lstStyle/>
+          <a:p>
+            <a:pPr algn="l"/>
+            <a:r>
+              <a:rPr sz="900" b="0" i="0">
+                <a:solidFill>
+                  <a:srgbClr val="555555"/>
+                </a:solidFill>
+                <a:latin typeface="Arial"/>
+              </a:rPr>
+              <a:t>desde o pico de 2007</a:t>
+            </a:r>
+          </a:p>
+        </p:txBody>
+      </p:sp>
+      <p:sp>
+        <p:nvSpPr>
+          <p:cNvPr id="14" name="TextBox 13"/>
+          <p:cNvSpPr txBox="1"/>
+          <p:nvPr/>
+        </p:nvSpPr>
+        <p:spPr>
+          <a:xfrm>
+            <a:off x="6035040" y="3703320"/>
+            <a:ext cx="2743200" cy="502920"/>
+          </a:xfrm>
+          <a:prstGeom prst="rect">
+            <a:avLst/>
+          </a:prstGeom>
+          <a:noFill/>
+        </p:spPr>
+        <p:txBody>
+          <a:bodyPr wrap="square">
+            <a:spAutoFit/>
+          </a:bodyPr>
+          <a:lstStyle/>
+          <a:p>
+            <a:pPr algn="l"/>
+            <a:r>
+              <a:rPr sz="2200" b="1" i="0">
+                <a:solidFill>
+                  <a:srgbClr val="2E7D32"/>
+                </a:solidFill>
+                <a:latin typeface="Arial"/>
+              </a:rPr>
+              <a:t>4.000 km²</a:t>
+            </a:r>
+          </a:p>
+        </p:txBody>
+      </p:sp>
+      <p:sp>
+        <p:nvSpPr>
+          <p:cNvPr id="15" name="TextBox 14"/>
+          <p:cNvSpPr txBox="1"/>
+          <p:nvPr/>
+        </p:nvSpPr>
+        <p:spPr>
+          <a:xfrm>
+            <a:off x="6035040" y="4178808"/>
+            <a:ext cx="2743200" cy="384048"/>
+          </a:xfrm>
+          <a:prstGeom prst="rect">
+            <a:avLst/>
+          </a:prstGeom>
+          <a:noFill/>
+        </p:spPr>
+        <p:txBody>
+          <a:bodyPr wrap="square">
+            <a:spAutoFit/>
+          </a:bodyPr>
+          <a:lstStyle/>
+          <a:p>
+            <a:pPr algn="l"/>
+            <a:r>
+              <a:rPr sz="900" b="0" i="0">
+                <a:solidFill>
+                  <a:srgbClr val="555555"/>
+                </a:solidFill>
+                <a:latin typeface="Arial"/>
+              </a:rPr>
+              <a:t>meta para 2028</a:t>
+            </a:r>
+          </a:p>
+        </p:txBody>
+      </p:sp>
+      <p:sp>
+        <p:nvSpPr>
+          <p:cNvPr id="16" name="TextBox 15"/>
           <p:cNvSpPr txBox="1"/>
           <p:nvPr/>
         </p:nvSpPr>
@@ -9175,7 +11122,7 @@
                 </a:solidFill>
                 <a:latin typeface="Arial"/>
               </a:rPr>
-              <a:t>CERRADO EM FOCO</a:t>
+              <a:t>POR BIOMA</a:t>
             </a:r>
           </a:p>
         </p:txBody>
@@ -9253,303 +11200,73 @@
                 </a:solidFill>
                 <a:latin typeface="Arial"/>
               </a:rPr>
-              <a:t>O Cerrado é o bioma brasileiro mais ameaçado proporcionalmente.</a:t>
-            </a:r>
-          </a:p>
-        </p:txBody>
-      </p:sp>
-      <p:sp>
-        <p:nvSpPr>
-          <p:cNvPr id="7" name="Rectangle 6"/>
-          <p:cNvSpPr/>
-          <p:nvPr/>
-        </p:nvSpPr>
-        <p:spPr>
-          <a:xfrm>
-            <a:off x="365760" y="1353312"/>
-            <a:ext cx="3977639" cy="1783080"/>
-          </a:xfrm>
-          <a:prstGeom prst="rect">
-            <a:avLst/>
-          </a:prstGeom>
-          <a:solidFill>
-            <a:srgbClr val="FFF8E1"/>
-          </a:solidFill>
-          <a:ln w="6350">
-            <a:solidFill>
-              <a:srgbClr val="C0392B"/>
-            </a:solidFill>
-          </a:ln>
-        </p:spPr>
-        <p:style>
-          <a:lnRef idx="1">
-            <a:schemeClr val="accent1"/>
-          </a:lnRef>
-          <a:fillRef idx="3">
-            <a:schemeClr val="accent1"/>
-          </a:fillRef>
-          <a:effectRef idx="2">
-            <a:schemeClr val="accent1"/>
-          </a:effectRef>
-          <a:fontRef idx="minor">
-            <a:schemeClr val="lt1"/>
-          </a:fontRef>
-        </p:style>
-        <p:txBody>
-          <a:bodyPr rtlCol="0" anchor="ctr"/>
-          <a:lstStyle/>
-          <a:p>
-            <a:pPr algn="ctr"/>
-          </a:p>
-        </p:txBody>
-      </p:sp>
-      <p:sp>
-        <p:nvSpPr>
-          <p:cNvPr id="8" name="TextBox 7"/>
-          <p:cNvSpPr txBox="1"/>
-          <p:nvPr/>
-        </p:nvSpPr>
-        <p:spPr>
-          <a:xfrm>
-            <a:off x="594360" y="1444752"/>
-            <a:ext cx="3520440" cy="822960"/>
-          </a:xfrm>
-          <a:prstGeom prst="rect">
-            <a:avLst/>
-          </a:prstGeom>
-          <a:noFill/>
-        </p:spPr>
-        <p:txBody>
-          <a:bodyPr wrap="square">
-            <a:spAutoFit/>
-          </a:bodyPr>
-          <a:lstStyle/>
-          <a:p>
-            <a:pPr algn="l"/>
-            <a:r>
-              <a:rPr sz="3800" b="1" i="0">
-                <a:solidFill>
-                  <a:srgbClr val="C0392B"/>
-                </a:solidFill>
-                <a:latin typeface="Arial"/>
-              </a:rPr>
-              <a:t>36.176</a:t>
-            </a:r>
-          </a:p>
-        </p:txBody>
-      </p:sp>
+              <a:t>O Cerrado perde tanto quanto a Amazônia — e recebe menos atenção.</a:t>
+            </a:r>
+          </a:p>
+        </p:txBody>
+      </p:sp>
+      <p:sp>
+        <p:nvSpPr>
+          <p:cNvPr id="7" name="TextBox 6"/>
+          <p:cNvSpPr txBox="1"/>
+          <p:nvPr/>
+        </p:nvSpPr>
+        <p:spPr>
+          <a:xfrm>
+            <a:off x="320040" y="1234440"/>
+            <a:ext cx="8503920" cy="347472"/>
+          </a:xfrm>
+          <a:prstGeom prst="rect">
+            <a:avLst/>
+          </a:prstGeom>
+          <a:noFill/>
+        </p:spPr>
+        <p:txBody>
+          <a:bodyPr wrap="square">
+            <a:spAutoFit/>
+          </a:bodyPr>
+          <a:lstStyle/>
+          <a:p>
+            <a:pPr algn="l"/>
+            <a:r>
+              <a:rPr sz="850" b="0" i="0">
+                <a:solidFill>
+                  <a:srgbClr val="555555"/>
+                </a:solidFill>
+                <a:latin typeface="Arial"/>
+              </a:rPr>
+              <a:t>Desmatamento por bioma brasileiro (km²)  ·  2025</a:t>
+            </a:r>
+          </a:p>
+        </p:txBody>
+      </p:sp>
+      <p:pic>
+        <p:nvPicPr>
+          <p:cNvPr id="8" name="Picture 7" descr="image.png"/>
+          <p:cNvPicPr>
+            <a:picLocks noChangeAspect="1"/>
+          </p:cNvPicPr>
+          <p:nvPr/>
+        </p:nvPicPr>
+        <p:blipFill>
+          <a:blip r:embed="rId2"/>
+          <a:stretch>
+            <a:fillRect/>
+          </a:stretch>
+        </p:blipFill>
+        <p:spPr>
+          <a:xfrm>
+            <a:off x="365760" y="1481328"/>
+            <a:ext cx="8412480" cy="3427465"/>
+          </a:xfrm>
+          <a:prstGeom prst="rect">
+            <a:avLst/>
+          </a:prstGeom>
+        </p:spPr>
+      </p:pic>
       <p:sp>
         <p:nvSpPr>
           <p:cNvPr id="9" name="TextBox 8"/>
-          <p:cNvSpPr txBox="1"/>
-          <p:nvPr/>
-        </p:nvSpPr>
-        <p:spPr>
-          <a:xfrm>
-            <a:off x="594360" y="2176272"/>
-            <a:ext cx="3520440" cy="822960"/>
-          </a:xfrm>
-          <a:prstGeom prst="rect">
-            <a:avLst/>
-          </a:prstGeom>
-          <a:noFill/>
-        </p:spPr>
-        <p:txBody>
-          <a:bodyPr wrap="square">
-            <a:spAutoFit/>
-          </a:bodyPr>
-          <a:lstStyle/>
-          <a:p>
-            <a:pPr algn="l"/>
-            <a:r>
-              <a:rPr sz="950" b="0" i="0">
-                <a:solidFill>
-                  <a:srgbClr val="555555"/>
-                </a:solidFill>
-                <a:latin typeface="Arial"/>
-              </a:rPr>
-              <a:t>km² desmatados no Cerrado</a:t>
-            </a:r>
-          </a:p>
-          <a:p>
-            <a:pPr algn="l"/>
-            <a:r>
-              <a:rPr sz="950" b="0" i="0">
-                <a:solidFill>
-                  <a:srgbClr val="555555"/>
-                </a:solidFill>
-                <a:latin typeface="Arial"/>
-              </a:rPr>
-              <a:t>— quase o mesmo que a Amazônia</a:t>
-            </a:r>
-          </a:p>
-        </p:txBody>
-      </p:sp>
-      <p:sp>
-        <p:nvSpPr>
-          <p:cNvPr id="10" name="Rectangle 9"/>
-          <p:cNvSpPr/>
-          <p:nvPr/>
-        </p:nvSpPr>
-        <p:spPr>
-          <a:xfrm>
-            <a:off x="4709160" y="1353312"/>
-            <a:ext cx="3977639" cy="1783080"/>
-          </a:xfrm>
-          <a:prstGeom prst="rect">
-            <a:avLst/>
-          </a:prstGeom>
-          <a:solidFill>
-            <a:srgbClr val="FFF8E1"/>
-          </a:solidFill>
-          <a:ln w="6350">
-            <a:solidFill>
-              <a:srgbClr val="C0392B"/>
-            </a:solidFill>
-          </a:ln>
-        </p:spPr>
-        <p:style>
-          <a:lnRef idx="1">
-            <a:schemeClr val="accent1"/>
-          </a:lnRef>
-          <a:fillRef idx="3">
-            <a:schemeClr val="accent1"/>
-          </a:fillRef>
-          <a:effectRef idx="2">
-            <a:schemeClr val="accent1"/>
-          </a:effectRef>
-          <a:fontRef idx="minor">
-            <a:schemeClr val="lt1"/>
-          </a:fontRef>
-        </p:style>
-        <p:txBody>
-          <a:bodyPr rtlCol="0" anchor="ctr"/>
-          <a:lstStyle/>
-          <a:p>
-            <a:pPr algn="ctr"/>
-          </a:p>
-        </p:txBody>
-      </p:sp>
-      <p:sp>
-        <p:nvSpPr>
-          <p:cNvPr id="11" name="TextBox 10"/>
-          <p:cNvSpPr txBox="1"/>
-          <p:nvPr/>
-        </p:nvSpPr>
-        <p:spPr>
-          <a:xfrm>
-            <a:off x="4937760" y="1444752"/>
-            <a:ext cx="3520440" cy="822960"/>
-          </a:xfrm>
-          <a:prstGeom prst="rect">
-            <a:avLst/>
-          </a:prstGeom>
-          <a:noFill/>
-        </p:spPr>
-        <p:txBody>
-          <a:bodyPr wrap="square">
-            <a:spAutoFit/>
-          </a:bodyPr>
-          <a:lstStyle/>
-          <a:p>
-            <a:pPr algn="l"/>
-            <a:r>
-              <a:rPr sz="3800" b="1" i="0">
-                <a:solidFill>
-                  <a:srgbClr val="C0392B"/>
-                </a:solidFill>
-                <a:latin typeface="Arial"/>
-              </a:rPr>
-              <a:t>53%</a:t>
-            </a:r>
-          </a:p>
-        </p:txBody>
-      </p:sp>
-      <p:sp>
-        <p:nvSpPr>
-          <p:cNvPr id="12" name="TextBox 11"/>
-          <p:cNvSpPr txBox="1"/>
-          <p:nvPr/>
-        </p:nvSpPr>
-        <p:spPr>
-          <a:xfrm>
-            <a:off x="4937760" y="2176272"/>
-            <a:ext cx="3520440" cy="822960"/>
-          </a:xfrm>
-          <a:prstGeom prst="rect">
-            <a:avLst/>
-          </a:prstGeom>
-          <a:noFill/>
-        </p:spPr>
-        <p:txBody>
-          <a:bodyPr wrap="square">
-            <a:spAutoFit/>
-          </a:bodyPr>
-          <a:lstStyle/>
-          <a:p>
-            <a:pPr algn="l"/>
-            <a:r>
-              <a:rPr sz="950" b="0" i="0">
-                <a:solidFill>
-                  <a:srgbClr val="555555"/>
-                </a:solidFill>
-                <a:latin typeface="Arial"/>
-              </a:rPr>
-              <a:t>de cobertura original remanescente</a:t>
-            </a:r>
-          </a:p>
-          <a:p>
-            <a:pPr algn="l"/>
-            <a:r>
-              <a:rPr sz="950" b="0" i="0">
-                <a:solidFill>
-                  <a:srgbClr val="555555"/>
-                </a:solidFill>
-                <a:latin typeface="Arial"/>
-              </a:rPr>
-              <a:t>— Mata Atlântica já perdeu 87%</a:t>
-            </a:r>
-          </a:p>
-        </p:txBody>
-      </p:sp>
-      <p:sp>
-        <p:nvSpPr>
-          <p:cNvPr id="13" name="TextBox 12"/>
-          <p:cNvSpPr txBox="1"/>
-          <p:nvPr/>
-        </p:nvSpPr>
-        <p:spPr>
-          <a:xfrm>
-            <a:off x="320040" y="3246120"/>
-            <a:ext cx="8503920" cy="914400"/>
-          </a:xfrm>
-          <a:prstGeom prst="rect">
-            <a:avLst/>
-          </a:prstGeom>
-          <a:noFill/>
-        </p:spPr>
-        <p:txBody>
-          <a:bodyPr wrap="square">
-            <a:spAutoFit/>
-          </a:bodyPr>
-          <a:lstStyle/>
-          <a:p>
-            <a:pPr algn="l"/>
-            <a:r>
-              <a:rPr sz="950" b="0" i="0">
-                <a:solidFill>
-                  <a:srgbClr val="555555"/>
-                </a:solidFill>
-                <a:latin typeface="Arial"/>
-              </a:rPr>
-              <a:t>O Cerrado abriga 5% da biodiversidade mundial e regula o ciclo hídrico das principais bacias hidrográficas do Brasil. Recebe menos de 10% dos recursos do Fundo Amazônia.</a:t>
-            </a:r>
-          </a:p>
-        </p:txBody>
-      </p:sp>
-      <p:sp>
-        <p:nvSpPr>
-          <p:cNvPr id="14" name="TextBox 13"/>
           <p:cNvSpPr txBox="1"/>
           <p:nvPr/>
         </p:nvSpPr>
@@ -9577,7 +11294,7 @@
                 </a:solidFill>
                 <a:latin typeface="Arial"/>
               </a:rPr>
-              <a:t>Fonte: INPE/PRODES · Calculado a partir dos dados GeoParquet  ·  MapBiomas 2023</a:t>
+              <a:t>Fonte: INPE/PRODES · Calculado a partir dos dados GeoParquet</a:t>
             </a:r>
           </a:p>
         </p:txBody>
@@ -9716,7 +11433,7 @@
                 </a:solidFill>
                 <a:latin typeface="Arial"/>
               </a:rPr>
-              <a:t>COBERTURA FLORESTAL</a:t>
+              <a:t>CERRADO EM FOCO</a:t>
             </a:r>
           </a:p>
         </p:txBody>
@@ -9794,73 +11511,303 @@
                 </a:solidFill>
                 <a:latin typeface="Arial"/>
               </a:rPr>
-              <a:t>Mata Atlântica: 13% restam. Pantanal: 86%. Cerrado: 53%.</a:t>
-            </a:r>
-          </a:p>
-        </p:txBody>
-      </p:sp>
-      <p:sp>
-        <p:nvSpPr>
-          <p:cNvPr id="7" name="TextBox 6"/>
-          <p:cNvSpPr txBox="1"/>
-          <p:nvPr/>
-        </p:nvSpPr>
-        <p:spPr>
-          <a:xfrm>
-            <a:off x="320040" y="1234440"/>
-            <a:ext cx="8503920" cy="347472"/>
-          </a:xfrm>
-          <a:prstGeom prst="rect">
-            <a:avLst/>
-          </a:prstGeom>
-          <a:noFill/>
-        </p:spPr>
-        <p:txBody>
-          <a:bodyPr wrap="square">
-            <a:spAutoFit/>
-          </a:bodyPr>
-          <a:lstStyle/>
-          <a:p>
-            <a:pPr algn="l"/>
-            <a:r>
-              <a:rPr sz="850" b="0" i="0">
+              <a:t>O Cerrado é o bioma brasileiro mais ameaçado proporcionalmente.</a:t>
+            </a:r>
+          </a:p>
+        </p:txBody>
+      </p:sp>
+      <p:sp>
+        <p:nvSpPr>
+          <p:cNvPr id="7" name="Rectangle 6"/>
+          <p:cNvSpPr/>
+          <p:nvPr/>
+        </p:nvSpPr>
+        <p:spPr>
+          <a:xfrm>
+            <a:off x="365760" y="1353312"/>
+            <a:ext cx="3977639" cy="1783080"/>
+          </a:xfrm>
+          <a:prstGeom prst="rect">
+            <a:avLst/>
+          </a:prstGeom>
+          <a:solidFill>
+            <a:srgbClr val="FFF8E1"/>
+          </a:solidFill>
+          <a:ln w="6350">
+            <a:solidFill>
+              <a:srgbClr val="C0392B"/>
+            </a:solidFill>
+          </a:ln>
+        </p:spPr>
+        <p:style>
+          <a:lnRef idx="1">
+            <a:schemeClr val="accent1"/>
+          </a:lnRef>
+          <a:fillRef idx="3">
+            <a:schemeClr val="accent1"/>
+          </a:fillRef>
+          <a:effectRef idx="2">
+            <a:schemeClr val="accent1"/>
+          </a:effectRef>
+          <a:fontRef idx="minor">
+            <a:schemeClr val="lt1"/>
+          </a:fontRef>
+        </p:style>
+        <p:txBody>
+          <a:bodyPr rtlCol="0" anchor="ctr"/>
+          <a:lstStyle/>
+          <a:p>
+            <a:pPr algn="ctr"/>
+          </a:p>
+        </p:txBody>
+      </p:sp>
+      <p:sp>
+        <p:nvSpPr>
+          <p:cNvPr id="8" name="TextBox 7"/>
+          <p:cNvSpPr txBox="1"/>
+          <p:nvPr/>
+        </p:nvSpPr>
+        <p:spPr>
+          <a:xfrm>
+            <a:off x="594360" y="1444752"/>
+            <a:ext cx="3520440" cy="822960"/>
+          </a:xfrm>
+          <a:prstGeom prst="rect">
+            <a:avLst/>
+          </a:prstGeom>
+          <a:noFill/>
+        </p:spPr>
+        <p:txBody>
+          <a:bodyPr wrap="square">
+            <a:spAutoFit/>
+          </a:bodyPr>
+          <a:lstStyle/>
+          <a:p>
+            <a:pPr algn="l"/>
+            <a:r>
+              <a:rPr sz="3800" b="1" i="0">
+                <a:solidFill>
+                  <a:srgbClr val="C0392B"/>
+                </a:solidFill>
+                <a:latin typeface="Arial"/>
+              </a:rPr>
+              <a:t>57.882</a:t>
+            </a:r>
+          </a:p>
+        </p:txBody>
+      </p:sp>
+      <p:sp>
+        <p:nvSpPr>
+          <p:cNvPr id="9" name="TextBox 8"/>
+          <p:cNvSpPr txBox="1"/>
+          <p:nvPr/>
+        </p:nvSpPr>
+        <p:spPr>
+          <a:xfrm>
+            <a:off x="594360" y="2176272"/>
+            <a:ext cx="3520440" cy="822960"/>
+          </a:xfrm>
+          <a:prstGeom prst="rect">
+            <a:avLst/>
+          </a:prstGeom>
+          <a:noFill/>
+        </p:spPr>
+        <p:txBody>
+          <a:bodyPr wrap="square">
+            <a:spAutoFit/>
+          </a:bodyPr>
+          <a:lstStyle/>
+          <a:p>
+            <a:pPr algn="l"/>
+            <a:r>
+              <a:rPr sz="950" b="0" i="0">
                 <a:solidFill>
                   <a:srgbClr val="555555"/>
                 </a:solidFill>
                 <a:latin typeface="Arial"/>
               </a:rPr>
-              <a:t>Vegetação nativa remanescente por bioma (% da área original)  ·  MapBiomas 2023</a:t>
-            </a:r>
-          </a:p>
-        </p:txBody>
-      </p:sp>
-      <p:pic>
-        <p:nvPicPr>
-          <p:cNvPr id="8" name="Picture 7" descr="image.png"/>
-          <p:cNvPicPr>
-            <a:picLocks noChangeAspect="1"/>
-          </p:cNvPicPr>
-          <p:nvPr/>
-        </p:nvPicPr>
-        <p:blipFill>
-          <a:blip r:embed="rId2"/>
-          <a:stretch>
-            <a:fillRect/>
-          </a:stretch>
-        </p:blipFill>
-        <p:spPr>
-          <a:xfrm>
-            <a:off x="365760" y="1481328"/>
-            <a:ext cx="8412480" cy="3427465"/>
-          </a:xfrm>
-          <a:prstGeom prst="rect">
-            <a:avLst/>
-          </a:prstGeom>
-        </p:spPr>
-      </p:pic>
-      <p:sp>
-        <p:nvSpPr>
-          <p:cNvPr id="9" name="TextBox 8"/>
+              <a:t>km² desmatados no Cerrado</a:t>
+            </a:r>
+          </a:p>
+          <a:p>
+            <a:pPr algn="l"/>
+            <a:r>
+              <a:rPr sz="950" b="0" i="0">
+                <a:solidFill>
+                  <a:srgbClr val="555555"/>
+                </a:solidFill>
+                <a:latin typeface="Arial"/>
+              </a:rPr>
+              <a:t>— quase o mesmo que a Amazônia</a:t>
+            </a:r>
+          </a:p>
+        </p:txBody>
+      </p:sp>
+      <p:sp>
+        <p:nvSpPr>
+          <p:cNvPr id="10" name="Rectangle 9"/>
+          <p:cNvSpPr/>
+          <p:nvPr/>
+        </p:nvSpPr>
+        <p:spPr>
+          <a:xfrm>
+            <a:off x="4709160" y="1353312"/>
+            <a:ext cx="3977639" cy="1783080"/>
+          </a:xfrm>
+          <a:prstGeom prst="rect">
+            <a:avLst/>
+          </a:prstGeom>
+          <a:solidFill>
+            <a:srgbClr val="FFF8E1"/>
+          </a:solidFill>
+          <a:ln w="6350">
+            <a:solidFill>
+              <a:srgbClr val="C0392B"/>
+            </a:solidFill>
+          </a:ln>
+        </p:spPr>
+        <p:style>
+          <a:lnRef idx="1">
+            <a:schemeClr val="accent1"/>
+          </a:lnRef>
+          <a:fillRef idx="3">
+            <a:schemeClr val="accent1"/>
+          </a:fillRef>
+          <a:effectRef idx="2">
+            <a:schemeClr val="accent1"/>
+          </a:effectRef>
+          <a:fontRef idx="minor">
+            <a:schemeClr val="lt1"/>
+          </a:fontRef>
+        </p:style>
+        <p:txBody>
+          <a:bodyPr rtlCol="0" anchor="ctr"/>
+          <a:lstStyle/>
+          <a:p>
+            <a:pPr algn="ctr"/>
+          </a:p>
+        </p:txBody>
+      </p:sp>
+      <p:sp>
+        <p:nvSpPr>
+          <p:cNvPr id="11" name="TextBox 10"/>
+          <p:cNvSpPr txBox="1"/>
+          <p:nvPr/>
+        </p:nvSpPr>
+        <p:spPr>
+          <a:xfrm>
+            <a:off x="4937760" y="1444752"/>
+            <a:ext cx="3520440" cy="822960"/>
+          </a:xfrm>
+          <a:prstGeom prst="rect">
+            <a:avLst/>
+          </a:prstGeom>
+          <a:noFill/>
+        </p:spPr>
+        <p:txBody>
+          <a:bodyPr wrap="square">
+            <a:spAutoFit/>
+          </a:bodyPr>
+          <a:lstStyle/>
+          <a:p>
+            <a:pPr algn="l"/>
+            <a:r>
+              <a:rPr sz="3800" b="1" i="0">
+                <a:solidFill>
+                  <a:srgbClr val="C0392B"/>
+                </a:solidFill>
+                <a:latin typeface="Arial"/>
+              </a:rPr>
+              <a:t>53%</a:t>
+            </a:r>
+          </a:p>
+        </p:txBody>
+      </p:sp>
+      <p:sp>
+        <p:nvSpPr>
+          <p:cNvPr id="12" name="TextBox 11"/>
+          <p:cNvSpPr txBox="1"/>
+          <p:nvPr/>
+        </p:nvSpPr>
+        <p:spPr>
+          <a:xfrm>
+            <a:off x="4937760" y="2176272"/>
+            <a:ext cx="3520440" cy="822960"/>
+          </a:xfrm>
+          <a:prstGeom prst="rect">
+            <a:avLst/>
+          </a:prstGeom>
+          <a:noFill/>
+        </p:spPr>
+        <p:txBody>
+          <a:bodyPr wrap="square">
+            <a:spAutoFit/>
+          </a:bodyPr>
+          <a:lstStyle/>
+          <a:p>
+            <a:pPr algn="l"/>
+            <a:r>
+              <a:rPr sz="950" b="0" i="0">
+                <a:solidFill>
+                  <a:srgbClr val="555555"/>
+                </a:solidFill>
+                <a:latin typeface="Arial"/>
+              </a:rPr>
+              <a:t>de cobertura original remanescente</a:t>
+            </a:r>
+          </a:p>
+          <a:p>
+            <a:pPr algn="l"/>
+            <a:r>
+              <a:rPr sz="950" b="0" i="0">
+                <a:solidFill>
+                  <a:srgbClr val="555555"/>
+                </a:solidFill>
+                <a:latin typeface="Arial"/>
+              </a:rPr>
+              <a:t>— Mata Atlântica já perdeu 87%</a:t>
+            </a:r>
+          </a:p>
+        </p:txBody>
+      </p:sp>
+      <p:sp>
+        <p:nvSpPr>
+          <p:cNvPr id="13" name="TextBox 12"/>
+          <p:cNvSpPr txBox="1"/>
+          <p:nvPr/>
+        </p:nvSpPr>
+        <p:spPr>
+          <a:xfrm>
+            <a:off x="320040" y="3246120"/>
+            <a:ext cx="8503920" cy="914400"/>
+          </a:xfrm>
+          <a:prstGeom prst="rect">
+            <a:avLst/>
+          </a:prstGeom>
+          <a:noFill/>
+        </p:spPr>
+        <p:txBody>
+          <a:bodyPr wrap="square">
+            <a:spAutoFit/>
+          </a:bodyPr>
+          <a:lstStyle/>
+          <a:p>
+            <a:pPr algn="l"/>
+            <a:r>
+              <a:rPr sz="950" b="0" i="0">
+                <a:solidFill>
+                  <a:srgbClr val="555555"/>
+                </a:solidFill>
+                <a:latin typeface="Arial"/>
+              </a:rPr>
+              <a:t>O Cerrado abriga 5% da biodiversidade mundial e regula o ciclo hídrico das principais bacias hidrográficas do Brasil. Recebe menos de 10% dos recursos do Fundo Amazônia.</a:t>
+            </a:r>
+          </a:p>
+        </p:txBody>
+      </p:sp>
+      <p:sp>
+        <p:nvSpPr>
+          <p:cNvPr id="14" name="TextBox 13"/>
           <p:cNvSpPr txBox="1"/>
           <p:nvPr/>
         </p:nvSpPr>
@@ -9888,7 +11835,7 @@
                 </a:solidFill>
                 <a:latin typeface="Arial"/>
               </a:rPr>
-              <a:t>Fonte: MapBiomas 2023 · Mapeamento Anual da Cobertura e Uso da Terra</a:t>
+              <a:t>Fonte: INPE/PRODES · Calculado a partir dos dados GeoParquet  ·  MapBiomas 2023</a:t>
             </a:r>
           </a:p>
         </p:txBody>
@@ -9911,299 +11858,6 @@
         <p:nvPr/>
       </p:nvGrpSpPr>
       <p:grpSpPr/>
-      <p:sp>
-        <p:nvSpPr>
-          <p:cNvPr id="2" name="Rectangle 1"/>
-          <p:cNvSpPr/>
-          <p:nvPr/>
-        </p:nvSpPr>
-        <p:spPr>
-          <a:xfrm>
-            <a:off x="0" y="0"/>
-            <a:ext cx="9144000" cy="50292"/>
-          </a:xfrm>
-          <a:prstGeom prst="rect">
-            <a:avLst/>
-          </a:prstGeom>
-          <a:solidFill>
-            <a:srgbClr val="1B5E20"/>
-          </a:solidFill>
-          <a:ln>
-            <a:noFill/>
-          </a:ln>
-        </p:spPr>
-        <p:style>
-          <a:lnRef idx="1">
-            <a:schemeClr val="accent1"/>
-          </a:lnRef>
-          <a:fillRef idx="3">
-            <a:schemeClr val="accent1"/>
-          </a:fillRef>
-          <a:effectRef idx="2">
-            <a:schemeClr val="accent1"/>
-          </a:effectRef>
-          <a:fontRef idx="minor">
-            <a:schemeClr val="lt1"/>
-          </a:fontRef>
-        </p:style>
-        <p:txBody>
-          <a:bodyPr rtlCol="0" anchor="ctr"/>
-          <a:lstStyle/>
-          <a:p>
-            <a:pPr algn="ctr"/>
-          </a:p>
-        </p:txBody>
-      </p:sp>
-      <p:sp>
-        <p:nvSpPr>
-          <p:cNvPr id="3" name="Rectangle 2"/>
-          <p:cNvSpPr/>
-          <p:nvPr/>
-        </p:nvSpPr>
-        <p:spPr>
-          <a:xfrm>
-            <a:off x="0" y="5093208"/>
-            <a:ext cx="9144000" cy="50292"/>
-          </a:xfrm>
-          <a:prstGeom prst="rect">
-            <a:avLst/>
-          </a:prstGeom>
-          <a:solidFill>
-            <a:srgbClr val="1B5E20"/>
-          </a:solidFill>
-          <a:ln>
-            <a:noFill/>
-          </a:ln>
-        </p:spPr>
-        <p:style>
-          <a:lnRef idx="1">
-            <a:schemeClr val="accent1"/>
-          </a:lnRef>
-          <a:fillRef idx="3">
-            <a:schemeClr val="accent1"/>
-          </a:fillRef>
-          <a:effectRef idx="2">
-            <a:schemeClr val="accent1"/>
-          </a:effectRef>
-          <a:fontRef idx="minor">
-            <a:schemeClr val="lt1"/>
-          </a:fontRef>
-        </p:style>
-        <p:txBody>
-          <a:bodyPr rtlCol="0" anchor="ctr"/>
-          <a:lstStyle/>
-          <a:p>
-            <a:pPr algn="ctr"/>
-          </a:p>
-        </p:txBody>
-      </p:sp>
-      <p:sp>
-        <p:nvSpPr>
-          <p:cNvPr id="4" name="TextBox 3"/>
-          <p:cNvSpPr txBox="1"/>
-          <p:nvPr/>
-        </p:nvSpPr>
-        <p:spPr>
-          <a:xfrm>
-            <a:off x="320040" y="164592"/>
-            <a:ext cx="8503920" cy="256032"/>
-          </a:xfrm>
-          <a:prstGeom prst="rect">
-            <a:avLst/>
-          </a:prstGeom>
-          <a:noFill/>
-        </p:spPr>
-        <p:txBody>
-          <a:bodyPr wrap="square">
-            <a:spAutoFit/>
-          </a:bodyPr>
-          <a:lstStyle/>
-          <a:p>
-            <a:pPr algn="l"/>
-            <a:r>
-              <a:rPr sz="700" b="1" i="0">
-                <a:solidFill>
-                  <a:srgbClr val="1B5E20"/>
-                </a:solidFill>
-                <a:latin typeface="Arial"/>
-              </a:rPr>
-              <a:t>META 2028</a:t>
-            </a:r>
-          </a:p>
-        </p:txBody>
-      </p:sp>
-      <p:sp>
-        <p:nvSpPr>
-          <p:cNvPr id="5" name="Rectangle 4"/>
-          <p:cNvSpPr/>
-          <p:nvPr/>
-        </p:nvSpPr>
-        <p:spPr>
-          <a:xfrm>
-            <a:off x="320040" y="429768"/>
-            <a:ext cx="8503920" cy="4572"/>
-          </a:xfrm>
-          <a:prstGeom prst="rect">
-            <a:avLst/>
-          </a:prstGeom>
-          <a:solidFill>
-            <a:srgbClr val="E8E8E8"/>
-          </a:solidFill>
-          <a:ln>
-            <a:noFill/>
-          </a:ln>
-        </p:spPr>
-        <p:style>
-          <a:lnRef idx="1">
-            <a:schemeClr val="accent1"/>
-          </a:lnRef>
-          <a:fillRef idx="3">
-            <a:schemeClr val="accent1"/>
-          </a:fillRef>
-          <a:effectRef idx="2">
-            <a:schemeClr val="accent1"/>
-          </a:effectRef>
-          <a:fontRef idx="minor">
-            <a:schemeClr val="lt1"/>
-          </a:fontRef>
-        </p:style>
-        <p:txBody>
-          <a:bodyPr rtlCol="0" anchor="ctr"/>
-          <a:lstStyle/>
-          <a:p>
-            <a:pPr algn="ctr"/>
-          </a:p>
-        </p:txBody>
-      </p:sp>
-      <p:sp>
-        <p:nvSpPr>
-          <p:cNvPr id="6" name="TextBox 5"/>
-          <p:cNvSpPr txBox="1"/>
-          <p:nvPr/>
-        </p:nvSpPr>
-        <p:spPr>
-          <a:xfrm>
-            <a:off x="320040" y="475488"/>
-            <a:ext cx="8503920" cy="777240"/>
-          </a:xfrm>
-          <a:prstGeom prst="rect">
-            <a:avLst/>
-          </a:prstGeom>
-          <a:noFill/>
-        </p:spPr>
-        <p:txBody>
-          <a:bodyPr wrap="square">
-            <a:spAutoFit/>
-          </a:bodyPr>
-          <a:lstStyle/>
-          <a:p>
-            <a:pPr algn="l"/>
-            <a:r>
-              <a:rPr sz="1350" b="1" i="0">
-                <a:solidFill>
-                  <a:srgbClr val="111111"/>
-                </a:solidFill>
-                <a:latin typeface="Arial"/>
-              </a:rPr>
-              <a:t>A meta de 4000 km² para 2028 exige reduzir mais 91%.</a:t>
-            </a:r>
-          </a:p>
-        </p:txBody>
-      </p:sp>
-      <p:sp>
-        <p:nvSpPr>
-          <p:cNvPr id="7" name="TextBox 6"/>
-          <p:cNvSpPr txBox="1"/>
-          <p:nvPr/>
-        </p:nvSpPr>
-        <p:spPr>
-          <a:xfrm>
-            <a:off x="320040" y="1234440"/>
-            <a:ext cx="8503920" cy="347472"/>
-          </a:xfrm>
-          <a:prstGeom prst="rect">
-            <a:avLst/>
-          </a:prstGeom>
-          <a:noFill/>
-        </p:spPr>
-        <p:txBody>
-          <a:bodyPr wrap="square">
-            <a:spAutoFit/>
-          </a:bodyPr>
-          <a:lstStyle/>
-          <a:p>
-            <a:pPr algn="l"/>
-            <a:r>
-              <a:rPr sz="850" b="0" i="0">
-                <a:solidFill>
-                  <a:srgbClr val="555555"/>
-                </a:solidFill>
-                <a:latin typeface="Arial"/>
-              </a:rPr>
-              <a:t>Trajetória observada e meta de redução (km²)  ·  2000–2028</a:t>
-            </a:r>
-          </a:p>
-        </p:txBody>
-      </p:sp>
-      <p:pic>
-        <p:nvPicPr>
-          <p:cNvPr id="8" name="Picture 7" descr="image.png"/>
-          <p:cNvPicPr>
-            <a:picLocks noChangeAspect="1"/>
-          </p:cNvPicPr>
-          <p:nvPr/>
-        </p:nvPicPr>
-        <p:blipFill>
-          <a:blip r:embed="rId2"/>
-          <a:stretch>
-            <a:fillRect/>
-          </a:stretch>
-        </p:blipFill>
-        <p:spPr>
-          <a:xfrm>
-            <a:off x="182880" y="1481328"/>
-            <a:ext cx="8778240" cy="3865529"/>
-          </a:xfrm>
-          <a:prstGeom prst="rect">
-            <a:avLst/>
-          </a:prstGeom>
-        </p:spPr>
-      </p:pic>
-      <p:sp>
-        <p:nvSpPr>
-          <p:cNvPr id="9" name="TextBox 8"/>
-          <p:cNvSpPr txBox="1"/>
-          <p:nvPr/>
-        </p:nvSpPr>
-        <p:spPr>
-          <a:xfrm>
-            <a:off x="320040" y="4864608"/>
-            <a:ext cx="8503920" cy="256032"/>
-          </a:xfrm>
-          <a:prstGeom prst="rect">
-            <a:avLst/>
-          </a:prstGeom>
-          <a:noFill/>
-        </p:spPr>
-        <p:txBody>
-          <a:bodyPr wrap="square">
-            <a:spAutoFit/>
-          </a:bodyPr>
-          <a:lstStyle/>
-          <a:p>
-            <a:pPr algn="l"/>
-            <a:r>
-              <a:rPr sz="650" b="0" i="0">
-                <a:solidFill>
-                  <a:srgbClr val="999999"/>
-                </a:solidFill>
-                <a:latin typeface="Arial"/>
-              </a:rPr>
-              <a:t>Fonte: INPE/PRODES · Calculado a partir dos dados GeoParquet</a:t>
-            </a:r>
-          </a:p>
-        </p:txBody>
-      </p:sp>
     </p:spTree>
   </p:cSld>
   <p:clrMapOvr>
@@ -10222,334 +11876,6 @@
         <p:nvPr/>
       </p:nvGrpSpPr>
       <p:grpSpPr/>
-      <p:sp>
-        <p:nvSpPr>
-          <p:cNvPr id="2" name="Rectangle 1"/>
-          <p:cNvSpPr/>
-          <p:nvPr/>
-        </p:nvSpPr>
-        <p:spPr>
-          <a:xfrm>
-            <a:off x="0" y="0"/>
-            <a:ext cx="9144000" cy="50292"/>
-          </a:xfrm>
-          <a:prstGeom prst="rect">
-            <a:avLst/>
-          </a:prstGeom>
-          <a:solidFill>
-            <a:srgbClr val="1B5E20"/>
-          </a:solidFill>
-          <a:ln>
-            <a:noFill/>
-          </a:ln>
-        </p:spPr>
-        <p:style>
-          <a:lnRef idx="1">
-            <a:schemeClr val="accent1"/>
-          </a:lnRef>
-          <a:fillRef idx="3">
-            <a:schemeClr val="accent1"/>
-          </a:fillRef>
-          <a:effectRef idx="2">
-            <a:schemeClr val="accent1"/>
-          </a:effectRef>
-          <a:fontRef idx="minor">
-            <a:schemeClr val="lt1"/>
-          </a:fontRef>
-        </p:style>
-        <p:txBody>
-          <a:bodyPr rtlCol="0" anchor="ctr"/>
-          <a:lstStyle/>
-          <a:p>
-            <a:pPr algn="ctr"/>
-          </a:p>
-        </p:txBody>
-      </p:sp>
-      <p:sp>
-        <p:nvSpPr>
-          <p:cNvPr id="3" name="Rectangle 2"/>
-          <p:cNvSpPr/>
-          <p:nvPr/>
-        </p:nvSpPr>
-        <p:spPr>
-          <a:xfrm>
-            <a:off x="0" y="5093208"/>
-            <a:ext cx="9144000" cy="50292"/>
-          </a:xfrm>
-          <a:prstGeom prst="rect">
-            <a:avLst/>
-          </a:prstGeom>
-          <a:solidFill>
-            <a:srgbClr val="1B5E20"/>
-          </a:solidFill>
-          <a:ln>
-            <a:noFill/>
-          </a:ln>
-        </p:spPr>
-        <p:style>
-          <a:lnRef idx="1">
-            <a:schemeClr val="accent1"/>
-          </a:lnRef>
-          <a:fillRef idx="3">
-            <a:schemeClr val="accent1"/>
-          </a:fillRef>
-          <a:effectRef idx="2">
-            <a:schemeClr val="accent1"/>
-          </a:effectRef>
-          <a:fontRef idx="minor">
-            <a:schemeClr val="lt1"/>
-          </a:fontRef>
-        </p:style>
-        <p:txBody>
-          <a:bodyPr rtlCol="0" anchor="ctr"/>
-          <a:lstStyle/>
-          <a:p>
-            <a:pPr algn="ctr"/>
-          </a:p>
-        </p:txBody>
-      </p:sp>
-      <p:sp>
-        <p:nvSpPr>
-          <p:cNvPr id="4" name="TextBox 3"/>
-          <p:cNvSpPr txBox="1"/>
-          <p:nvPr/>
-        </p:nvSpPr>
-        <p:spPr>
-          <a:xfrm>
-            <a:off x="320040" y="164592"/>
-            <a:ext cx="8503920" cy="256032"/>
-          </a:xfrm>
-          <a:prstGeom prst="rect">
-            <a:avLst/>
-          </a:prstGeom>
-          <a:noFill/>
-        </p:spPr>
-        <p:txBody>
-          <a:bodyPr wrap="square">
-            <a:spAutoFit/>
-          </a:bodyPr>
-          <a:lstStyle/>
-          <a:p>
-            <a:pPr algn="l"/>
-            <a:r>
-              <a:rPr sz="700" b="1" i="0">
-                <a:solidFill>
-                  <a:srgbClr val="1B5E20"/>
-                </a:solidFill>
-                <a:latin typeface="Arial"/>
-              </a:rPr>
-              <a:t>CONTEXTO GLOBAL</a:t>
-            </a:r>
-          </a:p>
-        </p:txBody>
-      </p:sp>
-      <p:sp>
-        <p:nvSpPr>
-          <p:cNvPr id="5" name="Rectangle 4"/>
-          <p:cNvSpPr/>
-          <p:nvPr/>
-        </p:nvSpPr>
-        <p:spPr>
-          <a:xfrm>
-            <a:off x="320040" y="429768"/>
-            <a:ext cx="8503920" cy="4572"/>
-          </a:xfrm>
-          <a:prstGeom prst="rect">
-            <a:avLst/>
-          </a:prstGeom>
-          <a:solidFill>
-            <a:srgbClr val="E8E8E8"/>
-          </a:solidFill>
-          <a:ln>
-            <a:noFill/>
-          </a:ln>
-        </p:spPr>
-        <p:style>
-          <a:lnRef idx="1">
-            <a:schemeClr val="accent1"/>
-          </a:lnRef>
-          <a:fillRef idx="3">
-            <a:schemeClr val="accent1"/>
-          </a:fillRef>
-          <a:effectRef idx="2">
-            <a:schemeClr val="accent1"/>
-          </a:effectRef>
-          <a:fontRef idx="minor">
-            <a:schemeClr val="lt1"/>
-          </a:fontRef>
-        </p:style>
-        <p:txBody>
-          <a:bodyPr rtlCol="0" anchor="ctr"/>
-          <a:lstStyle/>
-          <a:p>
-            <a:pPr algn="ctr"/>
-          </a:p>
-        </p:txBody>
-      </p:sp>
-      <p:sp>
-        <p:nvSpPr>
-          <p:cNvPr id="6" name="TextBox 5"/>
-          <p:cNvSpPr txBox="1"/>
-          <p:nvPr/>
-        </p:nvSpPr>
-        <p:spPr>
-          <a:xfrm>
-            <a:off x="320040" y="475488"/>
-            <a:ext cx="8503920" cy="777240"/>
-          </a:xfrm>
-          <a:prstGeom prst="rect">
-            <a:avLst/>
-          </a:prstGeom>
-          <a:noFill/>
-        </p:spPr>
-        <p:txBody>
-          <a:bodyPr wrap="square">
-            <a:spAutoFit/>
-          </a:bodyPr>
-          <a:lstStyle/>
-          <a:p>
-            <a:pPr algn="l"/>
-            <a:r>
-              <a:rPr sz="1350" b="1" i="0">
-                <a:solidFill>
-                  <a:srgbClr val="111111"/>
-                </a:solidFill>
-                <a:latin typeface="Arial"/>
-              </a:rPr>
-              <a:t>Brasil lidera a queda — mas ainda é o maior desmatador tropical.</a:t>
-            </a:r>
-          </a:p>
-        </p:txBody>
-      </p:sp>
-      <p:sp>
-        <p:nvSpPr>
-          <p:cNvPr id="7" name="TextBox 6"/>
-          <p:cNvSpPr txBox="1"/>
-          <p:nvPr/>
-        </p:nvSpPr>
-        <p:spPr>
-          <a:xfrm>
-            <a:off x="320040" y="1234440"/>
-            <a:ext cx="8503920" cy="347472"/>
-          </a:xfrm>
-          <a:prstGeom prst="rect">
-            <a:avLst/>
-          </a:prstGeom>
-          <a:noFill/>
-        </p:spPr>
-        <p:txBody>
-          <a:bodyPr wrap="square">
-            <a:spAutoFit/>
-          </a:bodyPr>
-          <a:lstStyle/>
-          <a:p>
-            <a:pPr algn="l"/>
-            <a:r>
-              <a:rPr sz="850" b="0" i="0">
-                <a:solidFill>
-                  <a:srgbClr val="555555"/>
-                </a:solidFill>
-                <a:latin typeface="Arial"/>
-              </a:rPr>
-              <a:t>Perda de floresta tropical por país (km²)  ·  2023  ·  Fonte: GFW / FAO</a:t>
-            </a:r>
-          </a:p>
-        </p:txBody>
-      </p:sp>
-      <p:pic>
-        <p:nvPicPr>
-          <p:cNvPr id="8" name="Picture 7" descr="image.png"/>
-          <p:cNvPicPr>
-            <a:picLocks noChangeAspect="1"/>
-          </p:cNvPicPr>
-          <p:nvPr/>
-        </p:nvPicPr>
-        <p:blipFill>
-          <a:blip r:embed="rId2"/>
-          <a:stretch>
-            <a:fillRect/>
-          </a:stretch>
-        </p:blipFill>
-        <p:spPr>
-          <a:xfrm>
-            <a:off x="365760" y="1481328"/>
-            <a:ext cx="8412480" cy="3143453"/>
-          </a:xfrm>
-          <a:prstGeom prst="rect">
-            <a:avLst/>
-          </a:prstGeom>
-        </p:spPr>
-      </p:pic>
-      <p:sp>
-        <p:nvSpPr>
-          <p:cNvPr id="9" name="TextBox 8"/>
-          <p:cNvSpPr txBox="1"/>
-          <p:nvPr/>
-        </p:nvSpPr>
-        <p:spPr>
-          <a:xfrm>
-            <a:off x="320040" y="4434840"/>
-            <a:ext cx="8503920" cy="320040"/>
-          </a:xfrm>
-          <a:prstGeom prst="rect">
-            <a:avLst/>
-          </a:prstGeom>
-          <a:noFill/>
-        </p:spPr>
-        <p:txBody>
-          <a:bodyPr wrap="square">
-            <a:spAutoFit/>
-          </a:bodyPr>
-          <a:lstStyle/>
-          <a:p>
-            <a:pPr algn="l"/>
-            <a:r>
-              <a:rPr sz="650" b="0" i="1">
-                <a:solidFill>
-                  <a:srgbClr val="999999"/>
-                </a:solidFill>
-                <a:latin typeface="Arial"/>
-              </a:rPr>
-              <a:t>* GFW mede perda de cobertura arbórea; PRODES mede desmatamento. Metodologias distintas.</a:t>
-            </a:r>
-          </a:p>
-        </p:txBody>
-      </p:sp>
-      <p:sp>
-        <p:nvSpPr>
-          <p:cNvPr id="10" name="TextBox 9"/>
-          <p:cNvSpPr txBox="1"/>
-          <p:nvPr/>
-        </p:nvSpPr>
-        <p:spPr>
-          <a:xfrm>
-            <a:off x="320040" y="4864608"/>
-            <a:ext cx="8503920" cy="256032"/>
-          </a:xfrm>
-          <a:prstGeom prst="rect">
-            <a:avLst/>
-          </a:prstGeom>
-          <a:noFill/>
-        </p:spPr>
-        <p:txBody>
-          <a:bodyPr wrap="square">
-            <a:spAutoFit/>
-          </a:bodyPr>
-          <a:lstStyle/>
-          <a:p>
-            <a:pPr algn="l"/>
-            <a:r>
-              <a:rPr sz="650" b="0" i="0">
-                <a:solidFill>
-                  <a:srgbClr val="999999"/>
-                </a:solidFill>
-                <a:latin typeface="Arial"/>
-              </a:rPr>
-              <a:t>Fonte: Global Forest Watch / FAO 2023 · Dados aproximados — metodologias distintas</a:t>
-            </a:r>
-          </a:p>
-        </p:txBody>
-      </p:sp>
     </p:spTree>
   </p:cSld>
   <p:clrMapOvr>
@@ -10684,7 +12010,7 @@
                 </a:solidFill>
                 <a:latin typeface="Arial"/>
               </a:rPr>
-              <a:t>CAUSAS &amp; RISCOS</a:t>
+              <a:t>COBERTURA FLORESTAL</a:t>
             </a:r>
           </a:p>
         </p:txBody>
@@ -10762,7 +12088,7 @@
                 </a:solidFill>
                 <a:latin typeface="Arial"/>
               </a:rPr>
-              <a:t>O que explica a queda — e o que pode revertê-la.</a:t>
+              <a:t>Mata Atlântica: 13% restam. Pantanal: 86%. Cerrado: 53%.</a:t>
             </a:r>
           </a:p>
         </p:txBody>
@@ -10775,7 +12101,7 @@
         </p:nvSpPr>
         <p:spPr>
           <a:xfrm>
-            <a:off x="320040" y="1353312"/>
+            <a:off x="320040" y="1234440"/>
             <a:ext cx="8503920" cy="347472"/>
           </a:xfrm>
           <a:prstGeom prst="rect">
@@ -10791,52 +12117,41 @@
           <a:p>
             <a:pPr algn="l"/>
             <a:r>
-              <a:rPr sz="1100" b="1" i="0">
-                <a:solidFill>
-                  <a:srgbClr val="2E7D32"/>
-                </a:solidFill>
-                <a:latin typeface="Arial"/>
-              </a:rPr>
-              <a:t>▲  Fiscalização reforçada</a:t>
-            </a:r>
-          </a:p>
-        </p:txBody>
-      </p:sp>
-      <p:sp>
-        <p:nvSpPr>
-          <p:cNvPr id="8" name="TextBox 7"/>
-          <p:cNvSpPr txBox="1"/>
-          <p:nvPr/>
-        </p:nvSpPr>
-        <p:spPr>
-          <a:xfrm>
-            <a:off x="320040" y="1691640"/>
-            <a:ext cx="8503920" cy="685800"/>
-          </a:xfrm>
-          <a:prstGeom prst="rect">
-            <a:avLst/>
-          </a:prstGeom>
-          <a:noFill/>
-        </p:spPr>
-        <p:txBody>
-          <a:bodyPr wrap="square">
-            <a:spAutoFit/>
-          </a:bodyPr>
-          <a:lstStyle/>
-          <a:p>
-            <a:pPr algn="l"/>
-            <a:r>
-              <a:rPr sz="950" b="0" i="0">
+              <a:rPr sz="850" b="0" i="0">
                 <a:solidFill>
                   <a:srgbClr val="555555"/>
                 </a:solidFill>
                 <a:latin typeface="Arial"/>
               </a:rPr>
-              <a:t>Ibama e PF multiplicaram autuações e embargos desde 2023. Operações coordenadas reduziram o desmatamento ilegal.</a:t>
-            </a:r>
-          </a:p>
-        </p:txBody>
-      </p:sp>
+              <a:t>Vegetação nativa remanescente por bioma (% da área original)  ·  MapBiomas 2023</a:t>
+            </a:r>
+          </a:p>
+        </p:txBody>
+      </p:sp>
+      <p:pic>
+        <p:nvPicPr>
+          <p:cNvPr id="8" name="Picture 7" descr="image.png"/>
+          <p:cNvPicPr>
+            <a:picLocks noChangeAspect="1"/>
+          </p:cNvPicPr>
+          <p:nvPr/>
+        </p:nvPicPr>
+        <p:blipFill>
+          <a:blip r:embed="rId2"/>
+          <a:stretch>
+            <a:fillRect/>
+          </a:stretch>
+        </p:blipFill>
+        <p:spPr>
+          <a:xfrm>
+            <a:off x="365760" y="1481328"/>
+            <a:ext cx="8412480" cy="3427465"/>
+          </a:xfrm>
+          <a:prstGeom prst="rect">
+            <a:avLst/>
+          </a:prstGeom>
+        </p:spPr>
+      </p:pic>
       <p:sp>
         <p:nvSpPr>
           <p:cNvPr id="9" name="TextBox 8"/>
@@ -10845,134 +12160,29 @@
         </p:nvSpPr>
         <p:spPr>
           <a:xfrm>
-            <a:off x="320040" y="2496312"/>
-            <a:ext cx="8503920" cy="347472"/>
-          </a:xfrm>
-          <a:prstGeom prst="rect">
-            <a:avLst/>
-          </a:prstGeom>
-          <a:noFill/>
-        </p:spPr>
-        <p:txBody>
-          <a:bodyPr wrap="square">
-            <a:spAutoFit/>
-          </a:bodyPr>
-          <a:lstStyle/>
-          <a:p>
-            <a:pPr algn="l"/>
-            <a:r>
-              <a:rPr sz="1100" b="1" i="0">
-                <a:solidFill>
-                  <a:srgbClr val="2E7D32"/>
-                </a:solidFill>
-                <a:latin typeface="Arial"/>
-              </a:rPr>
-              <a:t>▲  Financiamento climático</a:t>
-            </a:r>
-          </a:p>
-        </p:txBody>
-      </p:sp>
-      <p:sp>
-        <p:nvSpPr>
-          <p:cNvPr id="10" name="TextBox 9"/>
-          <p:cNvSpPr txBox="1"/>
-          <p:nvPr/>
-        </p:nvSpPr>
-        <p:spPr>
-          <a:xfrm>
-            <a:off x="320040" y="2834640"/>
-            <a:ext cx="8503920" cy="685800"/>
-          </a:xfrm>
-          <a:prstGeom prst="rect">
-            <a:avLst/>
-          </a:prstGeom>
-          <a:noFill/>
-        </p:spPr>
-        <p:txBody>
-          <a:bodyPr wrap="square">
-            <a:spAutoFit/>
-          </a:bodyPr>
-          <a:lstStyle/>
-          <a:p>
-            <a:pPr algn="l"/>
-            <a:r>
-              <a:rPr sz="950" b="0" i="0">
-                <a:solidFill>
-                  <a:srgbClr val="555555"/>
-                </a:solidFill>
-                <a:latin typeface="Arial"/>
-              </a:rPr>
-              <a:t>Fundo Amazônia recebeu +R$ 3 bi em 2023–24 (Noruega, Alemanha, EUA). Primeira fase do REDD+ Amazon operacional.</a:t>
-            </a:r>
-          </a:p>
-        </p:txBody>
-      </p:sp>
-      <p:sp>
-        <p:nvSpPr>
-          <p:cNvPr id="11" name="TextBox 10"/>
-          <p:cNvSpPr txBox="1"/>
-          <p:nvPr/>
-        </p:nvSpPr>
-        <p:spPr>
-          <a:xfrm>
-            <a:off x="320040" y="3639312"/>
-            <a:ext cx="8503920" cy="347472"/>
-          </a:xfrm>
-          <a:prstGeom prst="rect">
-            <a:avLst/>
-          </a:prstGeom>
-          <a:noFill/>
-        </p:spPr>
-        <p:txBody>
-          <a:bodyPr wrap="square">
-            <a:spAutoFit/>
-          </a:bodyPr>
-          <a:lstStyle/>
-          <a:p>
-            <a:pPr algn="l"/>
-            <a:r>
-              <a:rPr sz="1100" b="1" i="0">
-                <a:solidFill>
-                  <a:srgbClr val="C0392B"/>
-                </a:solidFill>
-                <a:latin typeface="Arial"/>
-              </a:rPr>
-              <a:t>▼  Risco: anistia fundiária</a:t>
-            </a:r>
-          </a:p>
-        </p:txBody>
-      </p:sp>
-      <p:sp>
-        <p:nvSpPr>
-          <p:cNvPr id="12" name="TextBox 11"/>
-          <p:cNvSpPr txBox="1"/>
-          <p:nvPr/>
-        </p:nvSpPr>
-        <p:spPr>
-          <a:xfrm>
-            <a:off x="320040" y="3977639"/>
-            <a:ext cx="8503920" cy="685800"/>
-          </a:xfrm>
-          <a:prstGeom prst="rect">
-            <a:avLst/>
-          </a:prstGeom>
-          <a:noFill/>
-        </p:spPr>
-        <p:txBody>
-          <a:bodyPr wrap="square">
-            <a:spAutoFit/>
-          </a:bodyPr>
-          <a:lstStyle/>
-          <a:p>
-            <a:pPr algn="l"/>
-            <a:r>
-              <a:rPr sz="950" b="0" i="0">
-                <a:solidFill>
-                  <a:srgbClr val="555555"/>
-                </a:solidFill>
-                <a:latin typeface="Arial"/>
-              </a:rPr>
-              <a:t>Projetos de lei que regularizam desmatamentos ilegais antes de 2008 ameaçam criar incentivos para novos crimes ambientais.</a:t>
+            <a:off x="320040" y="4864608"/>
+            <a:ext cx="8503920" cy="256032"/>
+          </a:xfrm>
+          <a:prstGeom prst="rect">
+            <a:avLst/>
+          </a:prstGeom>
+          <a:noFill/>
+        </p:spPr>
+        <p:txBody>
+          <a:bodyPr wrap="square">
+            <a:spAutoFit/>
+          </a:bodyPr>
+          <a:lstStyle/>
+          <a:p>
+            <a:pPr algn="l"/>
+            <a:r>
+              <a:rPr sz="650" b="0" i="0">
+                <a:solidFill>
+                  <a:srgbClr val="999999"/>
+                </a:solidFill>
+                <a:latin typeface="Arial"/>
+              </a:rPr>
+              <a:t>Fonte: MapBiomas 2023 · Mapeamento Anual da Cobertura e Uso da Terra</a:t>
             </a:r>
           </a:p>
         </p:txBody>
